--- a/PPS_Consommation_Hub_Teams/Lecons/2026-10-20_Mardi_Detectives-de-la-pub/1_Diaporama_Grand-groupe.pptx
+++ b/PPS_Consommation_Hub_Teams/Lecons/2026-10-20_Mardi_Detectives-de-la-pub/1_Diaporama_Grand-groupe.pptx
@@ -23,11 +23,9 @@
     <p:sldId id="271" r:id="rId17"/>
     <p:sldId id="272" r:id="rId18"/>
     <p:sldId id="273" r:id="rId19"/>
-    <p:sldId id="274" r:id="rId20"/>
-    <p:sldId id="275" r:id="rId21"/>
   </p:sldIdLst>
   <p:notesMasterIdLst>
-    <p:notesMasterId r:id="rId22"/>
+    <p:notesMasterId r:id="rId20"/>
   </p:notesMasterIdLst>
   <p:sldSz cx="9144000" cy="5143500"/>
   <p:notesSz cx="5143500" cy="9144000"/>
@@ -126,20 +124,20 @@
   <p:extLst>
     <p:ext uri="{521415D9-36F7-43E2-AB2F-B90AF26B5E84}">
       <p14:sectionLst xmlns:p14="http://schemas.microsoft.com/office/powerpoint/2010/main">
-        <p14:section name="Accueil" id="{2611abb0-9a0d-8159-e7a9-280b7e429823}">
+        <p14:section name="Accueil" id="{552154a8-0ae1-b963-76b7-8806740f76e8}">
           <p14:sldIdLst>
             <p14:sldId id="256"/>
             <p14:sldId id="257"/>
             <p14:sldId id="258"/>
           </p14:sldIdLst>
         </p14:section>
-        <p14:section name="Causerie" id="{ec636976-2e14-fe9e-47eb-5ae65df7a51c}">
+        <p14:section name="Causerie" id="{6b54f286-9bd3-9d2c-08d7-10d1a0170da9}">
           <p14:sldIdLst>
             <p14:sldId id="259"/>
             <p14:sldId id="260"/>
           </p14:sldIdLst>
         </p14:section>
-        <p14:section name="Enquêtes" id="{93eaa49b-2d18-e1f6-f8cc-50026a4e95ad}">
+        <p14:section name="Enquêtes" id="{92faf263-adfc-a2ab-ccc0-d8b304b74071}">
           <p14:sldIdLst>
             <p14:sldId id="261"/>
             <p14:sldId id="262"/>
@@ -150,32 +148,22 @@
             <p14:sldId id="267"/>
           </p14:sldIdLst>
         </p14:section>
-        <p14:section name="Synthèse" id="{4cbb6485-a618-7f47-c0dc-d75cd39e2dfa}">
+        <p14:section name="Consolidation" id="{d6afa22e-b792-9381-0538-7e57719bf02b}">
           <p14:sldIdLst>
             <p14:sldId id="268"/>
             <p14:sldId id="269"/>
           </p14:sldIdLst>
         </p14:section>
-        <p14:section name="Pause" id="{63b48d7d-8799-9445-8294-03dda69fd49d}">
+        <p14:section name="Atelier" id="{532817d7-b2ac-64fc-aeca-186f04925bf9}">
           <p14:sldIdLst>
             <p14:sldId id="270"/>
+            <p14:sldId id="271"/>
           </p14:sldIdLst>
         </p14:section>
-        <p14:section name="Atelier" id="{66a8d906-a349-cf57-c423-3c02f849ef85}">
+        <p14:section name="Galerie" id="{02b8ccb9-1170-d5e5-40f8-8e6a93125106}">
           <p14:sldIdLst>
-            <p14:sldId id="271"/>
             <p14:sldId id="272"/>
-          </p14:sldIdLst>
-        </p14:section>
-        <p14:section name="Galerie" id="{f79675e5-f99d-6a33-bf8c-4662753a510c}">
-          <p14:sldIdLst>
             <p14:sldId id="273"/>
-            <p14:sldId id="274"/>
-          </p14:sldIdLst>
-        </p14:section>
-        <p14:section name="Fermeture" id="{c0700573-2acd-9b97-9b01-867e9866b0bf}">
-          <p14:sldIdLst>
-            <p14:sldId id="275"/>
           </p14:sldIdLst>
         </p14:section>
       </p14:sectionLst>
@@ -934,7 +922,7 @@
           <a:p>
             <a:r>
               <a:rPr lang="en-US" dirty="0"/>
-              <a:t>D'abord l'affiche de classe avec les mots des élèves, ensuite cette diapo pour comparer. Les ruses 4, 7 et 8 sont les plus coûteuses : petits caractères, crédit, arnaque. Cahier p. 3. 1. Tout le monde l'a : La pub me fait croire que je serai mis de côté si je ne l'achète pas. 2. Vite, vite ! : La pub me presse pour que je n'aie pas le temps de réfléchir. 3. La vedette : Une personne connue est payée pour dire qu'elle aime le produit. 4. Les petits caractères : L'étoile * cache le vrai prix ou une condition, écrite tout petit. 5. Le prix magique : 9,99 $ semble moins cher que 10 $. Mais c'est presque pareil ! 6. Tu seras plus heureux : La pub me promet du bonheur. Elle crée un faux besoin. 7. Payez plus tard : Je paie quand même… souvent plus cher, avec les intérêts. 8. Le cadeau piège : On veut mes informations ou mon argent : c'est une arnaque.</a:t>
+              <a:t>D'abord l'affiche de classe avec les mots des élèves, ensuite cette diapo pour comparer. Les ruses 4, 7 et 8 sont les plus coûteuses : petits caractères, crédit, arnaque. 1. Tout le monde l'a : La pub me fait croire que je serai mis de côté si je ne l'achète pas. 2. Vite, vite ! : La pub me presse pour que je n'aie pas le temps de réfléchir. 3. La vedette : Une personne connue est payée pour dire qu'elle aime le produit. 4. Les petits caractères : L'étoile * cache le vrai prix ou une condition, écrite tout petit. 5. Le prix magique : 9,99 $ semble moins cher que 10 $. Mais c'est presque pareil ! 6. Tu seras plus heureux : La pub me promet du bonheur. Elle crée un faux besoin. 7. Payez plus tard : Je paie quand même… souvent plus cher, avec les intérêts. 8. Le cadeau piège : On veut mes informations ou mon argent : c'est une arnaque.</a:t>
             </a:r>
             <a:endParaRPr lang="en-US" dirty="0"/>
           </a:p>
@@ -1022,7 +1010,7 @@
           <a:p>
             <a:r>
               <a:rPr lang="en-US" dirty="0"/>
-              <a:t>Les notes sont écrites pour soi-même dans une semaine. Dessin, pictogramme ou dictée à un pair acceptés.</a:t>
+              <a:t>L'espace du cahier est libre (p. 3). Dessin, pictogramme ou dictée à un pair acceptés.</a:t>
             </a:r>
             <a:endParaRPr lang="en-US" dirty="0"/>
           </a:p>
@@ -1110,7 +1098,7 @@
           <a:p>
             <a:r>
               <a:rPr lang="en-US" dirty="0"/>
-              <a:t>Pendant la pause : ouvrir l'atelier HTML sur les ordinateurs (onglet Fabrique) et installer la table de l'atelier papier.</a:t>
+              <a:t>Duos ou trios formés par l'enseignante. Pour simplifier : donner 4 cartes-ruses et en choisir 3. Les produits farfelus évitent de faire la promotion de vraies marques et rendent les ruses plus visibles.</a:t>
             </a:r>
             <a:endParaRPr lang="en-US" dirty="0"/>
           </a:p>
@@ -1198,7 +1186,7 @@
           <a:p>
             <a:r>
               <a:rPr lang="en-US" dirty="0"/>
-              <a:t>Duos ou trios. Pour simplifier : donner 4 cartes-ruses et en choisir 3. Les produits farfelus évitent de faire la promotion de vraies marques et rendent les ruses plus visibles.</a:t>
+              <a:t>Fichier : 3_Atelier-ordi_Piege-le-renard.html (fonctionne sans Internet). Le bouton « Mode détective » permet à une autre équipe de deviner les ruses directement à l'écran.</a:t>
             </a:r>
             <a:endParaRPr lang="en-US" dirty="0"/>
           </a:p>
@@ -1286,7 +1274,7 @@
           <a:p>
             <a:r>
               <a:rPr lang="en-US" dirty="0"/>
-              <a:t>Fichier : 3_Atelier-ordi_Piege-le-renard.html (fonctionne sans Internet). Le bouton « Mode détective » permet à une autre équipe de deviner les ruses directement à l'écran.</a:t>
+              <a:t>Question de fin de galerie : « Quelle ruse était la plus difficile à voir ? Pourquoi ? » C'est souvent les petits caractères : bon moment pour rappeler qu'on cherche toujours l'étoile.</a:t>
             </a:r>
             <a:endParaRPr lang="en-US" dirty="0"/>
           </a:p>
@@ -1374,7 +1362,7 @@
           <a:p>
             <a:r>
               <a:rPr lang="en-US" dirty="0"/>
-              <a:t>Question de fin de galerie : « Quelle ruse était la plus difficile à voir ? Pourquoi ? » C'est souvent les petits caractères : bon moment pour rappeler qu'on cherche toujours l'étoile.</a:t>
+              <a:t>Pratiquer la phrase de refus à voix haute en duo : un élève joue le vendeur insistant, l'autre refuse. Cahier p. 5. Remettre la carte portefeuille « Le bouclier du renard ».</a:t>
             </a:r>
             <a:endParaRPr lang="en-US" dirty="0"/>
           </a:p>
@@ -1398,94 +1386,6 @@
             <a:fld id="{F7021451-1387-4CA6-816F-3879F97B5CBC}" type="slidenum">
               <a:rPr lang="en-US"/>
               <a:t>18</a:t>
-            </a:fld>
-            <a:endParaRPr lang="en-US"/>
-          </a:p>
-        </p:txBody>
-      </p:sp>
-    </p:spTree>
-    <p:extLst>
-      <p:ext uri="{BB962C8B-B14F-4D97-AF65-F5344CB8AC3E}">
-        <p14:creationId xmlns:p14="http://schemas.microsoft.com/office/powerpoint/2010/main" val="1024086991"/>
-      </p:ext>
-    </p:extLst>
-  </p:cSld>
-  <p:clrMapOvr>
-    <a:masterClrMapping/>
-  </p:clrMapOvr>
-</p:notes>
-</file>
-
-<file path=ppt/notesSlides/notesSlide19.xml><?xml version="1.0" encoding="utf-8"?>
-<p:notes xmlns:a="http://schemas.openxmlformats.org/drawingml/2006/main" xmlns:r="http://schemas.openxmlformats.org/officeDocument/2006/relationships" xmlns:p="http://schemas.openxmlformats.org/presentationml/2006/main">
-  <p:cSld>
-    <p:spTree>
-      <p:nvGrpSpPr>
-        <p:cNvPr id="1" name=""/>
-        <p:cNvGrpSpPr/>
-        <p:nvPr/>
-      </p:nvGrpSpPr>
-      <p:grpSpPr>
-        <a:xfrm>
-          <a:off x="0" y="0"/>
-          <a:ext cx="0" cy="0"/>
-          <a:chOff x="0" y="0"/>
-          <a:chExt cx="0" cy="0"/>
-        </a:xfrm>
-      </p:grpSpPr>
-      <p:sp>
-        <p:nvSpPr>
-          <p:cNvPr id="2" name="Slide Image Placeholder 1"/>
-          <p:cNvSpPr>
-            <a:spLocks noGrp="1" noRot="1" noChangeAspect="1"/>
-          </p:cNvSpPr>
-          <p:nvPr>
-            <p:ph type="sldImg"/>
-          </p:nvPr>
-        </p:nvSpPr>
-        <p:spPr/>
-      </p:sp>
-      <p:sp>
-        <p:nvSpPr>
-          <p:cNvPr id="3" name="Notes Placeholder 2"/>
-          <p:cNvSpPr>
-            <a:spLocks noGrp="1"/>
-          </p:cNvSpPr>
-          <p:nvPr>
-            <p:ph type="body" idx="1"/>
-          </p:nvPr>
-        </p:nvSpPr>
-        <p:spPr/>
-        <p:txBody>
-          <a:bodyPr/>
-          <a:lstStyle/>
-          <a:p>
-            <a:r>
-              <a:rPr lang="en-US" dirty="0"/>
-              <a:t>Pratiquer la phrase de refus à voix haute en duo : un élève joue le vendeur insistant, l'autre refuse. Cahier p. 5. Remettre la carte portefeuille « Le bouclier du renard ».</a:t>
-            </a:r>
-            <a:endParaRPr lang="en-US" dirty="0"/>
-          </a:p>
-        </p:txBody>
-      </p:sp>
-      <p:sp>
-        <p:nvSpPr>
-          <p:cNvPr id="4" name="Slide Number Placeholder 3"/>
-          <p:cNvSpPr>
-            <a:spLocks noGrp="1"/>
-          </p:cNvSpPr>
-          <p:nvPr>
-            <p:ph type="sldNum" sz="quarter" idx="10"/>
-          </p:nvPr>
-        </p:nvSpPr>
-        <p:spPr/>
-        <p:txBody>
-          <a:bodyPr/>
-          <a:lstStyle/>
-          <a:p>
-            <a:fld id="{F7021451-1387-4CA6-816F-3879F97B5CBC}" type="slidenum">
-              <a:rPr lang="en-US"/>
-              <a:t>19</a:t>
             </a:fld>
             <a:endParaRPr lang="en-US"/>
           </a:p>
@@ -1592,94 +1492,6 @@
 </p:notes>
 </file>
 
-<file path=ppt/notesSlides/notesSlide20.xml><?xml version="1.0" encoding="utf-8"?>
-<p:notes xmlns:a="http://schemas.openxmlformats.org/drawingml/2006/main" xmlns:r="http://schemas.openxmlformats.org/officeDocument/2006/relationships" xmlns:p="http://schemas.openxmlformats.org/presentationml/2006/main">
-  <p:cSld>
-    <p:spTree>
-      <p:nvGrpSpPr>
-        <p:cNvPr id="1" name=""/>
-        <p:cNvGrpSpPr/>
-        <p:nvPr/>
-      </p:nvGrpSpPr>
-      <p:grpSpPr>
-        <a:xfrm>
-          <a:off x="0" y="0"/>
-          <a:ext cx="0" cy="0"/>
-          <a:chOff x="0" y="0"/>
-          <a:chExt cx="0" cy="0"/>
-        </a:xfrm>
-      </p:grpSpPr>
-      <p:sp>
-        <p:nvSpPr>
-          <p:cNvPr id="2" name="Slide Image Placeholder 1"/>
-          <p:cNvSpPr>
-            <a:spLocks noGrp="1" noRot="1" noChangeAspect="1"/>
-          </p:cNvSpPr>
-          <p:nvPr>
-            <p:ph type="sldImg"/>
-          </p:nvPr>
-        </p:nvSpPr>
-        <p:spPr/>
-      </p:sp>
-      <p:sp>
-        <p:nvSpPr>
-          <p:cNvPr id="3" name="Notes Placeholder 2"/>
-          <p:cNvSpPr>
-            <a:spLocks noGrp="1"/>
-          </p:cNvSpPr>
-          <p:nvPr>
-            <p:ph type="body" idx="1"/>
-          </p:nvPr>
-        </p:nvSpPr>
-        <p:spPr/>
-        <p:txBody>
-          <a:bodyPr/>
-          <a:lstStyle/>
-          <a:p>
-            <a:r>
-              <a:rPr lang="en-US" dirty="0"/>
-              <a:t>Le feu de circulation sert à planifier la différenciation. Mission maison : expliquer une pub à un proche, avec ses ruses et son vrai prix.</a:t>
-            </a:r>
-            <a:endParaRPr lang="en-US" dirty="0"/>
-          </a:p>
-        </p:txBody>
-      </p:sp>
-      <p:sp>
-        <p:nvSpPr>
-          <p:cNvPr id="4" name="Slide Number Placeholder 3"/>
-          <p:cNvSpPr>
-            <a:spLocks noGrp="1"/>
-          </p:cNvSpPr>
-          <p:nvPr>
-            <p:ph type="sldNum" sz="quarter" idx="10"/>
-          </p:nvPr>
-        </p:nvSpPr>
-        <p:spPr/>
-        <p:txBody>
-          <a:bodyPr/>
-          <a:lstStyle/>
-          <a:p>
-            <a:fld id="{F7021451-1387-4CA6-816F-3879F97B5CBC}" type="slidenum">
-              <a:rPr lang="en-US"/>
-              <a:t>20</a:t>
-            </a:fld>
-            <a:endParaRPr lang="en-US"/>
-          </a:p>
-        </p:txBody>
-      </p:sp>
-    </p:spTree>
-    <p:extLst>
-      <p:ext uri="{BB962C8B-B14F-4D97-AF65-F5344CB8AC3E}">
-        <p14:creationId xmlns:p14="http://schemas.microsoft.com/office/powerpoint/2010/main" val="1024086991"/>
-      </p:ext>
-    </p:extLst>
-  </p:cSld>
-  <p:clrMapOvr>
-    <a:masterClrMapping/>
-  </p:clrMapOvr>
-</p:notes>
-</file>
-
 <file path=ppt/notesSlides/notesSlide3.xml><?xml version="1.0" encoding="utf-8"?>
 <p:notes xmlns:a="http://schemas.openxmlformats.org/drawingml/2006/main" xmlns:r="http://schemas.openxmlformats.org/officeDocument/2006/relationships" xmlns:p="http://schemas.openxmlformats.org/presentationml/2006/main">
   <p:cSld>
@@ -1990,7 +1802,7 @@
           <a:p>
             <a:r>
               <a:rPr lang="en-US" dirty="0"/>
-              <a:t>Classe collabo-réflexive : mêmes gestes que la semaine passée. Donner la pub suivante dès qu'une enquête est réussie. Répondre aux questions par des questions : « Qu'est-ce que l'étoile veut dire ? », « Combien en un an ? ».</a:t>
+              <a:t>Mêmes façons de faire que la semaine passée. Donner la pub suivante dès qu'une enquête est réussie. Répondre aux questions par des questions : « Qu'est-ce que l'étoile veut dire ? », « Combien en un an ? ».</a:t>
             </a:r>
             <a:endParaRPr lang="en-US" dirty="0"/>
           </a:p>
@@ -3734,14 +3546,78 @@
       </p:sp>
       <p:sp>
         <p:nvSpPr>
-          <p:cNvPr id="4" name="Text 2"/>
+          <p:cNvPr id="4" name="Shape 2"/>
+          <p:cNvSpPr/>
+          <p:nvPr/>
+        </p:nvSpPr>
+        <p:spPr>
+          <a:xfrm>
+            <a:off x="1353312" y="1280160"/>
+            <a:ext cx="438912" cy="438912"/>
+          </a:xfrm>
+          <a:prstGeom prst="ellipse">
+            <a:avLst/>
+          </a:prstGeom>
+          <a:solidFill>
+            <a:schemeClr val="accent1"/>
+          </a:solidFill>
+          <a:ln w="12700">
+            <a:solidFill>
+              <a:schemeClr val="accent1"/>
+            </a:solidFill>
+            <a:prstDash val="solid"/>
+          </a:ln>
+        </p:spPr>
+      </p:sp>
+      <p:sp>
+        <p:nvSpPr>
+          <p:cNvPr id="5" name="Text 3"/>
           <p:cNvSpPr txBox="1"/>
           <p:nvPr/>
         </p:nvSpPr>
         <p:spPr>
           <a:xfrm>
-            <a:off x="640080" y="1261872"/>
-            <a:ext cx="1874520" cy="502920"/>
+            <a:off x="1353312" y="1280160"/>
+            <a:ext cx="438912" cy="438912"/>
+          </a:xfrm>
+          <a:prstGeom prst="rect">
+            <a:avLst/>
+          </a:prstGeom>
+          <a:noFill/>
+          <a:ln/>
+        </p:spPr>
+        <p:txBody>
+          <a:bodyPr wrap="square" lIns="0" tIns="0" rIns="0" bIns="0" rtlCol="0" anchor="ctr"/>
+          <a:lstStyle/>
+          <a:p>
+            <a:pPr algn="ctr" indent="0" marL="0">
+              <a:buNone/>
+            </a:pPr>
+            <a:r>
+              <a:rPr lang="en-US" sz="1632" b="1" dirty="0">
+                <a:solidFill>
+                  <a:srgbClr val="FFFFFF"/>
+                </a:solidFill>
+                <a:latin typeface="Century Gothic" pitchFamily="34" charset="0"/>
+                <a:ea typeface="Century Gothic" pitchFamily="34" charset="-122"/>
+                <a:cs typeface="Century Gothic" pitchFamily="34" charset="-120"/>
+              </a:rPr>
+              <a:t>1</a:t>
+            </a:r>
+            <a:endParaRPr lang="en-US" sz="1632" dirty="0"/>
+          </a:p>
+        </p:txBody>
+      </p:sp>
+      <p:sp>
+        <p:nvSpPr>
+          <p:cNvPr id="6" name="Text 4"/>
+          <p:cNvSpPr txBox="1"/>
+          <p:nvPr/>
+        </p:nvSpPr>
+        <p:spPr>
+          <a:xfrm>
+            <a:off x="640080" y="1755648"/>
+            <a:ext cx="1874520" cy="457200"/>
           </a:xfrm>
           <a:prstGeom prst="rect">
             <a:avLst/>
@@ -3757,7 +3633,46 @@
               <a:buNone/>
             </a:pPr>
             <a:r>
-              <a:rPr lang="en-US" sz="2400" dirty="0">
+              <a:rPr lang="en-US" sz="1300" b="1" dirty="0">
+                <a:solidFill>
+                  <a:schemeClr val="tx1"/>
+                </a:solidFill>
+                <a:latin typeface="Century Gothic" pitchFamily="34" charset="0"/>
+                <a:ea typeface="Century Gothic" pitchFamily="34" charset="-122"/>
+                <a:cs typeface="Century Gothic" pitchFamily="34" charset="-120"/>
+              </a:rPr>
+              <a:t>Tout le monde l'a</a:t>
+            </a:r>
+            <a:endParaRPr lang="en-US" sz="1300" dirty="0"/>
+          </a:p>
+        </p:txBody>
+      </p:sp>
+      <p:sp>
+        <p:nvSpPr>
+          <p:cNvPr id="7" name="Text 5"/>
+          <p:cNvSpPr txBox="1"/>
+          <p:nvPr/>
+        </p:nvSpPr>
+        <p:spPr>
+          <a:xfrm>
+            <a:off x="713232" y="2194560"/>
+            <a:ext cx="1737360" cy="548640"/>
+          </a:xfrm>
+          <a:prstGeom prst="rect">
+            <a:avLst/>
+          </a:prstGeom>
+          <a:noFill/>
+          <a:ln/>
+        </p:spPr>
+        <p:txBody>
+          <a:bodyPr wrap="square" lIns="1016" tIns="1016" rIns="1016" bIns="1016" rtlCol="0" anchor="t"/>
+          <a:lstStyle/>
+          <a:p>
+            <a:pPr algn="ctr" indent="0" marL="0">
+              <a:buNone/>
+            </a:pPr>
+            <a:r>
+              <a:rPr lang="en-US" sz="1100" i="1" dirty="0">
                 <a:solidFill>
                   <a:schemeClr val="tx1"/>
                 </a:solidFill>
@@ -3765,84 +3680,6 @@
                 <a:ea typeface="Calibri" pitchFamily="34" charset="-122"/>
                 <a:cs typeface="Calibri" pitchFamily="34" charset="-120"/>
               </a:rPr>
-              <a:t>👥</a:t>
-            </a:r>
-            <a:endParaRPr lang="en-US" sz="2400" dirty="0"/>
-          </a:p>
-        </p:txBody>
-      </p:sp>
-      <p:sp>
-        <p:nvSpPr>
-          <p:cNvPr id="5" name="Text 3"/>
-          <p:cNvSpPr txBox="1"/>
-          <p:nvPr/>
-        </p:nvSpPr>
-        <p:spPr>
-          <a:xfrm>
-            <a:off x="640080" y="1755648"/>
-            <a:ext cx="1874520" cy="457200"/>
-          </a:xfrm>
-          <a:prstGeom prst="rect">
-            <a:avLst/>
-          </a:prstGeom>
-          <a:noFill/>
-          <a:ln/>
-        </p:spPr>
-        <p:txBody>
-          <a:bodyPr wrap="square" lIns="1016" tIns="1016" rIns="1016" bIns="1016" rtlCol="0" anchor="t"/>
-          <a:lstStyle/>
-          <a:p>
-            <a:pPr algn="ctr" indent="0" marL="0">
-              <a:buNone/>
-            </a:pPr>
-            <a:r>
-              <a:rPr lang="en-US" sz="1300" b="1" dirty="0">
-                <a:solidFill>
-                  <a:schemeClr val="tx1"/>
-                </a:solidFill>
-                <a:latin typeface="Century Gothic" pitchFamily="34" charset="0"/>
-                <a:ea typeface="Century Gothic" pitchFamily="34" charset="-122"/>
-                <a:cs typeface="Century Gothic" pitchFamily="34" charset="-120"/>
-              </a:rPr>
-              <a:t>1. Tout le monde l'a</a:t>
-            </a:r>
-            <a:endParaRPr lang="en-US" sz="1300" dirty="0"/>
-          </a:p>
-        </p:txBody>
-      </p:sp>
-      <p:sp>
-        <p:nvSpPr>
-          <p:cNvPr id="6" name="Text 4"/>
-          <p:cNvSpPr txBox="1"/>
-          <p:nvPr/>
-        </p:nvSpPr>
-        <p:spPr>
-          <a:xfrm>
-            <a:off x="713232" y="2194560"/>
-            <a:ext cx="1737360" cy="548640"/>
-          </a:xfrm>
-          <a:prstGeom prst="rect">
-            <a:avLst/>
-          </a:prstGeom>
-          <a:noFill/>
-          <a:ln/>
-        </p:spPr>
-        <p:txBody>
-          <a:bodyPr wrap="square" lIns="1016" tIns="1016" rIns="1016" bIns="1016" rtlCol="0" anchor="t"/>
-          <a:lstStyle/>
-          <a:p>
-            <a:pPr algn="ctr" indent="0" marL="0">
-              <a:buNone/>
-            </a:pPr>
-            <a:r>
-              <a:rPr lang="en-US" sz="1100" i="1" dirty="0">
-                <a:solidFill>
-                  <a:schemeClr val="tx1"/>
-                </a:solidFill>
-                <a:latin typeface="Calibri" pitchFamily="34" charset="0"/>
-                <a:ea typeface="Calibri" pitchFamily="34" charset="-122"/>
-                <a:cs typeface="Calibri" pitchFamily="34" charset="-120"/>
-              </a:rPr>
               <a:t>« Tous tes amis l'ont déjà ! »</a:t>
             </a:r>
             <a:endParaRPr lang="en-US" sz="1100" dirty="0"/>
@@ -3851,7 +3688,7 @@
       </p:sp>
       <p:sp>
         <p:nvSpPr>
-          <p:cNvPr id="7" name="carte"/>
+          <p:cNvPr id="8" name="carte"/>
           <p:cNvSpPr/>
           <p:nvPr/>
         </p:nvSpPr>
@@ -3885,14 +3722,78 @@
       </p:sp>
       <p:sp>
         <p:nvSpPr>
-          <p:cNvPr id="8" name="Text 6"/>
+          <p:cNvPr id="9" name="Shape 7"/>
+          <p:cNvSpPr/>
+          <p:nvPr/>
+        </p:nvSpPr>
+        <p:spPr>
+          <a:xfrm>
+            <a:off x="3364992" y="1280160"/>
+            <a:ext cx="438912" cy="438912"/>
+          </a:xfrm>
+          <a:prstGeom prst="ellipse">
+            <a:avLst/>
+          </a:prstGeom>
+          <a:solidFill>
+            <a:schemeClr val="accent1"/>
+          </a:solidFill>
+          <a:ln w="12700">
+            <a:solidFill>
+              <a:schemeClr val="accent1"/>
+            </a:solidFill>
+            <a:prstDash val="solid"/>
+          </a:ln>
+        </p:spPr>
+      </p:sp>
+      <p:sp>
+        <p:nvSpPr>
+          <p:cNvPr id="10" name="Text 8"/>
           <p:cNvSpPr txBox="1"/>
           <p:nvPr/>
         </p:nvSpPr>
         <p:spPr>
           <a:xfrm>
-            <a:off x="2651760" y="1261872"/>
-            <a:ext cx="1874520" cy="502920"/>
+            <a:off x="3364992" y="1280160"/>
+            <a:ext cx="438912" cy="438912"/>
+          </a:xfrm>
+          <a:prstGeom prst="rect">
+            <a:avLst/>
+          </a:prstGeom>
+          <a:noFill/>
+          <a:ln/>
+        </p:spPr>
+        <p:txBody>
+          <a:bodyPr wrap="square" lIns="0" tIns="0" rIns="0" bIns="0" rtlCol="0" anchor="ctr"/>
+          <a:lstStyle/>
+          <a:p>
+            <a:pPr algn="ctr" indent="0" marL="0">
+              <a:buNone/>
+            </a:pPr>
+            <a:r>
+              <a:rPr lang="en-US" sz="1632" b="1" dirty="0">
+                <a:solidFill>
+                  <a:srgbClr val="FFFFFF"/>
+                </a:solidFill>
+                <a:latin typeface="Century Gothic" pitchFamily="34" charset="0"/>
+                <a:ea typeface="Century Gothic" pitchFamily="34" charset="-122"/>
+                <a:cs typeface="Century Gothic" pitchFamily="34" charset="-120"/>
+              </a:rPr>
+              <a:t>2</a:t>
+            </a:r>
+            <a:endParaRPr lang="en-US" sz="1632" dirty="0"/>
+          </a:p>
+        </p:txBody>
+      </p:sp>
+      <p:sp>
+        <p:nvSpPr>
+          <p:cNvPr id="11" name="Text 9"/>
+          <p:cNvSpPr txBox="1"/>
+          <p:nvPr/>
+        </p:nvSpPr>
+        <p:spPr>
+          <a:xfrm>
+            <a:off x="2651760" y="1755648"/>
+            <a:ext cx="1874520" cy="457200"/>
           </a:xfrm>
           <a:prstGeom prst="rect">
             <a:avLst/>
@@ -3908,7 +3809,46 @@
               <a:buNone/>
             </a:pPr>
             <a:r>
-              <a:rPr lang="en-US" sz="2400" dirty="0">
+              <a:rPr lang="en-US" sz="1300" b="1" dirty="0">
+                <a:solidFill>
+                  <a:schemeClr val="tx1"/>
+                </a:solidFill>
+                <a:latin typeface="Century Gothic" pitchFamily="34" charset="0"/>
+                <a:ea typeface="Century Gothic" pitchFamily="34" charset="-122"/>
+                <a:cs typeface="Century Gothic" pitchFamily="34" charset="-120"/>
+              </a:rPr>
+              <a:t>Vite, vite !</a:t>
+            </a:r>
+            <a:endParaRPr lang="en-US" sz="1300" dirty="0"/>
+          </a:p>
+        </p:txBody>
+      </p:sp>
+      <p:sp>
+        <p:nvSpPr>
+          <p:cNvPr id="12" name="Text 10"/>
+          <p:cNvSpPr txBox="1"/>
+          <p:nvPr/>
+        </p:nvSpPr>
+        <p:spPr>
+          <a:xfrm>
+            <a:off x="2724912" y="2194560"/>
+            <a:ext cx="1737360" cy="548640"/>
+          </a:xfrm>
+          <a:prstGeom prst="rect">
+            <a:avLst/>
+          </a:prstGeom>
+          <a:noFill/>
+          <a:ln/>
+        </p:spPr>
+        <p:txBody>
+          <a:bodyPr wrap="square" lIns="1016" tIns="1016" rIns="1016" bIns="1016" rtlCol="0" anchor="t"/>
+          <a:lstStyle/>
+          <a:p>
+            <a:pPr algn="ctr" indent="0" marL="0">
+              <a:buNone/>
+            </a:pPr>
+            <a:r>
+              <a:rPr lang="en-US" sz="1100" i="1" dirty="0">
                 <a:solidFill>
                   <a:schemeClr val="tx1"/>
                 </a:solidFill>
@@ -3916,84 +3856,6 @@
                 <a:ea typeface="Calibri" pitchFamily="34" charset="-122"/>
                 <a:cs typeface="Calibri" pitchFamily="34" charset="-120"/>
               </a:rPr>
-              <a:t>⏰</a:t>
-            </a:r>
-            <a:endParaRPr lang="en-US" sz="2400" dirty="0"/>
-          </a:p>
-        </p:txBody>
-      </p:sp>
-      <p:sp>
-        <p:nvSpPr>
-          <p:cNvPr id="9" name="Text 7"/>
-          <p:cNvSpPr txBox="1"/>
-          <p:nvPr/>
-        </p:nvSpPr>
-        <p:spPr>
-          <a:xfrm>
-            <a:off x="2651760" y="1755648"/>
-            <a:ext cx="1874520" cy="457200"/>
-          </a:xfrm>
-          <a:prstGeom prst="rect">
-            <a:avLst/>
-          </a:prstGeom>
-          <a:noFill/>
-          <a:ln/>
-        </p:spPr>
-        <p:txBody>
-          <a:bodyPr wrap="square" lIns="1016" tIns="1016" rIns="1016" bIns="1016" rtlCol="0" anchor="t"/>
-          <a:lstStyle/>
-          <a:p>
-            <a:pPr algn="ctr" indent="0" marL="0">
-              <a:buNone/>
-            </a:pPr>
-            <a:r>
-              <a:rPr lang="en-US" sz="1300" b="1" dirty="0">
-                <a:solidFill>
-                  <a:schemeClr val="tx1"/>
-                </a:solidFill>
-                <a:latin typeface="Century Gothic" pitchFamily="34" charset="0"/>
-                <a:ea typeface="Century Gothic" pitchFamily="34" charset="-122"/>
-                <a:cs typeface="Century Gothic" pitchFamily="34" charset="-120"/>
-              </a:rPr>
-              <a:t>2. Vite, vite !</a:t>
-            </a:r>
-            <a:endParaRPr lang="en-US" sz="1300" dirty="0"/>
-          </a:p>
-        </p:txBody>
-      </p:sp>
-      <p:sp>
-        <p:nvSpPr>
-          <p:cNvPr id="10" name="Text 8"/>
-          <p:cNvSpPr txBox="1"/>
-          <p:nvPr/>
-        </p:nvSpPr>
-        <p:spPr>
-          <a:xfrm>
-            <a:off x="2724912" y="2194560"/>
-            <a:ext cx="1737360" cy="548640"/>
-          </a:xfrm>
-          <a:prstGeom prst="rect">
-            <a:avLst/>
-          </a:prstGeom>
-          <a:noFill/>
-          <a:ln/>
-        </p:spPr>
-        <p:txBody>
-          <a:bodyPr wrap="square" lIns="1016" tIns="1016" rIns="1016" bIns="1016" rtlCol="0" anchor="t"/>
-          <a:lstStyle/>
-          <a:p>
-            <a:pPr algn="ctr" indent="0" marL="0">
-              <a:buNone/>
-            </a:pPr>
-            <a:r>
-              <a:rPr lang="en-US" sz="1100" i="1" dirty="0">
-                <a:solidFill>
-                  <a:schemeClr val="tx1"/>
-                </a:solidFill>
-                <a:latin typeface="Calibri" pitchFamily="34" charset="0"/>
-                <a:ea typeface="Calibri" pitchFamily="34" charset="-122"/>
-                <a:cs typeface="Calibri" pitchFamily="34" charset="-120"/>
-              </a:rPr>
               <a:t>« Aujourd'hui seulement ! Il en reste 3 ! »</a:t>
             </a:r>
             <a:endParaRPr lang="en-US" sz="1100" dirty="0"/>
@@ -4002,7 +3864,7 @@
       </p:sp>
       <p:sp>
         <p:nvSpPr>
-          <p:cNvPr id="11" name="carte"/>
+          <p:cNvPr id="13" name="carte"/>
           <p:cNvSpPr/>
           <p:nvPr/>
         </p:nvSpPr>
@@ -4036,14 +3898,78 @@
       </p:sp>
       <p:sp>
         <p:nvSpPr>
-          <p:cNvPr id="12" name="Text 10"/>
+          <p:cNvPr id="14" name="Shape 12"/>
+          <p:cNvSpPr/>
+          <p:nvPr/>
+        </p:nvSpPr>
+        <p:spPr>
+          <a:xfrm>
+            <a:off x="5376672" y="1280160"/>
+            <a:ext cx="438912" cy="438912"/>
+          </a:xfrm>
+          <a:prstGeom prst="ellipse">
+            <a:avLst/>
+          </a:prstGeom>
+          <a:solidFill>
+            <a:schemeClr val="accent1"/>
+          </a:solidFill>
+          <a:ln w="12700">
+            <a:solidFill>
+              <a:schemeClr val="accent1"/>
+            </a:solidFill>
+            <a:prstDash val="solid"/>
+          </a:ln>
+        </p:spPr>
+      </p:sp>
+      <p:sp>
+        <p:nvSpPr>
+          <p:cNvPr id="15" name="Text 13"/>
           <p:cNvSpPr txBox="1"/>
           <p:nvPr/>
         </p:nvSpPr>
         <p:spPr>
           <a:xfrm>
-            <a:off x="4663440" y="1261872"/>
-            <a:ext cx="1874520" cy="502920"/>
+            <a:off x="5376672" y="1280160"/>
+            <a:ext cx="438912" cy="438912"/>
+          </a:xfrm>
+          <a:prstGeom prst="rect">
+            <a:avLst/>
+          </a:prstGeom>
+          <a:noFill/>
+          <a:ln/>
+        </p:spPr>
+        <p:txBody>
+          <a:bodyPr wrap="square" lIns="0" tIns="0" rIns="0" bIns="0" rtlCol="0" anchor="ctr"/>
+          <a:lstStyle/>
+          <a:p>
+            <a:pPr algn="ctr" indent="0" marL="0">
+              <a:buNone/>
+            </a:pPr>
+            <a:r>
+              <a:rPr lang="en-US" sz="1632" b="1" dirty="0">
+                <a:solidFill>
+                  <a:srgbClr val="FFFFFF"/>
+                </a:solidFill>
+                <a:latin typeface="Century Gothic" pitchFamily="34" charset="0"/>
+                <a:ea typeface="Century Gothic" pitchFamily="34" charset="-122"/>
+                <a:cs typeface="Century Gothic" pitchFamily="34" charset="-120"/>
+              </a:rPr>
+              <a:t>3</a:t>
+            </a:r>
+            <a:endParaRPr lang="en-US" sz="1632" dirty="0"/>
+          </a:p>
+        </p:txBody>
+      </p:sp>
+      <p:sp>
+        <p:nvSpPr>
+          <p:cNvPr id="16" name="Text 14"/>
+          <p:cNvSpPr txBox="1"/>
+          <p:nvPr/>
+        </p:nvSpPr>
+        <p:spPr>
+          <a:xfrm>
+            <a:off x="4663440" y="1755648"/>
+            <a:ext cx="1874520" cy="457200"/>
           </a:xfrm>
           <a:prstGeom prst="rect">
             <a:avLst/>
@@ -4059,7 +3985,46 @@
               <a:buNone/>
             </a:pPr>
             <a:r>
-              <a:rPr lang="en-US" sz="2400" dirty="0">
+              <a:rPr lang="en-US" sz="1300" b="1" dirty="0">
+                <a:solidFill>
+                  <a:schemeClr val="tx1"/>
+                </a:solidFill>
+                <a:latin typeface="Century Gothic" pitchFamily="34" charset="0"/>
+                <a:ea typeface="Century Gothic" pitchFamily="34" charset="-122"/>
+                <a:cs typeface="Century Gothic" pitchFamily="34" charset="-120"/>
+              </a:rPr>
+              <a:t>La vedette</a:t>
+            </a:r>
+            <a:endParaRPr lang="en-US" sz="1300" dirty="0"/>
+          </a:p>
+        </p:txBody>
+      </p:sp>
+      <p:sp>
+        <p:nvSpPr>
+          <p:cNvPr id="17" name="Text 15"/>
+          <p:cNvSpPr txBox="1"/>
+          <p:nvPr/>
+        </p:nvSpPr>
+        <p:spPr>
+          <a:xfrm>
+            <a:off x="4736592" y="2194560"/>
+            <a:ext cx="1737360" cy="548640"/>
+          </a:xfrm>
+          <a:prstGeom prst="rect">
+            <a:avLst/>
+          </a:prstGeom>
+          <a:noFill/>
+          <a:ln/>
+        </p:spPr>
+        <p:txBody>
+          <a:bodyPr wrap="square" lIns="1016" tIns="1016" rIns="1016" bIns="1016" rtlCol="0" anchor="t"/>
+          <a:lstStyle/>
+          <a:p>
+            <a:pPr algn="ctr" indent="0" marL="0">
+              <a:buNone/>
+            </a:pPr>
+            <a:r>
+              <a:rPr lang="en-US" sz="1100" i="1" dirty="0">
                 <a:solidFill>
                   <a:schemeClr val="tx1"/>
                 </a:solidFill>
@@ -4067,84 +4032,6 @@
                 <a:ea typeface="Calibri" pitchFamily="34" charset="-122"/>
                 <a:cs typeface="Calibri" pitchFamily="34" charset="-120"/>
               </a:rPr>
-              <a:t>⭐</a:t>
-            </a:r>
-            <a:endParaRPr lang="en-US" sz="2400" dirty="0"/>
-          </a:p>
-        </p:txBody>
-      </p:sp>
-      <p:sp>
-        <p:nvSpPr>
-          <p:cNvPr id="13" name="Text 11"/>
-          <p:cNvSpPr txBox="1"/>
-          <p:nvPr/>
-        </p:nvSpPr>
-        <p:spPr>
-          <a:xfrm>
-            <a:off x="4663440" y="1755648"/>
-            <a:ext cx="1874520" cy="457200"/>
-          </a:xfrm>
-          <a:prstGeom prst="rect">
-            <a:avLst/>
-          </a:prstGeom>
-          <a:noFill/>
-          <a:ln/>
-        </p:spPr>
-        <p:txBody>
-          <a:bodyPr wrap="square" lIns="1016" tIns="1016" rIns="1016" bIns="1016" rtlCol="0" anchor="t"/>
-          <a:lstStyle/>
-          <a:p>
-            <a:pPr algn="ctr" indent="0" marL="0">
-              <a:buNone/>
-            </a:pPr>
-            <a:r>
-              <a:rPr lang="en-US" sz="1300" b="1" dirty="0">
-                <a:solidFill>
-                  <a:schemeClr val="tx1"/>
-                </a:solidFill>
-                <a:latin typeface="Century Gothic" pitchFamily="34" charset="0"/>
-                <a:ea typeface="Century Gothic" pitchFamily="34" charset="-122"/>
-                <a:cs typeface="Century Gothic" pitchFamily="34" charset="-120"/>
-              </a:rPr>
-              <a:t>3. La vedette</a:t>
-            </a:r>
-            <a:endParaRPr lang="en-US" sz="1300" dirty="0"/>
-          </a:p>
-        </p:txBody>
-      </p:sp>
-      <p:sp>
-        <p:nvSpPr>
-          <p:cNvPr id="14" name="Text 12"/>
-          <p:cNvSpPr txBox="1"/>
-          <p:nvPr/>
-        </p:nvSpPr>
-        <p:spPr>
-          <a:xfrm>
-            <a:off x="4736592" y="2194560"/>
-            <a:ext cx="1737360" cy="548640"/>
-          </a:xfrm>
-          <a:prstGeom prst="rect">
-            <a:avLst/>
-          </a:prstGeom>
-          <a:noFill/>
-          <a:ln/>
-        </p:spPr>
-        <p:txBody>
-          <a:bodyPr wrap="square" lIns="1016" tIns="1016" rIns="1016" bIns="1016" rtlCol="0" anchor="t"/>
-          <a:lstStyle/>
-          <a:p>
-            <a:pPr algn="ctr" indent="0" marL="0">
-              <a:buNone/>
-            </a:pPr>
-            <a:r>
-              <a:rPr lang="en-US" sz="1100" i="1" dirty="0">
-                <a:solidFill>
-                  <a:schemeClr val="tx1"/>
-                </a:solidFill>
-                <a:latin typeface="Calibri" pitchFamily="34" charset="0"/>
-                <a:ea typeface="Calibri" pitchFamily="34" charset="-122"/>
-                <a:cs typeface="Calibri" pitchFamily="34" charset="-120"/>
-              </a:rPr>
               <a:t>« Max, le champion, l'adore ! »</a:t>
             </a:r>
             <a:endParaRPr lang="en-US" sz="1100" dirty="0"/>
@@ -4153,7 +4040,7 @@
       </p:sp>
       <p:sp>
         <p:nvSpPr>
-          <p:cNvPr id="15" name="carte"/>
+          <p:cNvPr id="18" name="carte"/>
           <p:cNvSpPr/>
           <p:nvPr/>
         </p:nvSpPr>
@@ -4187,14 +4074,78 @@
       </p:sp>
       <p:sp>
         <p:nvSpPr>
-          <p:cNvPr id="16" name="Text 14"/>
+          <p:cNvPr id="19" name="Shape 17"/>
+          <p:cNvSpPr/>
+          <p:nvPr/>
+        </p:nvSpPr>
+        <p:spPr>
+          <a:xfrm>
+            <a:off x="7388352" y="1280160"/>
+            <a:ext cx="438912" cy="438912"/>
+          </a:xfrm>
+          <a:prstGeom prst="ellipse">
+            <a:avLst/>
+          </a:prstGeom>
+          <a:solidFill>
+            <a:schemeClr val="accent1"/>
+          </a:solidFill>
+          <a:ln w="12700">
+            <a:solidFill>
+              <a:schemeClr val="accent1"/>
+            </a:solidFill>
+            <a:prstDash val="solid"/>
+          </a:ln>
+        </p:spPr>
+      </p:sp>
+      <p:sp>
+        <p:nvSpPr>
+          <p:cNvPr id="20" name="Text 18"/>
           <p:cNvSpPr txBox="1"/>
           <p:nvPr/>
         </p:nvSpPr>
         <p:spPr>
           <a:xfrm>
-            <a:off x="6675120" y="1261872"/>
-            <a:ext cx="1874520" cy="502920"/>
+            <a:off x="7388352" y="1280160"/>
+            <a:ext cx="438912" cy="438912"/>
+          </a:xfrm>
+          <a:prstGeom prst="rect">
+            <a:avLst/>
+          </a:prstGeom>
+          <a:noFill/>
+          <a:ln/>
+        </p:spPr>
+        <p:txBody>
+          <a:bodyPr wrap="square" lIns="0" tIns="0" rIns="0" bIns="0" rtlCol="0" anchor="ctr"/>
+          <a:lstStyle/>
+          <a:p>
+            <a:pPr algn="ctr" indent="0" marL="0">
+              <a:buNone/>
+            </a:pPr>
+            <a:r>
+              <a:rPr lang="en-US" sz="1632" b="1" dirty="0">
+                <a:solidFill>
+                  <a:srgbClr val="FFFFFF"/>
+                </a:solidFill>
+                <a:latin typeface="Century Gothic" pitchFamily="34" charset="0"/>
+                <a:ea typeface="Century Gothic" pitchFamily="34" charset="-122"/>
+                <a:cs typeface="Century Gothic" pitchFamily="34" charset="-120"/>
+              </a:rPr>
+              <a:t>4</a:t>
+            </a:r>
+            <a:endParaRPr lang="en-US" sz="1632" dirty="0"/>
+          </a:p>
+        </p:txBody>
+      </p:sp>
+      <p:sp>
+        <p:nvSpPr>
+          <p:cNvPr id="21" name="Text 19"/>
+          <p:cNvSpPr txBox="1"/>
+          <p:nvPr/>
+        </p:nvSpPr>
+        <p:spPr>
+          <a:xfrm>
+            <a:off x="6675120" y="1755648"/>
+            <a:ext cx="1874520" cy="457200"/>
           </a:xfrm>
           <a:prstGeom prst="rect">
             <a:avLst/>
@@ -4210,7 +4161,46 @@
               <a:buNone/>
             </a:pPr>
             <a:r>
-              <a:rPr lang="en-US" sz="2400" dirty="0">
+              <a:rPr lang="en-US" sz="1300" b="1" dirty="0">
+                <a:solidFill>
+                  <a:schemeClr val="tx1"/>
+                </a:solidFill>
+                <a:latin typeface="Century Gothic" pitchFamily="34" charset="0"/>
+                <a:ea typeface="Century Gothic" pitchFamily="34" charset="-122"/>
+                <a:cs typeface="Century Gothic" pitchFamily="34" charset="-120"/>
+              </a:rPr>
+              <a:t>Les petits caractères</a:t>
+            </a:r>
+            <a:endParaRPr lang="en-US" sz="1300" dirty="0"/>
+          </a:p>
+        </p:txBody>
+      </p:sp>
+      <p:sp>
+        <p:nvSpPr>
+          <p:cNvPr id="22" name="Text 20"/>
+          <p:cNvSpPr txBox="1"/>
+          <p:nvPr/>
+        </p:nvSpPr>
+        <p:spPr>
+          <a:xfrm>
+            <a:off x="6748272" y="2194560"/>
+            <a:ext cx="1737360" cy="548640"/>
+          </a:xfrm>
+          <a:prstGeom prst="rect">
+            <a:avLst/>
+          </a:prstGeom>
+          <a:noFill/>
+          <a:ln/>
+        </p:spPr>
+        <p:txBody>
+          <a:bodyPr wrap="square" lIns="1016" tIns="1016" rIns="1016" bIns="1016" rtlCol="0" anchor="t"/>
+          <a:lstStyle/>
+          <a:p>
+            <a:pPr algn="ctr" indent="0" marL="0">
+              <a:buNone/>
+            </a:pPr>
+            <a:r>
+              <a:rPr lang="en-US" sz="1100" i="1" dirty="0">
                 <a:solidFill>
                   <a:schemeClr val="tx1"/>
                 </a:solidFill>
@@ -4218,84 +4208,6 @@
                 <a:ea typeface="Calibri" pitchFamily="34" charset="-122"/>
                 <a:cs typeface="Calibri" pitchFamily="34" charset="-120"/>
               </a:rPr>
-              <a:t>🔎</a:t>
-            </a:r>
-            <a:endParaRPr lang="en-US" sz="2400" dirty="0"/>
-          </a:p>
-        </p:txBody>
-      </p:sp>
-      <p:sp>
-        <p:nvSpPr>
-          <p:cNvPr id="17" name="Text 15"/>
-          <p:cNvSpPr txBox="1"/>
-          <p:nvPr/>
-        </p:nvSpPr>
-        <p:spPr>
-          <a:xfrm>
-            <a:off x="6675120" y="1755648"/>
-            <a:ext cx="1874520" cy="457200"/>
-          </a:xfrm>
-          <a:prstGeom prst="rect">
-            <a:avLst/>
-          </a:prstGeom>
-          <a:noFill/>
-          <a:ln/>
-        </p:spPr>
-        <p:txBody>
-          <a:bodyPr wrap="square" lIns="1016" tIns="1016" rIns="1016" bIns="1016" rtlCol="0" anchor="t"/>
-          <a:lstStyle/>
-          <a:p>
-            <a:pPr algn="ctr" indent="0" marL="0">
-              <a:buNone/>
-            </a:pPr>
-            <a:r>
-              <a:rPr lang="en-US" sz="1300" b="1" dirty="0">
-                <a:solidFill>
-                  <a:schemeClr val="tx1"/>
-                </a:solidFill>
-                <a:latin typeface="Century Gothic" pitchFamily="34" charset="0"/>
-                <a:ea typeface="Century Gothic" pitchFamily="34" charset="-122"/>
-                <a:cs typeface="Century Gothic" pitchFamily="34" charset="-120"/>
-              </a:rPr>
-              <a:t>4. Les petits caractères</a:t>
-            </a:r>
-            <a:endParaRPr lang="en-US" sz="1300" dirty="0"/>
-          </a:p>
-        </p:txBody>
-      </p:sp>
-      <p:sp>
-        <p:nvSpPr>
-          <p:cNvPr id="18" name="Text 16"/>
-          <p:cNvSpPr txBox="1"/>
-          <p:nvPr/>
-        </p:nvSpPr>
-        <p:spPr>
-          <a:xfrm>
-            <a:off x="6748272" y="2194560"/>
-            <a:ext cx="1737360" cy="548640"/>
-          </a:xfrm>
-          <a:prstGeom prst="rect">
-            <a:avLst/>
-          </a:prstGeom>
-          <a:noFill/>
-          <a:ln/>
-        </p:spPr>
-        <p:txBody>
-          <a:bodyPr wrap="square" lIns="1016" tIns="1016" rIns="1016" bIns="1016" rtlCol="0" anchor="t"/>
-          <a:lstStyle/>
-          <a:p>
-            <a:pPr algn="ctr" indent="0" marL="0">
-              <a:buNone/>
-            </a:pPr>
-            <a:r>
-              <a:rPr lang="en-US" sz="1100" i="1" dirty="0">
-                <a:solidFill>
-                  <a:schemeClr val="tx1"/>
-                </a:solidFill>
-                <a:latin typeface="Calibri" pitchFamily="34" charset="0"/>
-                <a:ea typeface="Calibri" pitchFamily="34" charset="-122"/>
-                <a:cs typeface="Calibri" pitchFamily="34" charset="-120"/>
-              </a:rPr>
               <a:t>« GRATUIT* »</a:t>
             </a:r>
             <a:endParaRPr lang="en-US" sz="1100" dirty="0"/>
@@ -4304,7 +4216,7 @@
       </p:sp>
       <p:sp>
         <p:nvSpPr>
-          <p:cNvPr id="19" name="carte"/>
+          <p:cNvPr id="23" name="carte"/>
           <p:cNvSpPr/>
           <p:nvPr/>
         </p:nvSpPr>
@@ -4338,14 +4250,78 @@
       </p:sp>
       <p:sp>
         <p:nvSpPr>
-          <p:cNvPr id="20" name="Text 18"/>
+          <p:cNvPr id="24" name="Shape 22"/>
+          <p:cNvSpPr/>
+          <p:nvPr/>
+        </p:nvSpPr>
+        <p:spPr>
+          <a:xfrm>
+            <a:off x="1353312" y="3063240"/>
+            <a:ext cx="438912" cy="438912"/>
+          </a:xfrm>
+          <a:prstGeom prst="ellipse">
+            <a:avLst/>
+          </a:prstGeom>
+          <a:solidFill>
+            <a:schemeClr val="accent1"/>
+          </a:solidFill>
+          <a:ln w="12700">
+            <a:solidFill>
+              <a:schemeClr val="accent1"/>
+            </a:solidFill>
+            <a:prstDash val="solid"/>
+          </a:ln>
+        </p:spPr>
+      </p:sp>
+      <p:sp>
+        <p:nvSpPr>
+          <p:cNvPr id="25" name="Text 23"/>
           <p:cNvSpPr txBox="1"/>
           <p:nvPr/>
         </p:nvSpPr>
         <p:spPr>
           <a:xfrm>
-            <a:off x="640080" y="3044952"/>
-            <a:ext cx="1874520" cy="502920"/>
+            <a:off x="1353312" y="3063240"/>
+            <a:ext cx="438912" cy="438912"/>
+          </a:xfrm>
+          <a:prstGeom prst="rect">
+            <a:avLst/>
+          </a:prstGeom>
+          <a:noFill/>
+          <a:ln/>
+        </p:spPr>
+        <p:txBody>
+          <a:bodyPr wrap="square" lIns="0" tIns="0" rIns="0" bIns="0" rtlCol="0" anchor="ctr"/>
+          <a:lstStyle/>
+          <a:p>
+            <a:pPr algn="ctr" indent="0" marL="0">
+              <a:buNone/>
+            </a:pPr>
+            <a:r>
+              <a:rPr lang="en-US" sz="1632" b="1" dirty="0">
+                <a:solidFill>
+                  <a:srgbClr val="FFFFFF"/>
+                </a:solidFill>
+                <a:latin typeface="Century Gothic" pitchFamily="34" charset="0"/>
+                <a:ea typeface="Century Gothic" pitchFamily="34" charset="-122"/>
+                <a:cs typeface="Century Gothic" pitchFamily="34" charset="-120"/>
+              </a:rPr>
+              <a:t>5</a:t>
+            </a:r>
+            <a:endParaRPr lang="en-US" sz="1632" dirty="0"/>
+          </a:p>
+        </p:txBody>
+      </p:sp>
+      <p:sp>
+        <p:nvSpPr>
+          <p:cNvPr id="26" name="Text 24"/>
+          <p:cNvSpPr txBox="1"/>
+          <p:nvPr/>
+        </p:nvSpPr>
+        <p:spPr>
+          <a:xfrm>
+            <a:off x="640080" y="3538728"/>
+            <a:ext cx="1874520" cy="457200"/>
           </a:xfrm>
           <a:prstGeom prst="rect">
             <a:avLst/>
@@ -4361,7 +4337,46 @@
               <a:buNone/>
             </a:pPr>
             <a:r>
-              <a:rPr lang="en-US" sz="2400" dirty="0">
+              <a:rPr lang="en-US" sz="1300" b="1" dirty="0">
+                <a:solidFill>
+                  <a:schemeClr val="tx1"/>
+                </a:solidFill>
+                <a:latin typeface="Century Gothic" pitchFamily="34" charset="0"/>
+                <a:ea typeface="Century Gothic" pitchFamily="34" charset="-122"/>
+                <a:cs typeface="Century Gothic" pitchFamily="34" charset="-120"/>
+              </a:rPr>
+              <a:t>Le prix magique</a:t>
+            </a:r>
+            <a:endParaRPr lang="en-US" sz="1300" dirty="0"/>
+          </a:p>
+        </p:txBody>
+      </p:sp>
+      <p:sp>
+        <p:nvSpPr>
+          <p:cNvPr id="27" name="Text 25"/>
+          <p:cNvSpPr txBox="1"/>
+          <p:nvPr/>
+        </p:nvSpPr>
+        <p:spPr>
+          <a:xfrm>
+            <a:off x="713232" y="3977640"/>
+            <a:ext cx="1737360" cy="548640"/>
+          </a:xfrm>
+          <a:prstGeom prst="rect">
+            <a:avLst/>
+          </a:prstGeom>
+          <a:noFill/>
+          <a:ln/>
+        </p:spPr>
+        <p:txBody>
+          <a:bodyPr wrap="square" lIns="1016" tIns="1016" rIns="1016" bIns="1016" rtlCol="0" anchor="t"/>
+          <a:lstStyle/>
+          <a:p>
+            <a:pPr algn="ctr" indent="0" marL="0">
+              <a:buNone/>
+            </a:pPr>
+            <a:r>
+              <a:rPr lang="en-US" sz="1100" i="1" dirty="0">
                 <a:solidFill>
                   <a:schemeClr val="tx1"/>
                 </a:solidFill>
@@ -4369,84 +4384,6 @@
                 <a:ea typeface="Calibri" pitchFamily="34" charset="-122"/>
                 <a:cs typeface="Calibri" pitchFamily="34" charset="-120"/>
               </a:rPr>
-              <a:t>🪄</a:t>
-            </a:r>
-            <a:endParaRPr lang="en-US" sz="2400" dirty="0"/>
-          </a:p>
-        </p:txBody>
-      </p:sp>
-      <p:sp>
-        <p:nvSpPr>
-          <p:cNvPr id="21" name="Text 19"/>
-          <p:cNvSpPr txBox="1"/>
-          <p:nvPr/>
-        </p:nvSpPr>
-        <p:spPr>
-          <a:xfrm>
-            <a:off x="640080" y="3538728"/>
-            <a:ext cx="1874520" cy="457200"/>
-          </a:xfrm>
-          <a:prstGeom prst="rect">
-            <a:avLst/>
-          </a:prstGeom>
-          <a:noFill/>
-          <a:ln/>
-        </p:spPr>
-        <p:txBody>
-          <a:bodyPr wrap="square" lIns="1016" tIns="1016" rIns="1016" bIns="1016" rtlCol="0" anchor="t"/>
-          <a:lstStyle/>
-          <a:p>
-            <a:pPr algn="ctr" indent="0" marL="0">
-              <a:buNone/>
-            </a:pPr>
-            <a:r>
-              <a:rPr lang="en-US" sz="1300" b="1" dirty="0">
-                <a:solidFill>
-                  <a:schemeClr val="tx1"/>
-                </a:solidFill>
-                <a:latin typeface="Century Gothic" pitchFamily="34" charset="0"/>
-                <a:ea typeface="Century Gothic" pitchFamily="34" charset="-122"/>
-                <a:cs typeface="Century Gothic" pitchFamily="34" charset="-120"/>
-              </a:rPr>
-              <a:t>5. Le prix magique</a:t>
-            </a:r>
-            <a:endParaRPr lang="en-US" sz="1300" dirty="0"/>
-          </a:p>
-        </p:txBody>
-      </p:sp>
-      <p:sp>
-        <p:nvSpPr>
-          <p:cNvPr id="22" name="Text 20"/>
-          <p:cNvSpPr txBox="1"/>
-          <p:nvPr/>
-        </p:nvSpPr>
-        <p:spPr>
-          <a:xfrm>
-            <a:off x="713232" y="3977640"/>
-            <a:ext cx="1737360" cy="548640"/>
-          </a:xfrm>
-          <a:prstGeom prst="rect">
-            <a:avLst/>
-          </a:prstGeom>
-          <a:noFill/>
-          <a:ln/>
-        </p:spPr>
-        <p:txBody>
-          <a:bodyPr wrap="square" lIns="1016" tIns="1016" rIns="1016" bIns="1016" rtlCol="0" anchor="t"/>
-          <a:lstStyle/>
-          <a:p>
-            <a:pPr algn="ctr" indent="0" marL="0">
-              <a:buNone/>
-            </a:pPr>
-            <a:r>
-              <a:rPr lang="en-US" sz="1100" i="1" dirty="0">
-                <a:solidFill>
-                  <a:schemeClr val="tx1"/>
-                </a:solidFill>
-                <a:latin typeface="Calibri" pitchFamily="34" charset="0"/>
-                <a:ea typeface="Calibri" pitchFamily="34" charset="-122"/>
-                <a:cs typeface="Calibri" pitchFamily="34" charset="-120"/>
-              </a:rPr>
               <a:t>« 9,99 $ »</a:t>
             </a:r>
             <a:endParaRPr lang="en-US" sz="1100" dirty="0"/>
@@ -4455,7 +4392,7 @@
       </p:sp>
       <p:sp>
         <p:nvSpPr>
-          <p:cNvPr id="23" name="carte"/>
+          <p:cNvPr id="28" name="carte"/>
           <p:cNvSpPr/>
           <p:nvPr/>
         </p:nvSpPr>
@@ -4489,14 +4426,78 @@
       </p:sp>
       <p:sp>
         <p:nvSpPr>
-          <p:cNvPr id="24" name="Text 22"/>
+          <p:cNvPr id="29" name="Shape 27"/>
+          <p:cNvSpPr/>
+          <p:nvPr/>
+        </p:nvSpPr>
+        <p:spPr>
+          <a:xfrm>
+            <a:off x="3364992" y="3063240"/>
+            <a:ext cx="438912" cy="438912"/>
+          </a:xfrm>
+          <a:prstGeom prst="ellipse">
+            <a:avLst/>
+          </a:prstGeom>
+          <a:solidFill>
+            <a:schemeClr val="accent1"/>
+          </a:solidFill>
+          <a:ln w="12700">
+            <a:solidFill>
+              <a:schemeClr val="accent1"/>
+            </a:solidFill>
+            <a:prstDash val="solid"/>
+          </a:ln>
+        </p:spPr>
+      </p:sp>
+      <p:sp>
+        <p:nvSpPr>
+          <p:cNvPr id="30" name="Text 28"/>
           <p:cNvSpPr txBox="1"/>
           <p:nvPr/>
         </p:nvSpPr>
         <p:spPr>
           <a:xfrm>
-            <a:off x="2651760" y="3044952"/>
-            <a:ext cx="1874520" cy="502920"/>
+            <a:off x="3364992" y="3063240"/>
+            <a:ext cx="438912" cy="438912"/>
+          </a:xfrm>
+          <a:prstGeom prst="rect">
+            <a:avLst/>
+          </a:prstGeom>
+          <a:noFill/>
+          <a:ln/>
+        </p:spPr>
+        <p:txBody>
+          <a:bodyPr wrap="square" lIns="0" tIns="0" rIns="0" bIns="0" rtlCol="0" anchor="ctr"/>
+          <a:lstStyle/>
+          <a:p>
+            <a:pPr algn="ctr" indent="0" marL="0">
+              <a:buNone/>
+            </a:pPr>
+            <a:r>
+              <a:rPr lang="en-US" sz="1632" b="1" dirty="0">
+                <a:solidFill>
+                  <a:srgbClr val="FFFFFF"/>
+                </a:solidFill>
+                <a:latin typeface="Century Gothic" pitchFamily="34" charset="0"/>
+                <a:ea typeface="Century Gothic" pitchFamily="34" charset="-122"/>
+                <a:cs typeface="Century Gothic" pitchFamily="34" charset="-120"/>
+              </a:rPr>
+              <a:t>6</a:t>
+            </a:r>
+            <a:endParaRPr lang="en-US" sz="1632" dirty="0"/>
+          </a:p>
+        </p:txBody>
+      </p:sp>
+      <p:sp>
+        <p:nvSpPr>
+          <p:cNvPr id="31" name="Text 29"/>
+          <p:cNvSpPr txBox="1"/>
+          <p:nvPr/>
+        </p:nvSpPr>
+        <p:spPr>
+          <a:xfrm>
+            <a:off x="2651760" y="3538728"/>
+            <a:ext cx="1874520" cy="457200"/>
           </a:xfrm>
           <a:prstGeom prst="rect">
             <a:avLst/>
@@ -4512,7 +4513,46 @@
               <a:buNone/>
             </a:pPr>
             <a:r>
-              <a:rPr lang="en-US" sz="2400" dirty="0">
+              <a:rPr lang="en-US" sz="1300" b="1" dirty="0">
+                <a:solidFill>
+                  <a:schemeClr val="tx1"/>
+                </a:solidFill>
+                <a:latin typeface="Century Gothic" pitchFamily="34" charset="0"/>
+                <a:ea typeface="Century Gothic" pitchFamily="34" charset="-122"/>
+                <a:cs typeface="Century Gothic" pitchFamily="34" charset="-120"/>
+              </a:rPr>
+              <a:t>Tu seras plus heureux</a:t>
+            </a:r>
+            <a:endParaRPr lang="en-US" sz="1300" dirty="0"/>
+          </a:p>
+        </p:txBody>
+      </p:sp>
+      <p:sp>
+        <p:nvSpPr>
+          <p:cNvPr id="32" name="Text 30"/>
+          <p:cNvSpPr txBox="1"/>
+          <p:nvPr/>
+        </p:nvSpPr>
+        <p:spPr>
+          <a:xfrm>
+            <a:off x="2724912" y="3977640"/>
+            <a:ext cx="1737360" cy="548640"/>
+          </a:xfrm>
+          <a:prstGeom prst="rect">
+            <a:avLst/>
+          </a:prstGeom>
+          <a:noFill/>
+          <a:ln/>
+        </p:spPr>
+        <p:txBody>
+          <a:bodyPr wrap="square" lIns="1016" tIns="1016" rIns="1016" bIns="1016" rtlCol="0" anchor="t"/>
+          <a:lstStyle/>
+          <a:p>
+            <a:pPr algn="ctr" indent="0" marL="0">
+              <a:buNone/>
+            </a:pPr>
+            <a:r>
+              <a:rPr lang="en-US" sz="1100" i="1" dirty="0">
                 <a:solidFill>
                   <a:schemeClr val="tx1"/>
                 </a:solidFill>
@@ -4520,84 +4560,6 @@
                 <a:ea typeface="Calibri" pitchFamily="34" charset="-122"/>
                 <a:cs typeface="Calibri" pitchFamily="34" charset="-120"/>
               </a:rPr>
-              <a:t>💖</a:t>
-            </a:r>
-            <a:endParaRPr lang="en-US" sz="2400" dirty="0"/>
-          </a:p>
-        </p:txBody>
-      </p:sp>
-      <p:sp>
-        <p:nvSpPr>
-          <p:cNvPr id="25" name="Text 23"/>
-          <p:cNvSpPr txBox="1"/>
-          <p:nvPr/>
-        </p:nvSpPr>
-        <p:spPr>
-          <a:xfrm>
-            <a:off x="2651760" y="3538728"/>
-            <a:ext cx="1874520" cy="457200"/>
-          </a:xfrm>
-          <a:prstGeom prst="rect">
-            <a:avLst/>
-          </a:prstGeom>
-          <a:noFill/>
-          <a:ln/>
-        </p:spPr>
-        <p:txBody>
-          <a:bodyPr wrap="square" lIns="1016" tIns="1016" rIns="1016" bIns="1016" rtlCol="0" anchor="t"/>
-          <a:lstStyle/>
-          <a:p>
-            <a:pPr algn="ctr" indent="0" marL="0">
-              <a:buNone/>
-            </a:pPr>
-            <a:r>
-              <a:rPr lang="en-US" sz="1300" b="1" dirty="0">
-                <a:solidFill>
-                  <a:schemeClr val="tx1"/>
-                </a:solidFill>
-                <a:latin typeface="Century Gothic" pitchFamily="34" charset="0"/>
-                <a:ea typeface="Century Gothic" pitchFamily="34" charset="-122"/>
-                <a:cs typeface="Century Gothic" pitchFamily="34" charset="-120"/>
-              </a:rPr>
-              <a:t>6. Tu seras plus heureux</a:t>
-            </a:r>
-            <a:endParaRPr lang="en-US" sz="1300" dirty="0"/>
-          </a:p>
-        </p:txBody>
-      </p:sp>
-      <p:sp>
-        <p:nvSpPr>
-          <p:cNvPr id="26" name="Text 24"/>
-          <p:cNvSpPr txBox="1"/>
-          <p:nvPr/>
-        </p:nvSpPr>
-        <p:spPr>
-          <a:xfrm>
-            <a:off x="2724912" y="3977640"/>
-            <a:ext cx="1737360" cy="548640"/>
-          </a:xfrm>
-          <a:prstGeom prst="rect">
-            <a:avLst/>
-          </a:prstGeom>
-          <a:noFill/>
-          <a:ln/>
-        </p:spPr>
-        <p:txBody>
-          <a:bodyPr wrap="square" lIns="1016" tIns="1016" rIns="1016" bIns="1016" rtlCol="0" anchor="t"/>
-          <a:lstStyle/>
-          <a:p>
-            <a:pPr algn="ctr" indent="0" marL="0">
-              <a:buNone/>
-            </a:pPr>
-            <a:r>
-              <a:rPr lang="en-US" sz="1100" i="1" dirty="0">
-                <a:solidFill>
-                  <a:schemeClr val="tx1"/>
-                </a:solidFill>
-                <a:latin typeface="Calibri" pitchFamily="34" charset="0"/>
-                <a:ea typeface="Calibri" pitchFamily="34" charset="-122"/>
-                <a:cs typeface="Calibri" pitchFamily="34" charset="-120"/>
-              </a:rPr>
               <a:t>« Deviens beau, fort, populaire ! »</a:t>
             </a:r>
             <a:endParaRPr lang="en-US" sz="1100" dirty="0"/>
@@ -4606,7 +4568,7 @@
       </p:sp>
       <p:sp>
         <p:nvSpPr>
-          <p:cNvPr id="27" name="carte"/>
+          <p:cNvPr id="33" name="carte"/>
           <p:cNvSpPr/>
           <p:nvPr/>
         </p:nvSpPr>
@@ -4640,14 +4602,78 @@
       </p:sp>
       <p:sp>
         <p:nvSpPr>
-          <p:cNvPr id="28" name="Text 26"/>
+          <p:cNvPr id="34" name="Shape 32"/>
+          <p:cNvSpPr/>
+          <p:nvPr/>
+        </p:nvSpPr>
+        <p:spPr>
+          <a:xfrm>
+            <a:off x="5376672" y="3063240"/>
+            <a:ext cx="438912" cy="438912"/>
+          </a:xfrm>
+          <a:prstGeom prst="ellipse">
+            <a:avLst/>
+          </a:prstGeom>
+          <a:solidFill>
+            <a:schemeClr val="accent1"/>
+          </a:solidFill>
+          <a:ln w="12700">
+            <a:solidFill>
+              <a:schemeClr val="accent1"/>
+            </a:solidFill>
+            <a:prstDash val="solid"/>
+          </a:ln>
+        </p:spPr>
+      </p:sp>
+      <p:sp>
+        <p:nvSpPr>
+          <p:cNvPr id="35" name="Text 33"/>
           <p:cNvSpPr txBox="1"/>
           <p:nvPr/>
         </p:nvSpPr>
         <p:spPr>
           <a:xfrm>
-            <a:off x="4663440" y="3044952"/>
-            <a:ext cx="1874520" cy="502920"/>
+            <a:off x="5376672" y="3063240"/>
+            <a:ext cx="438912" cy="438912"/>
+          </a:xfrm>
+          <a:prstGeom prst="rect">
+            <a:avLst/>
+          </a:prstGeom>
+          <a:noFill/>
+          <a:ln/>
+        </p:spPr>
+        <p:txBody>
+          <a:bodyPr wrap="square" lIns="0" tIns="0" rIns="0" bIns="0" rtlCol="0" anchor="ctr"/>
+          <a:lstStyle/>
+          <a:p>
+            <a:pPr algn="ctr" indent="0" marL="0">
+              <a:buNone/>
+            </a:pPr>
+            <a:r>
+              <a:rPr lang="en-US" sz="1632" b="1" dirty="0">
+                <a:solidFill>
+                  <a:srgbClr val="FFFFFF"/>
+                </a:solidFill>
+                <a:latin typeface="Century Gothic" pitchFamily="34" charset="0"/>
+                <a:ea typeface="Century Gothic" pitchFamily="34" charset="-122"/>
+                <a:cs typeface="Century Gothic" pitchFamily="34" charset="-120"/>
+              </a:rPr>
+              <a:t>7</a:t>
+            </a:r>
+            <a:endParaRPr lang="en-US" sz="1632" dirty="0"/>
+          </a:p>
+        </p:txBody>
+      </p:sp>
+      <p:sp>
+        <p:nvSpPr>
+          <p:cNvPr id="36" name="Text 34"/>
+          <p:cNvSpPr txBox="1"/>
+          <p:nvPr/>
+        </p:nvSpPr>
+        <p:spPr>
+          <a:xfrm>
+            <a:off x="4663440" y="3538728"/>
+            <a:ext cx="1874520" cy="457200"/>
           </a:xfrm>
           <a:prstGeom prst="rect">
             <a:avLst/>
@@ -4663,7 +4689,46 @@
               <a:buNone/>
             </a:pPr>
             <a:r>
-              <a:rPr lang="en-US" sz="2400" dirty="0">
+              <a:rPr lang="en-US" sz="1300" b="1" dirty="0">
+                <a:solidFill>
+                  <a:schemeClr val="tx1"/>
+                </a:solidFill>
+                <a:latin typeface="Century Gothic" pitchFamily="34" charset="0"/>
+                <a:ea typeface="Century Gothic" pitchFamily="34" charset="-122"/>
+                <a:cs typeface="Century Gothic" pitchFamily="34" charset="-120"/>
+              </a:rPr>
+              <a:t>Payez plus tard</a:t>
+            </a:r>
+            <a:endParaRPr lang="en-US" sz="1300" dirty="0"/>
+          </a:p>
+        </p:txBody>
+      </p:sp>
+      <p:sp>
+        <p:nvSpPr>
+          <p:cNvPr id="37" name="Text 35"/>
+          <p:cNvSpPr txBox="1"/>
+          <p:nvPr/>
+        </p:nvSpPr>
+        <p:spPr>
+          <a:xfrm>
+            <a:off x="4736592" y="3977640"/>
+            <a:ext cx="1737360" cy="548640"/>
+          </a:xfrm>
+          <a:prstGeom prst="rect">
+            <a:avLst/>
+          </a:prstGeom>
+          <a:noFill/>
+          <a:ln/>
+        </p:spPr>
+        <p:txBody>
+          <a:bodyPr wrap="square" lIns="1016" tIns="1016" rIns="1016" bIns="1016" rtlCol="0" anchor="t"/>
+          <a:lstStyle/>
+          <a:p>
+            <a:pPr algn="ctr" indent="0" marL="0">
+              <a:buNone/>
+            </a:pPr>
+            <a:r>
+              <a:rPr lang="en-US" sz="1100" i="1" dirty="0">
                 <a:solidFill>
                   <a:schemeClr val="tx1"/>
                 </a:solidFill>
@@ -4671,84 +4736,6 @@
                 <a:ea typeface="Calibri" pitchFamily="34" charset="-122"/>
                 <a:cs typeface="Calibri" pitchFamily="34" charset="-120"/>
               </a:rPr>
-              <a:t>💳</a:t>
-            </a:r>
-            <a:endParaRPr lang="en-US" sz="2400" dirty="0"/>
-          </a:p>
-        </p:txBody>
-      </p:sp>
-      <p:sp>
-        <p:nvSpPr>
-          <p:cNvPr id="29" name="Text 27"/>
-          <p:cNvSpPr txBox="1"/>
-          <p:nvPr/>
-        </p:nvSpPr>
-        <p:spPr>
-          <a:xfrm>
-            <a:off x="4663440" y="3538728"/>
-            <a:ext cx="1874520" cy="457200"/>
-          </a:xfrm>
-          <a:prstGeom prst="rect">
-            <a:avLst/>
-          </a:prstGeom>
-          <a:noFill/>
-          <a:ln/>
-        </p:spPr>
-        <p:txBody>
-          <a:bodyPr wrap="square" lIns="1016" tIns="1016" rIns="1016" bIns="1016" rtlCol="0" anchor="t"/>
-          <a:lstStyle/>
-          <a:p>
-            <a:pPr algn="ctr" indent="0" marL="0">
-              <a:buNone/>
-            </a:pPr>
-            <a:r>
-              <a:rPr lang="en-US" sz="1300" b="1" dirty="0">
-                <a:solidFill>
-                  <a:schemeClr val="tx1"/>
-                </a:solidFill>
-                <a:latin typeface="Century Gothic" pitchFamily="34" charset="0"/>
-                <a:ea typeface="Century Gothic" pitchFamily="34" charset="-122"/>
-                <a:cs typeface="Century Gothic" pitchFamily="34" charset="-120"/>
-              </a:rPr>
-              <a:t>7. Payez plus tard</a:t>
-            </a:r>
-            <a:endParaRPr lang="en-US" sz="1300" dirty="0"/>
-          </a:p>
-        </p:txBody>
-      </p:sp>
-      <p:sp>
-        <p:nvSpPr>
-          <p:cNvPr id="30" name="Text 28"/>
-          <p:cNvSpPr txBox="1"/>
-          <p:nvPr/>
-        </p:nvSpPr>
-        <p:spPr>
-          <a:xfrm>
-            <a:off x="4736592" y="3977640"/>
-            <a:ext cx="1737360" cy="548640"/>
-          </a:xfrm>
-          <a:prstGeom prst="rect">
-            <a:avLst/>
-          </a:prstGeom>
-          <a:noFill/>
-          <a:ln/>
-        </p:spPr>
-        <p:txBody>
-          <a:bodyPr wrap="square" lIns="1016" tIns="1016" rIns="1016" bIns="1016" rtlCol="0" anchor="t"/>
-          <a:lstStyle/>
-          <a:p>
-            <a:pPr algn="ctr" indent="0" marL="0">
-              <a:buNone/>
-            </a:pPr>
-            <a:r>
-              <a:rPr lang="en-US" sz="1100" i="1" dirty="0">
-                <a:solidFill>
-                  <a:schemeClr val="tx1"/>
-                </a:solidFill>
-                <a:latin typeface="Calibri" pitchFamily="34" charset="0"/>
-                <a:ea typeface="Calibri" pitchFamily="34" charset="-122"/>
-                <a:cs typeface="Calibri" pitchFamily="34" charset="-120"/>
-              </a:rPr>
               <a:t>« 0 $ aujourd'hui ! »</a:t>
             </a:r>
             <a:endParaRPr lang="en-US" sz="1100" dirty="0"/>
@@ -4757,7 +4744,7 @@
       </p:sp>
       <p:sp>
         <p:nvSpPr>
-          <p:cNvPr id="31" name="carte"/>
+          <p:cNvPr id="38" name="carte"/>
           <p:cNvSpPr/>
           <p:nvPr/>
         </p:nvSpPr>
@@ -4791,77 +4778,102 @@
       </p:sp>
       <p:sp>
         <p:nvSpPr>
-          <p:cNvPr id="32" name="Text 30"/>
+          <p:cNvPr id="39" name="Shape 37"/>
+          <p:cNvSpPr/>
+          <p:nvPr/>
+        </p:nvSpPr>
+        <p:spPr>
+          <a:xfrm>
+            <a:off x="7388352" y="3063240"/>
+            <a:ext cx="438912" cy="438912"/>
+          </a:xfrm>
+          <a:prstGeom prst="ellipse">
+            <a:avLst/>
+          </a:prstGeom>
+          <a:solidFill>
+            <a:schemeClr val="accent1"/>
+          </a:solidFill>
+          <a:ln w="12700">
+            <a:solidFill>
+              <a:schemeClr val="accent1"/>
+            </a:solidFill>
+            <a:prstDash val="solid"/>
+          </a:ln>
+        </p:spPr>
+      </p:sp>
+      <p:sp>
+        <p:nvSpPr>
+          <p:cNvPr id="40" name="Text 38"/>
           <p:cNvSpPr txBox="1"/>
           <p:nvPr/>
         </p:nvSpPr>
         <p:spPr>
           <a:xfrm>
-            <a:off x="6675120" y="3044952"/>
-            <a:ext cx="1874520" cy="502920"/>
-          </a:xfrm>
-          <a:prstGeom prst="rect">
-            <a:avLst/>
-          </a:prstGeom>
-          <a:noFill/>
-          <a:ln/>
-        </p:spPr>
-        <p:txBody>
-          <a:bodyPr wrap="square" lIns="1016" tIns="1016" rIns="1016" bIns="1016" rtlCol="0" anchor="t"/>
+            <a:off x="7388352" y="3063240"/>
+            <a:ext cx="438912" cy="438912"/>
+          </a:xfrm>
+          <a:prstGeom prst="rect">
+            <a:avLst/>
+          </a:prstGeom>
+          <a:noFill/>
+          <a:ln/>
+        </p:spPr>
+        <p:txBody>
+          <a:bodyPr wrap="square" lIns="0" tIns="0" rIns="0" bIns="0" rtlCol="0" anchor="ctr"/>
           <a:lstStyle/>
           <a:p>
             <a:pPr algn="ctr" indent="0" marL="0">
               <a:buNone/>
             </a:pPr>
             <a:r>
-              <a:rPr lang="en-US" sz="2400" dirty="0">
-                <a:solidFill>
-                  <a:schemeClr val="tx1"/>
-                </a:solidFill>
-                <a:latin typeface="Calibri" pitchFamily="34" charset="0"/>
-                <a:ea typeface="Calibri" pitchFamily="34" charset="-122"/>
-                <a:cs typeface="Calibri" pitchFamily="34" charset="-120"/>
-              </a:rPr>
-              <a:t>🎁</a:t>
-            </a:r>
-            <a:endParaRPr lang="en-US" sz="2400" dirty="0"/>
-          </a:p>
-        </p:txBody>
-      </p:sp>
-      <p:sp>
-        <p:nvSpPr>
-          <p:cNvPr id="33" name="Text 31"/>
-          <p:cNvSpPr txBox="1"/>
-          <p:nvPr/>
-        </p:nvSpPr>
-        <p:spPr>
-          <a:xfrm>
-            <a:off x="6675120" y="3538728"/>
-            <a:ext cx="1874520" cy="457200"/>
-          </a:xfrm>
-          <a:prstGeom prst="rect">
-            <a:avLst/>
-          </a:prstGeom>
-          <a:noFill/>
-          <a:ln/>
-        </p:spPr>
-        <p:txBody>
-          <a:bodyPr wrap="square" lIns="1016" tIns="1016" rIns="1016" bIns="1016" rtlCol="0" anchor="t"/>
-          <a:lstStyle/>
-          <a:p>
-            <a:pPr algn="ctr" indent="0" marL="0">
-              <a:buNone/>
-            </a:pPr>
-            <a:r>
-              <a:rPr lang="en-US" sz="1300" b="1" dirty="0">
-                <a:solidFill>
-                  <a:schemeClr val="tx1"/>
+              <a:rPr lang="en-US" sz="1632" b="1" dirty="0">
+                <a:solidFill>
+                  <a:srgbClr val="FFFFFF"/>
                 </a:solidFill>
                 <a:latin typeface="Century Gothic" pitchFamily="34" charset="0"/>
                 <a:ea typeface="Century Gothic" pitchFamily="34" charset="-122"/>
                 <a:cs typeface="Century Gothic" pitchFamily="34" charset="-120"/>
               </a:rPr>
-              <a:t>8. Le cadeau piège</a:t>
+              <a:t>8</a:t>
+            </a:r>
+            <a:endParaRPr lang="en-US" sz="1632" dirty="0"/>
+          </a:p>
+        </p:txBody>
+      </p:sp>
+      <p:sp>
+        <p:nvSpPr>
+          <p:cNvPr id="41" name="Text 39"/>
+          <p:cNvSpPr txBox="1"/>
+          <p:nvPr/>
+        </p:nvSpPr>
+        <p:spPr>
+          <a:xfrm>
+            <a:off x="6675120" y="3538728"/>
+            <a:ext cx="1874520" cy="457200"/>
+          </a:xfrm>
+          <a:prstGeom prst="rect">
+            <a:avLst/>
+          </a:prstGeom>
+          <a:noFill/>
+          <a:ln/>
+        </p:spPr>
+        <p:txBody>
+          <a:bodyPr wrap="square" lIns="1016" tIns="1016" rIns="1016" bIns="1016" rtlCol="0" anchor="t"/>
+          <a:lstStyle/>
+          <a:p>
+            <a:pPr algn="ctr" indent="0" marL="0">
+              <a:buNone/>
+            </a:pPr>
+            <a:r>
+              <a:rPr lang="en-US" sz="1300" b="1" dirty="0">
+                <a:solidFill>
+                  <a:schemeClr val="tx1"/>
+                </a:solidFill>
+                <a:latin typeface="Century Gothic" pitchFamily="34" charset="0"/>
+                <a:ea typeface="Century Gothic" pitchFamily="34" charset="-122"/>
+                <a:cs typeface="Century Gothic" pitchFamily="34" charset="-120"/>
+              </a:rPr>
+              <a:t>Le cadeau piège</a:t>
             </a:r>
             <a:endParaRPr lang="en-US" sz="1300" dirty="0"/>
           </a:p>
@@ -4869,7 +4881,7 @@
       </p:sp>
       <p:sp>
         <p:nvSpPr>
-          <p:cNvPr id="34" name="Text 32"/>
+          <p:cNvPr id="42" name="Text 40"/>
           <p:cNvSpPr txBox="1"/>
           <p:nvPr/>
         </p:nvSpPr>
@@ -5011,7 +5023,7 @@
                   <a:schemeClr val="tx1"/>
                 </a:solidFill>
               </a:rPr>
-              <a:t>Notes pour mon moi du futur ✍️</a:t>
+              <a:t>Notes pour mon moi du futur</a:t>
             </a:r>
             <a:endParaRPr lang="en-US" sz="3000" dirty="0"/>
           </a:p>
@@ -5026,11 +5038,11 @@
         <p:spPr>
           <a:xfrm>
             <a:off x="640080" y="1280160"/>
-            <a:ext cx="3749040" cy="2103120"/>
+            <a:ext cx="7863840" cy="2194560"/>
           </a:xfrm>
           <a:prstGeom prst="roundRect">
             <a:avLst>
-              <a:gd name="adj" fmla="val 7826"/>
+              <a:gd name="adj" fmla="val 7500"/>
             </a:avLst>
           </a:prstGeom>
           <a:solidFill>
@@ -5059,63 +5071,41 @@
         </p:nvSpPr>
         <p:spPr>
           <a:xfrm>
-            <a:off x="777240" y="1371600"/>
-            <a:ext cx="548640" cy="640080"/>
-          </a:xfrm>
-          <a:prstGeom prst="rect">
-            <a:avLst/>
-          </a:prstGeom>
-          <a:noFill/>
-          <a:ln/>
-        </p:spPr>
-        <p:txBody>
-          <a:bodyPr wrap="square" lIns="1016" tIns="1016" rIns="1016" bIns="1016" rtlCol="0" anchor="t"/>
-          <a:lstStyle/>
-          <a:p>
-            <a:pPr indent="0" marL="0">
-              <a:buNone/>
-            </a:pPr>
-            <a:r>
-              <a:rPr lang="en-US" sz="3200" b="1" dirty="0">
-                <a:solidFill>
-                  <a:schemeClr val="accent1"/>
+            <a:off x="822960" y="1371600"/>
+            <a:ext cx="7498080" cy="2011680"/>
+          </a:xfrm>
+          <a:prstGeom prst="rect">
+            <a:avLst/>
+          </a:prstGeom>
+          <a:noFill/>
+          <a:ln/>
+        </p:spPr>
+        <p:txBody>
+          <a:bodyPr wrap="square" lIns="1016" tIns="1016" rIns="1016" bIns="1016" rtlCol="0" anchor="ctr"/>
+          <a:lstStyle/>
+          <a:p>
+            <a:pPr algn="ctr" indent="0" marL="0">
+              <a:buNone/>
+            </a:pPr>
+            <a:r>
+              <a:rPr lang="en-US" sz="2000" b="1" dirty="0">
+                <a:solidFill>
+                  <a:schemeClr val="tx1"/>
                 </a:solidFill>
                 <a:latin typeface="Century Gothic" pitchFamily="34" charset="0"/>
                 <a:ea typeface="Century Gothic" pitchFamily="34" charset="-122"/>
                 <a:cs typeface="Century Gothic" pitchFamily="34" charset="-120"/>
               </a:rPr>
-              <a:t>1</a:t>
-            </a:r>
-            <a:endParaRPr lang="en-US" sz="3200" dirty="0"/>
-          </a:p>
-        </p:txBody>
-      </p:sp>
-      <p:sp>
-        <p:nvSpPr>
-          <p:cNvPr id="5" name="Text 3"/>
-          <p:cNvSpPr txBox="1"/>
-          <p:nvPr/>
-        </p:nvSpPr>
-        <p:spPr>
-          <a:xfrm>
-            <a:off x="1371600" y="1417320"/>
-            <a:ext cx="2834640" cy="1737360"/>
-          </a:xfrm>
-          <a:prstGeom prst="rect">
-            <a:avLst/>
-          </a:prstGeom>
-          <a:noFill/>
-          <a:ln/>
-        </p:spPr>
-        <p:txBody>
-          <a:bodyPr wrap="square" lIns="1016" tIns="1016" rIns="1016" bIns="1016" rtlCol="0" anchor="ctr"/>
-          <a:lstStyle/>
-          <a:p>
-            <a:pPr indent="0" marL="0">
-              <a:buNone/>
-            </a:pPr>
-            <a:r>
-              <a:rPr lang="en-US" sz="1900" dirty="0">
+              <a:t>Des idées pour commencer</a:t>
+            </a:r>
+            <a:endParaRPr lang="en-US" sz="2000" dirty="0"/>
+          </a:p>
+          <a:p>
+            <a:pPr algn="ctr" indent="0" marL="0">
+              <a:buNone/>
+            </a:pPr>
+            <a:r>
+              <a:rPr lang="en-US" sz="1600" dirty="0">
                 <a:solidFill>
                   <a:schemeClr val="tx1"/>
                 </a:solidFill>
@@ -5123,133 +5113,21 @@
                 <a:ea typeface="Calibri" pitchFamily="34" charset="-122"/>
                 <a:cs typeface="Calibri" pitchFamily="34" charset="-120"/>
               </a:rPr>
-              <a:t>La ruse qui me piège le plus, et pourquoi</a:t>
-            </a:r>
-            <a:endParaRPr lang="en-US" sz="1900" dirty="0"/>
-          </a:p>
-        </p:txBody>
-      </p:sp>
-      <p:sp>
-        <p:nvSpPr>
-          <p:cNvPr id="6" name="carte"/>
+              <a:t>La ruse qui me piège le plus, et pourquoi · ma phrase anti-pub · une pub que j'ai vue cette semaine · un dessin pour m'en souvenir.</a:t>
+            </a:r>
+            <a:endParaRPr lang="en-US" sz="2000" dirty="0"/>
+          </a:p>
+        </p:txBody>
+      </p:sp>
+      <p:sp>
+        <p:nvSpPr>
+          <p:cNvPr id="5" name="bulle"/>
           <p:cNvSpPr/>
           <p:nvPr/>
         </p:nvSpPr>
         <p:spPr>
           <a:xfrm>
-            <a:off x="4572000" y="1280160"/>
-            <a:ext cx="3749040" cy="2103120"/>
-          </a:xfrm>
-          <a:prstGeom prst="roundRect">
-            <a:avLst>
-              <a:gd name="adj" fmla="val 7826"/>
-            </a:avLst>
-          </a:prstGeom>
-          <a:solidFill>
-            <a:schemeClr val="accent3"/>
-          </a:solidFill>
-          <a:ln w="12700">
-            <a:solidFill>
-              <a:schemeClr val="accent3"/>
-            </a:solidFill>
-            <a:prstDash val="solid"/>
-          </a:ln>
-          <a:effectLst>
-            <a:outerShdw sx="100000" sy="100000" kx="0" ky="0" algn="bl" rotWithShape="0" blurRad="101600" dist="38100" dir="5400000">
-              <a:srgbClr val="BFCFCC">
-                <a:alpha val="100000"/>
-              </a:srgbClr>
-            </a:outerShdw>
-          </a:effectLst>
-        </p:spPr>
-      </p:sp>
-      <p:sp>
-        <p:nvSpPr>
-          <p:cNvPr id="7" name="Text 5"/>
-          <p:cNvSpPr txBox="1"/>
-          <p:nvPr/>
-        </p:nvSpPr>
-        <p:spPr>
-          <a:xfrm>
-            <a:off x="4709160" y="1371600"/>
-            <a:ext cx="548640" cy="640080"/>
-          </a:xfrm>
-          <a:prstGeom prst="rect">
-            <a:avLst/>
-          </a:prstGeom>
-          <a:noFill/>
-          <a:ln/>
-        </p:spPr>
-        <p:txBody>
-          <a:bodyPr wrap="square" lIns="1016" tIns="1016" rIns="1016" bIns="1016" rtlCol="0" anchor="t"/>
-          <a:lstStyle/>
-          <a:p>
-            <a:pPr indent="0" marL="0">
-              <a:buNone/>
-            </a:pPr>
-            <a:r>
-              <a:rPr lang="en-US" sz="3200" b="1" dirty="0">
-                <a:solidFill>
-                  <a:schemeClr val="accent1"/>
-                </a:solidFill>
-                <a:latin typeface="Century Gothic" pitchFamily="34" charset="0"/>
-                <a:ea typeface="Century Gothic" pitchFamily="34" charset="-122"/>
-                <a:cs typeface="Century Gothic" pitchFamily="34" charset="-120"/>
-              </a:rPr>
-              <a:t>2</a:t>
-            </a:r>
-            <a:endParaRPr lang="en-US" sz="3200" dirty="0"/>
-          </a:p>
-        </p:txBody>
-      </p:sp>
-      <p:sp>
-        <p:nvSpPr>
-          <p:cNvPr id="8" name="Text 6"/>
-          <p:cNvSpPr txBox="1"/>
-          <p:nvPr/>
-        </p:nvSpPr>
-        <p:spPr>
-          <a:xfrm>
-            <a:off x="5303520" y="1417320"/>
-            <a:ext cx="2834640" cy="1737360"/>
-          </a:xfrm>
-          <a:prstGeom prst="rect">
-            <a:avLst/>
-          </a:prstGeom>
-          <a:noFill/>
-          <a:ln/>
-        </p:spPr>
-        <p:txBody>
-          <a:bodyPr wrap="square" lIns="1016" tIns="1016" rIns="1016" bIns="1016" rtlCol="0" anchor="ctr"/>
-          <a:lstStyle/>
-          <a:p>
-            <a:pPr indent="0" marL="0">
-              <a:buNone/>
-            </a:pPr>
-            <a:r>
-              <a:rPr lang="en-US" sz="1900" dirty="0">
-                <a:solidFill>
-                  <a:schemeClr val="tx1"/>
-                </a:solidFill>
-                <a:latin typeface="Calibri" pitchFamily="34" charset="0"/>
-                <a:ea typeface="Calibri" pitchFamily="34" charset="-122"/>
-                <a:cs typeface="Calibri" pitchFamily="34" charset="-120"/>
-              </a:rPr>
-              <a:t>Ma phrase anti-pub</a:t>
-            </a:r>
-            <a:endParaRPr lang="en-US" sz="1900" dirty="0"/>
-          </a:p>
-        </p:txBody>
-      </p:sp>
-      <p:sp>
-        <p:nvSpPr>
-          <p:cNvPr id="9" name="bulle"/>
-          <p:cNvSpPr/>
-          <p:nvPr/>
-        </p:nvSpPr>
-        <p:spPr>
-          <a:xfrm>
-            <a:off x="640080" y="3657600"/>
+            <a:off x="640080" y="3703320"/>
             <a:ext cx="7772400" cy="822960"/>
           </a:xfrm>
           <a:prstGeom prst="roundRect">
@@ -5277,13 +5155,13 @@
       </p:sp>
       <p:sp>
         <p:nvSpPr>
-          <p:cNvPr id="10" name="Shape 8"/>
+          <p:cNvPr id="6" name="Shape 4"/>
           <p:cNvSpPr/>
           <p:nvPr/>
         </p:nvSpPr>
         <p:spPr>
           <a:xfrm>
-            <a:off x="640080" y="3657600"/>
+            <a:off x="640080" y="3703320"/>
             <a:ext cx="7772400" cy="822960"/>
           </a:xfrm>
           <a:prstGeom prst="roundRect">
@@ -5301,13 +5179,13 @@
       </p:sp>
       <p:sp>
         <p:nvSpPr>
-          <p:cNvPr id="11" name="Text 9"/>
+          <p:cNvPr id="7" name="Text 5"/>
           <p:cNvSpPr txBox="1"/>
           <p:nvPr/>
         </p:nvSpPr>
         <p:spPr>
           <a:xfrm>
-            <a:off x="731520" y="3703320"/>
+            <a:off x="731520" y="3749040"/>
             <a:ext cx="7589520" cy="731520"/>
           </a:xfrm>
           <a:prstGeom prst="rect">
@@ -5411,111 +5289,9 @@
           <a:chExt cx="0" cy="0"/>
         </a:xfrm>
       </p:grpSpPr>
-      <p:pic>
-        <p:nvPicPr>
-          <p:cNvPr id="2" name="renard" descr="Renard qui dort">    </p:cNvPr>
-          <p:cNvPicPr>
-            <a:picLocks noChangeAspect="1"/>
-          </p:cNvPicPr>
-          <p:nvPr/>
-        </p:nvPicPr>
-        <p:blipFill>
-          <a:blip r:embed="rId1"/>
-          <a:stretch>
-            <a:fillRect/>
-          </a:stretch>
-        </p:blipFill>
-        <p:spPr>
-          <a:xfrm>
-            <a:off x="3108960" y="1097280"/>
-            <a:ext cx="2926080" cy="2794406"/>
-          </a:xfrm>
-          <a:prstGeom prst="rect">
-            <a:avLst/>
-          </a:prstGeom>
-        </p:spPr>
-      </p:pic>
-      <p:sp>
-        <p:nvSpPr>
-          <p:cNvPr id="3" name="Text 0"/>
-          <p:cNvSpPr txBox="1"/>
-          <p:nvPr/>
-        </p:nvSpPr>
-        <p:spPr>
-          <a:xfrm>
-            <a:off x="640080" y="365760"/>
-            <a:ext cx="7863840" cy="822960"/>
-          </a:xfrm>
-          <a:prstGeom prst="rect">
-            <a:avLst/>
-          </a:prstGeom>
-          <a:noFill/>
-          <a:ln/>
-        </p:spPr>
-        <p:txBody>
-          <a:bodyPr wrap="square" lIns="1016" tIns="1016" rIns="1016" bIns="1016" rtlCol="0" anchor="t"/>
-          <a:lstStyle/>
-          <a:p>
-            <a:pPr algn="ctr" indent="0" marL="0">
-              <a:buNone/>
-            </a:pPr>
-            <a:r>
-              <a:rPr lang="en-US" sz="4800" b="1" dirty="0">
-                <a:solidFill>
-                  <a:schemeClr val="tx1"/>
-                </a:solidFill>
-                <a:latin typeface="Century Gothic" pitchFamily="34" charset="0"/>
-                <a:ea typeface="Century Gothic" pitchFamily="34" charset="-122"/>
-                <a:cs typeface="Century Gothic" pitchFamily="34" charset="-120"/>
-              </a:rPr>
-              <a:t>Pause !</a:t>
-            </a:r>
-            <a:endParaRPr lang="en-US" sz="4800" dirty="0"/>
-          </a:p>
-        </p:txBody>
-      </p:sp>
-      <p:sp>
-        <p:nvSpPr>
-          <p:cNvPr id="4" name="Text 1"/>
-          <p:cNvSpPr txBox="1"/>
-          <p:nvPr/>
-        </p:nvSpPr>
-        <p:spPr>
-          <a:xfrm>
-            <a:off x="640080" y="4023360"/>
-            <a:ext cx="7863840" cy="457200"/>
-          </a:xfrm>
-          <a:prstGeom prst="rect">
-            <a:avLst/>
-          </a:prstGeom>
-          <a:noFill/>
-          <a:ln/>
-        </p:spPr>
-        <p:txBody>
-          <a:bodyPr wrap="square" lIns="1016" tIns="1016" rIns="1016" bIns="1016" rtlCol="0" anchor="t"/>
-          <a:lstStyle/>
-          <a:p>
-            <a:pPr algn="ctr" indent="0" marL="0">
-              <a:buNone/>
-            </a:pPr>
-            <a:r>
-              <a:rPr lang="en-US" sz="1900" dirty="0">
-                <a:solidFill>
-                  <a:schemeClr val="accent1"/>
-                </a:solidFill>
-                <a:latin typeface="Calibri" pitchFamily="34" charset="0"/>
-                <a:ea typeface="Calibri" pitchFamily="34" charset="-122"/>
-                <a:cs typeface="Calibri" pitchFamily="34" charset="-120"/>
-              </a:rPr>
-              <a:t>Le renard fait dodo… mais les pubs, elles, ne dorment jamais !</a:t>
-            </a:r>
-            <a:endParaRPr lang="en-US" sz="1900" dirty="0"/>
-          </a:p>
-        </p:txBody>
-      </p:sp>
-      <p:sp>
-        <p:nvSpPr>
-          <p:cNvPr id="6" name="Text 0"/>
+      <p:sp>
+        <p:nvSpPr>
+          <p:cNvPr id="2" name="Text 0"/>
           <p:cNvSpPr/>
           <p:nvPr>
             <p:ph idx="100" type="title" hasCustomPrompt="1"/>
@@ -5539,7 +5315,816 @@
             <a:pPr indent="0" marL="0">
               <a:buNone/>
             </a:pPr>
+            <a:r>
+              <a:rPr lang="en-US" sz="3000" b="1" dirty="0">
+                <a:solidFill>
+                  <a:schemeClr val="tx1"/>
+                </a:solidFill>
+              </a:rPr>
+              <a:t>Mission : piège le renard !</a:t>
+            </a:r>
             <a:endParaRPr lang="en-US" sz="3000" dirty="0"/>
+          </a:p>
+        </p:txBody>
+      </p:sp>
+      <p:sp>
+        <p:nvSpPr>
+          <p:cNvPr id="3" name="carte"/>
+          <p:cNvSpPr/>
+          <p:nvPr/>
+        </p:nvSpPr>
+        <p:spPr>
+          <a:xfrm>
+            <a:off x="640080" y="1234440"/>
+            <a:ext cx="1874520" cy="2377440"/>
+          </a:xfrm>
+          <a:prstGeom prst="roundRect">
+            <a:avLst>
+              <a:gd name="adj" fmla="val 8780"/>
+            </a:avLst>
+          </a:prstGeom>
+          <a:solidFill>
+            <a:schemeClr val="accent4"/>
+          </a:solidFill>
+          <a:ln w="12700">
+            <a:solidFill>
+              <a:schemeClr val="accent4"/>
+            </a:solidFill>
+            <a:prstDash val="solid"/>
+          </a:ln>
+          <a:effectLst>
+            <a:outerShdw sx="100000" sy="100000" kx="0" ky="0" algn="bl" rotWithShape="0" blurRad="101600" dist="38100" dir="5400000">
+              <a:srgbClr val="BFCFCC">
+                <a:alpha val="100000"/>
+              </a:srgbClr>
+            </a:outerShdw>
+          </a:effectLst>
+        </p:spPr>
+      </p:sp>
+      <p:sp>
+        <p:nvSpPr>
+          <p:cNvPr id="4" name="Shape 2"/>
+          <p:cNvSpPr/>
+          <p:nvPr/>
+        </p:nvSpPr>
+        <p:spPr>
+          <a:xfrm>
+            <a:off x="1307592" y="1371600"/>
+            <a:ext cx="548640" cy="548640"/>
+          </a:xfrm>
+          <a:prstGeom prst="ellipse">
+            <a:avLst/>
+          </a:prstGeom>
+          <a:solidFill>
+            <a:schemeClr val="accent1"/>
+          </a:solidFill>
+          <a:ln w="12700">
+            <a:solidFill>
+              <a:schemeClr val="accent1"/>
+            </a:solidFill>
+            <a:prstDash val="solid"/>
+          </a:ln>
+        </p:spPr>
+      </p:sp>
+      <p:sp>
+        <p:nvSpPr>
+          <p:cNvPr id="5" name="Text 3"/>
+          <p:cNvSpPr txBox="1"/>
+          <p:nvPr/>
+        </p:nvSpPr>
+        <p:spPr>
+          <a:xfrm>
+            <a:off x="1307592" y="1371600"/>
+            <a:ext cx="548640" cy="548640"/>
+          </a:xfrm>
+          <a:prstGeom prst="rect">
+            <a:avLst/>
+          </a:prstGeom>
+          <a:noFill/>
+          <a:ln/>
+        </p:spPr>
+        <p:txBody>
+          <a:bodyPr wrap="square" lIns="0" tIns="0" rIns="0" bIns="0" rtlCol="0" anchor="ctr"/>
+          <a:lstStyle/>
+          <a:p>
+            <a:pPr algn="ctr" indent="0" marL="0">
+              <a:buNone/>
+            </a:pPr>
+            <a:r>
+              <a:rPr lang="en-US" sz="2040" b="1" dirty="0">
+                <a:solidFill>
+                  <a:srgbClr val="FFFFFF"/>
+                </a:solidFill>
+                <a:latin typeface="Century Gothic" pitchFamily="34" charset="0"/>
+                <a:ea typeface="Century Gothic" pitchFamily="34" charset="-122"/>
+                <a:cs typeface="Century Gothic" pitchFamily="34" charset="-120"/>
+              </a:rPr>
+              <a:t>1</a:t>
+            </a:r>
+            <a:endParaRPr lang="en-US" sz="2040" dirty="0"/>
+          </a:p>
+        </p:txBody>
+      </p:sp>
+      <p:sp>
+        <p:nvSpPr>
+          <p:cNvPr id="6" name="Text 4"/>
+          <p:cNvSpPr txBox="1"/>
+          <p:nvPr/>
+        </p:nvSpPr>
+        <p:spPr>
+          <a:xfrm>
+            <a:off x="640080" y="2103120"/>
+            <a:ext cx="1874520" cy="411480"/>
+          </a:xfrm>
+          <a:prstGeom prst="rect">
+            <a:avLst/>
+          </a:prstGeom>
+          <a:noFill/>
+          <a:ln/>
+        </p:spPr>
+        <p:txBody>
+          <a:bodyPr wrap="square" lIns="1016" tIns="1016" rIns="1016" bIns="1016" rtlCol="0" anchor="t"/>
+          <a:lstStyle/>
+          <a:p>
+            <a:pPr algn="ctr" indent="0" marL="0">
+              <a:buNone/>
+            </a:pPr>
+            <a:r>
+              <a:rPr lang="en-US" sz="1700" b="1" dirty="0">
+                <a:solidFill>
+                  <a:schemeClr val="tx1"/>
+                </a:solidFill>
+                <a:latin typeface="Century Gothic" pitchFamily="34" charset="0"/>
+                <a:ea typeface="Century Gothic" pitchFamily="34" charset="-122"/>
+                <a:cs typeface="Century Gothic" pitchFamily="34" charset="-120"/>
+              </a:rPr>
+              <a:t>Je reçois</a:t>
+            </a:r>
+            <a:endParaRPr lang="en-US" sz="1700" dirty="0"/>
+          </a:p>
+        </p:txBody>
+      </p:sp>
+      <p:sp>
+        <p:nvSpPr>
+          <p:cNvPr id="7" name="Text 5"/>
+          <p:cNvSpPr txBox="1"/>
+          <p:nvPr/>
+        </p:nvSpPr>
+        <p:spPr>
+          <a:xfrm>
+            <a:off x="731520" y="2560320"/>
+            <a:ext cx="1691640" cy="914400"/>
+          </a:xfrm>
+          <a:prstGeom prst="rect">
+            <a:avLst/>
+          </a:prstGeom>
+          <a:noFill/>
+          <a:ln/>
+        </p:spPr>
+        <p:txBody>
+          <a:bodyPr wrap="square" lIns="1016" tIns="1016" rIns="1016" bIns="1016" rtlCol="0" anchor="t"/>
+          <a:lstStyle/>
+          <a:p>
+            <a:pPr algn="ctr" indent="0" marL="0">
+              <a:buNone/>
+            </a:pPr>
+            <a:r>
+              <a:rPr lang="en-US" sz="1300" dirty="0">
+                <a:solidFill>
+                  <a:schemeClr val="tx1"/>
+                </a:solidFill>
+                <a:latin typeface="Calibri" pitchFamily="34" charset="0"/>
+                <a:ea typeface="Calibri" pitchFamily="34" charset="-122"/>
+                <a:cs typeface="Calibri" pitchFamily="34" charset="-120"/>
+              </a:rPr>
+              <a:t>une carte-produit farfelue</a:t>
+            </a:r>
+            <a:endParaRPr lang="en-US" sz="1300" dirty="0"/>
+          </a:p>
+        </p:txBody>
+      </p:sp>
+      <p:sp>
+        <p:nvSpPr>
+          <p:cNvPr id="8" name="carte"/>
+          <p:cNvSpPr/>
+          <p:nvPr/>
+        </p:nvSpPr>
+        <p:spPr>
+          <a:xfrm>
+            <a:off x="2651760" y="1234440"/>
+            <a:ext cx="1874520" cy="2377440"/>
+          </a:xfrm>
+          <a:prstGeom prst="roundRect">
+            <a:avLst>
+              <a:gd name="adj" fmla="val 8780"/>
+            </a:avLst>
+          </a:prstGeom>
+          <a:solidFill>
+            <a:schemeClr val="accent3"/>
+          </a:solidFill>
+          <a:ln w="12700">
+            <a:solidFill>
+              <a:schemeClr val="accent3"/>
+            </a:solidFill>
+            <a:prstDash val="solid"/>
+          </a:ln>
+          <a:effectLst>
+            <a:outerShdw sx="100000" sy="100000" kx="0" ky="0" algn="bl" rotWithShape="0" blurRad="101600" dist="38100" dir="5400000">
+              <a:srgbClr val="BFCFCC">
+                <a:alpha val="100000"/>
+              </a:srgbClr>
+            </a:outerShdw>
+          </a:effectLst>
+        </p:spPr>
+      </p:sp>
+      <p:sp>
+        <p:nvSpPr>
+          <p:cNvPr id="9" name="Shape 7"/>
+          <p:cNvSpPr/>
+          <p:nvPr/>
+        </p:nvSpPr>
+        <p:spPr>
+          <a:xfrm>
+            <a:off x="3319272" y="1371600"/>
+            <a:ext cx="548640" cy="548640"/>
+          </a:xfrm>
+          <a:prstGeom prst="ellipse">
+            <a:avLst/>
+          </a:prstGeom>
+          <a:solidFill>
+            <a:schemeClr val="accent1"/>
+          </a:solidFill>
+          <a:ln w="12700">
+            <a:solidFill>
+              <a:schemeClr val="accent1"/>
+            </a:solidFill>
+            <a:prstDash val="solid"/>
+          </a:ln>
+        </p:spPr>
+      </p:sp>
+      <p:sp>
+        <p:nvSpPr>
+          <p:cNvPr id="10" name="Text 8"/>
+          <p:cNvSpPr txBox="1"/>
+          <p:nvPr/>
+        </p:nvSpPr>
+        <p:spPr>
+          <a:xfrm>
+            <a:off x="3319272" y="1371600"/>
+            <a:ext cx="548640" cy="548640"/>
+          </a:xfrm>
+          <a:prstGeom prst="rect">
+            <a:avLst/>
+          </a:prstGeom>
+          <a:noFill/>
+          <a:ln/>
+        </p:spPr>
+        <p:txBody>
+          <a:bodyPr wrap="square" lIns="0" tIns="0" rIns="0" bIns="0" rtlCol="0" anchor="ctr"/>
+          <a:lstStyle/>
+          <a:p>
+            <a:pPr algn="ctr" indent="0" marL="0">
+              <a:buNone/>
+            </a:pPr>
+            <a:r>
+              <a:rPr lang="en-US" sz="2040" b="1" dirty="0">
+                <a:solidFill>
+                  <a:srgbClr val="FFFFFF"/>
+                </a:solidFill>
+                <a:latin typeface="Century Gothic" pitchFamily="34" charset="0"/>
+                <a:ea typeface="Century Gothic" pitchFamily="34" charset="-122"/>
+                <a:cs typeface="Century Gothic" pitchFamily="34" charset="-120"/>
+              </a:rPr>
+              <a:t>2</a:t>
+            </a:r>
+            <a:endParaRPr lang="en-US" sz="2040" dirty="0"/>
+          </a:p>
+        </p:txBody>
+      </p:sp>
+      <p:sp>
+        <p:nvSpPr>
+          <p:cNvPr id="11" name="Text 9"/>
+          <p:cNvSpPr txBox="1"/>
+          <p:nvPr/>
+        </p:nvSpPr>
+        <p:spPr>
+          <a:xfrm>
+            <a:off x="2651760" y="2103120"/>
+            <a:ext cx="1874520" cy="411480"/>
+          </a:xfrm>
+          <a:prstGeom prst="rect">
+            <a:avLst/>
+          </a:prstGeom>
+          <a:noFill/>
+          <a:ln/>
+        </p:spPr>
+        <p:txBody>
+          <a:bodyPr wrap="square" lIns="1016" tIns="1016" rIns="1016" bIns="1016" rtlCol="0" anchor="t"/>
+          <a:lstStyle/>
+          <a:p>
+            <a:pPr algn="ctr" indent="0" marL="0">
+              <a:buNone/>
+            </a:pPr>
+            <a:r>
+              <a:rPr lang="en-US" sz="1700" b="1" dirty="0">
+                <a:solidFill>
+                  <a:schemeClr val="tx1"/>
+                </a:solidFill>
+                <a:latin typeface="Century Gothic" pitchFamily="34" charset="0"/>
+                <a:ea typeface="Century Gothic" pitchFamily="34" charset="-122"/>
+                <a:cs typeface="Century Gothic" pitchFamily="34" charset="-120"/>
+              </a:rPr>
+              <a:t>Je planifie</a:t>
+            </a:r>
+            <a:endParaRPr lang="en-US" sz="1700" dirty="0"/>
+          </a:p>
+        </p:txBody>
+      </p:sp>
+      <p:sp>
+        <p:nvSpPr>
+          <p:cNvPr id="12" name="Text 10"/>
+          <p:cNvSpPr txBox="1"/>
+          <p:nvPr/>
+        </p:nvSpPr>
+        <p:spPr>
+          <a:xfrm>
+            <a:off x="2743200" y="2560320"/>
+            <a:ext cx="1691640" cy="914400"/>
+          </a:xfrm>
+          <a:prstGeom prst="rect">
+            <a:avLst/>
+          </a:prstGeom>
+          <a:noFill/>
+          <a:ln/>
+        </p:spPr>
+        <p:txBody>
+          <a:bodyPr wrap="square" lIns="1016" tIns="1016" rIns="1016" bIns="1016" rtlCol="0" anchor="t"/>
+          <a:lstStyle/>
+          <a:p>
+            <a:pPr algn="ctr" indent="0" marL="0">
+              <a:buNone/>
+            </a:pPr>
+            <a:r>
+              <a:rPr lang="en-US" sz="1300" dirty="0">
+                <a:solidFill>
+                  <a:schemeClr val="tx1"/>
+                </a:solidFill>
+                <a:latin typeface="Calibri" pitchFamily="34" charset="0"/>
+                <a:ea typeface="Calibri" pitchFamily="34" charset="-122"/>
+                <a:cs typeface="Calibri" pitchFamily="34" charset="-120"/>
+              </a:rPr>
+              <a:t>cahier p. 4 : slogan, prix, au moins 3 ruses</a:t>
+            </a:r>
+            <a:endParaRPr lang="en-US" sz="1300" dirty="0"/>
+          </a:p>
+        </p:txBody>
+      </p:sp>
+      <p:sp>
+        <p:nvSpPr>
+          <p:cNvPr id="13" name="carte"/>
+          <p:cNvSpPr/>
+          <p:nvPr/>
+        </p:nvSpPr>
+        <p:spPr>
+          <a:xfrm>
+            <a:off x="4663440" y="1234440"/>
+            <a:ext cx="1874520" cy="2377440"/>
+          </a:xfrm>
+          <a:prstGeom prst="roundRect">
+            <a:avLst>
+              <a:gd name="adj" fmla="val 8780"/>
+            </a:avLst>
+          </a:prstGeom>
+          <a:solidFill>
+            <a:schemeClr val="accent2"/>
+          </a:solidFill>
+          <a:ln w="12700">
+            <a:solidFill>
+              <a:schemeClr val="accent2"/>
+            </a:solidFill>
+            <a:prstDash val="solid"/>
+          </a:ln>
+          <a:effectLst>
+            <a:outerShdw sx="100000" sy="100000" kx="0" ky="0" algn="bl" rotWithShape="0" blurRad="101600" dist="38100" dir="5400000">
+              <a:srgbClr val="BFCFCC">
+                <a:alpha val="100000"/>
+              </a:srgbClr>
+            </a:outerShdw>
+          </a:effectLst>
+        </p:spPr>
+      </p:sp>
+      <p:sp>
+        <p:nvSpPr>
+          <p:cNvPr id="14" name="Shape 12"/>
+          <p:cNvSpPr/>
+          <p:nvPr/>
+        </p:nvSpPr>
+        <p:spPr>
+          <a:xfrm>
+            <a:off x="5330952" y="1371600"/>
+            <a:ext cx="548640" cy="548640"/>
+          </a:xfrm>
+          <a:prstGeom prst="ellipse">
+            <a:avLst/>
+          </a:prstGeom>
+          <a:solidFill>
+            <a:schemeClr val="accent1"/>
+          </a:solidFill>
+          <a:ln w="12700">
+            <a:solidFill>
+              <a:schemeClr val="accent1"/>
+            </a:solidFill>
+            <a:prstDash val="solid"/>
+          </a:ln>
+        </p:spPr>
+      </p:sp>
+      <p:sp>
+        <p:nvSpPr>
+          <p:cNvPr id="15" name="Text 13"/>
+          <p:cNvSpPr txBox="1"/>
+          <p:nvPr/>
+        </p:nvSpPr>
+        <p:spPr>
+          <a:xfrm>
+            <a:off x="5330952" y="1371600"/>
+            <a:ext cx="548640" cy="548640"/>
+          </a:xfrm>
+          <a:prstGeom prst="rect">
+            <a:avLst/>
+          </a:prstGeom>
+          <a:noFill/>
+          <a:ln/>
+        </p:spPr>
+        <p:txBody>
+          <a:bodyPr wrap="square" lIns="0" tIns="0" rIns="0" bIns="0" rtlCol="0" anchor="ctr"/>
+          <a:lstStyle/>
+          <a:p>
+            <a:pPr algn="ctr" indent="0" marL="0">
+              <a:buNone/>
+            </a:pPr>
+            <a:r>
+              <a:rPr lang="en-US" sz="2040" b="1" dirty="0">
+                <a:solidFill>
+                  <a:srgbClr val="FFFFFF"/>
+                </a:solidFill>
+                <a:latin typeface="Century Gothic" pitchFamily="34" charset="0"/>
+                <a:ea typeface="Century Gothic" pitchFamily="34" charset="-122"/>
+                <a:cs typeface="Century Gothic" pitchFamily="34" charset="-120"/>
+              </a:rPr>
+              <a:t>3</a:t>
+            </a:r>
+            <a:endParaRPr lang="en-US" sz="2040" dirty="0"/>
+          </a:p>
+        </p:txBody>
+      </p:sp>
+      <p:sp>
+        <p:nvSpPr>
+          <p:cNvPr id="16" name="Text 14"/>
+          <p:cNvSpPr txBox="1"/>
+          <p:nvPr/>
+        </p:nvSpPr>
+        <p:spPr>
+          <a:xfrm>
+            <a:off x="4663440" y="2103120"/>
+            <a:ext cx="1874520" cy="411480"/>
+          </a:xfrm>
+          <a:prstGeom prst="rect">
+            <a:avLst/>
+          </a:prstGeom>
+          <a:noFill/>
+          <a:ln/>
+        </p:spPr>
+        <p:txBody>
+          <a:bodyPr wrap="square" lIns="1016" tIns="1016" rIns="1016" bIns="1016" rtlCol="0" anchor="t"/>
+          <a:lstStyle/>
+          <a:p>
+            <a:pPr algn="ctr" indent="0" marL="0">
+              <a:buNone/>
+            </a:pPr>
+            <a:r>
+              <a:rPr lang="en-US" sz="1700" b="1" dirty="0">
+                <a:solidFill>
+                  <a:schemeClr val="tx1"/>
+                </a:solidFill>
+                <a:latin typeface="Century Gothic" pitchFamily="34" charset="0"/>
+                <a:ea typeface="Century Gothic" pitchFamily="34" charset="-122"/>
+                <a:cs typeface="Century Gothic" pitchFamily="34" charset="-120"/>
+              </a:rPr>
+              <a:t>Je fabrique</a:t>
+            </a:r>
+            <a:endParaRPr lang="en-US" sz="1700" dirty="0"/>
+          </a:p>
+        </p:txBody>
+      </p:sp>
+      <p:sp>
+        <p:nvSpPr>
+          <p:cNvPr id="17" name="Text 15"/>
+          <p:cNvSpPr txBox="1"/>
+          <p:nvPr/>
+        </p:nvSpPr>
+        <p:spPr>
+          <a:xfrm>
+            <a:off x="4754880" y="2560320"/>
+            <a:ext cx="1691640" cy="914400"/>
+          </a:xfrm>
+          <a:prstGeom prst="rect">
+            <a:avLst/>
+          </a:prstGeom>
+          <a:noFill/>
+          <a:ln/>
+        </p:spPr>
+        <p:txBody>
+          <a:bodyPr wrap="square" lIns="1016" tIns="1016" rIns="1016" bIns="1016" rtlCol="0" anchor="t"/>
+          <a:lstStyle/>
+          <a:p>
+            <a:pPr algn="ctr" indent="0" marL="0">
+              <a:buNone/>
+            </a:pPr>
+            <a:r>
+              <a:rPr lang="en-US" sz="1300" dirty="0">
+                <a:solidFill>
+                  <a:schemeClr val="tx1"/>
+                </a:solidFill>
+                <a:latin typeface="Calibri" pitchFamily="34" charset="0"/>
+                <a:ea typeface="Calibri" pitchFamily="34" charset="-122"/>
+                <a:cs typeface="Calibri" pitchFamily="34" charset="-120"/>
+              </a:rPr>
+              <a:t>ma pub à l'ordi ou sur papier</a:t>
+            </a:r>
+            <a:endParaRPr lang="en-US" sz="1300" dirty="0"/>
+          </a:p>
+        </p:txBody>
+      </p:sp>
+      <p:sp>
+        <p:nvSpPr>
+          <p:cNvPr id="18" name="carte"/>
+          <p:cNvSpPr/>
+          <p:nvPr/>
+        </p:nvSpPr>
+        <p:spPr>
+          <a:xfrm>
+            <a:off x="6675120" y="1234440"/>
+            <a:ext cx="1874520" cy="2377440"/>
+          </a:xfrm>
+          <a:prstGeom prst="roundRect">
+            <a:avLst>
+              <a:gd name="adj" fmla="val 8780"/>
+            </a:avLst>
+          </a:prstGeom>
+          <a:solidFill>
+            <a:schemeClr val="accent6"/>
+          </a:solidFill>
+          <a:ln w="12700">
+            <a:solidFill>
+              <a:schemeClr val="accent6"/>
+            </a:solidFill>
+            <a:prstDash val="solid"/>
+          </a:ln>
+          <a:effectLst>
+            <a:outerShdw sx="100000" sy="100000" kx="0" ky="0" algn="bl" rotWithShape="0" blurRad="101600" dist="38100" dir="5400000">
+              <a:srgbClr val="BFCFCC">
+                <a:alpha val="100000"/>
+              </a:srgbClr>
+            </a:outerShdw>
+          </a:effectLst>
+        </p:spPr>
+      </p:sp>
+      <p:sp>
+        <p:nvSpPr>
+          <p:cNvPr id="19" name="Shape 17"/>
+          <p:cNvSpPr/>
+          <p:nvPr/>
+        </p:nvSpPr>
+        <p:spPr>
+          <a:xfrm>
+            <a:off x="7342632" y="1371600"/>
+            <a:ext cx="548640" cy="548640"/>
+          </a:xfrm>
+          <a:prstGeom prst="ellipse">
+            <a:avLst/>
+          </a:prstGeom>
+          <a:solidFill>
+            <a:schemeClr val="accent1"/>
+          </a:solidFill>
+          <a:ln w="12700">
+            <a:solidFill>
+              <a:schemeClr val="accent1"/>
+            </a:solidFill>
+            <a:prstDash val="solid"/>
+          </a:ln>
+        </p:spPr>
+      </p:sp>
+      <p:sp>
+        <p:nvSpPr>
+          <p:cNvPr id="20" name="Text 18"/>
+          <p:cNvSpPr txBox="1"/>
+          <p:nvPr/>
+        </p:nvSpPr>
+        <p:spPr>
+          <a:xfrm>
+            <a:off x="7342632" y="1371600"/>
+            <a:ext cx="548640" cy="548640"/>
+          </a:xfrm>
+          <a:prstGeom prst="rect">
+            <a:avLst/>
+          </a:prstGeom>
+          <a:noFill/>
+          <a:ln/>
+        </p:spPr>
+        <p:txBody>
+          <a:bodyPr wrap="square" lIns="0" tIns="0" rIns="0" bIns="0" rtlCol="0" anchor="ctr"/>
+          <a:lstStyle/>
+          <a:p>
+            <a:pPr algn="ctr" indent="0" marL="0">
+              <a:buNone/>
+            </a:pPr>
+            <a:r>
+              <a:rPr lang="en-US" sz="2040" b="1" dirty="0">
+                <a:solidFill>
+                  <a:srgbClr val="FFFFFF"/>
+                </a:solidFill>
+                <a:latin typeface="Century Gothic" pitchFamily="34" charset="0"/>
+                <a:ea typeface="Century Gothic" pitchFamily="34" charset="-122"/>
+                <a:cs typeface="Century Gothic" pitchFamily="34" charset="-120"/>
+              </a:rPr>
+              <a:t>4</a:t>
+            </a:r>
+            <a:endParaRPr lang="en-US" sz="2040" dirty="0"/>
+          </a:p>
+        </p:txBody>
+      </p:sp>
+      <p:sp>
+        <p:nvSpPr>
+          <p:cNvPr id="21" name="Text 19"/>
+          <p:cNvSpPr txBox="1"/>
+          <p:nvPr/>
+        </p:nvSpPr>
+        <p:spPr>
+          <a:xfrm>
+            <a:off x="6675120" y="2103120"/>
+            <a:ext cx="1874520" cy="411480"/>
+          </a:xfrm>
+          <a:prstGeom prst="rect">
+            <a:avLst/>
+          </a:prstGeom>
+          <a:noFill/>
+          <a:ln/>
+        </p:spPr>
+        <p:txBody>
+          <a:bodyPr wrap="square" lIns="1016" tIns="1016" rIns="1016" bIns="1016" rtlCol="0" anchor="t"/>
+          <a:lstStyle/>
+          <a:p>
+            <a:pPr algn="ctr" indent="0" marL="0">
+              <a:buNone/>
+            </a:pPr>
+            <a:r>
+              <a:rPr lang="en-US" sz="1700" b="1" dirty="0">
+                <a:solidFill>
+                  <a:schemeClr val="tx1"/>
+                </a:solidFill>
+                <a:latin typeface="Century Gothic" pitchFamily="34" charset="0"/>
+                <a:ea typeface="Century Gothic" pitchFamily="34" charset="-122"/>
+                <a:cs typeface="Century Gothic" pitchFamily="34" charset="-120"/>
+              </a:rPr>
+              <a:t>Je cache</a:t>
+            </a:r>
+            <a:endParaRPr lang="en-US" sz="1700" dirty="0"/>
+          </a:p>
+        </p:txBody>
+      </p:sp>
+      <p:sp>
+        <p:nvSpPr>
+          <p:cNvPr id="22" name="Text 20"/>
+          <p:cNvSpPr txBox="1"/>
+          <p:nvPr/>
+        </p:nvSpPr>
+        <p:spPr>
+          <a:xfrm>
+            <a:off x="6766560" y="2560320"/>
+            <a:ext cx="1691640" cy="914400"/>
+          </a:xfrm>
+          <a:prstGeom prst="rect">
+            <a:avLst/>
+          </a:prstGeom>
+          <a:noFill/>
+          <a:ln/>
+        </p:spPr>
+        <p:txBody>
+          <a:bodyPr wrap="square" lIns="1016" tIns="1016" rIns="1016" bIns="1016" rtlCol="0" anchor="t"/>
+          <a:lstStyle/>
+          <a:p>
+            <a:pPr algn="ctr" indent="0" marL="0">
+              <a:buNone/>
+            </a:pPr>
+            <a:r>
+              <a:rPr lang="en-US" sz="1300" dirty="0">
+                <a:solidFill>
+                  <a:schemeClr val="tx1"/>
+                </a:solidFill>
+                <a:latin typeface="Calibri" pitchFamily="34" charset="0"/>
+                <a:ea typeface="Calibri" pitchFamily="34" charset="-122"/>
+                <a:cs typeface="Calibri" pitchFamily="34" charset="-120"/>
+              </a:rPr>
+              <a:t>mes ruses… le renard est rusé !</a:t>
+            </a:r>
+            <a:endParaRPr lang="en-US" sz="1300" dirty="0"/>
+          </a:p>
+        </p:txBody>
+      </p:sp>
+      <p:sp>
+        <p:nvSpPr>
+          <p:cNvPr id="23" name="bulle"/>
+          <p:cNvSpPr/>
+          <p:nvPr/>
+        </p:nvSpPr>
+        <p:spPr>
+          <a:xfrm>
+            <a:off x="640080" y="3886200"/>
+            <a:ext cx="7818120" cy="685800"/>
+          </a:xfrm>
+          <a:prstGeom prst="roundRect">
+            <a:avLst>
+              <a:gd name="adj" fmla="val 24000"/>
+            </a:avLst>
+          </a:prstGeom>
+          <a:solidFill>
+            <a:srgbClr val="FFFFFF"/>
+          </a:solidFill>
+          <a:ln w="12700">
+            <a:solidFill>
+              <a:srgbClr val="FFFFFF"/>
+            </a:solidFill>
+            <a:prstDash val="solid"/>
+          </a:ln>
+          <a:effectLst>
+            <a:outerShdw sx="100000" sy="100000" kx="0" ky="0" algn="bl" rotWithShape="0" blurRad="101600" dist="38100" dir="5400000">
+              <a:srgbClr val="BFCFCC">
+                <a:alpha val="100000"/>
+              </a:srgbClr>
+            </a:outerShdw>
+          </a:effectLst>
+        </p:spPr>
+      </p:sp>
+      <p:sp>
+        <p:nvSpPr>
+          <p:cNvPr id="24" name="Shape 22"/>
+          <p:cNvSpPr/>
+          <p:nvPr/>
+        </p:nvSpPr>
+        <p:spPr>
+          <a:xfrm>
+            <a:off x="640080" y="3886200"/>
+            <a:ext cx="7818120" cy="685800"/>
+          </a:xfrm>
+          <a:prstGeom prst="roundRect">
+            <a:avLst>
+              <a:gd name="adj" fmla="val 24000"/>
+            </a:avLst>
+          </a:prstGeom>
+          <a:ln w="25400">
+            <a:solidFill>
+              <a:schemeClr val="accent1"/>
+            </a:solidFill>
+            <a:prstDash val="solid"/>
+          </a:ln>
+        </p:spPr>
+      </p:sp>
+      <p:sp>
+        <p:nvSpPr>
+          <p:cNvPr id="25" name="Text 23"/>
+          <p:cNvSpPr txBox="1"/>
+          <p:nvPr/>
+        </p:nvSpPr>
+        <p:spPr>
+          <a:xfrm>
+            <a:off x="731520" y="3931920"/>
+            <a:ext cx="7635240" cy="594360"/>
+          </a:xfrm>
+          <a:prstGeom prst="rect">
+            <a:avLst/>
+          </a:prstGeom>
+          <a:noFill/>
+          <a:ln/>
+        </p:spPr>
+        <p:txBody>
+          <a:bodyPr wrap="square" lIns="1016" tIns="1016" rIns="1016" bIns="1016" rtlCol="0" anchor="ctr"/>
+          <a:lstStyle/>
+          <a:p>
+            <a:pPr indent="0" marL="0">
+              <a:buNone/>
+            </a:pPr>
+            <a:r>
+              <a:rPr lang="en-US" sz="1500" i="1" dirty="0">
+                <a:solidFill>
+                  <a:schemeClr val="tx1"/>
+                </a:solidFill>
+                <a:latin typeface="Calibri" pitchFamily="34" charset="0"/>
+                <a:ea typeface="Calibri" pitchFamily="34" charset="-122"/>
+                <a:cs typeface="Calibri" pitchFamily="34" charset="-120"/>
+              </a:rPr>
+              <a:t>Le produit est inutile ? Parfait ! Ta pub doit quand même donner envie : c'est ça, le défi.</a:t>
+            </a:r>
+            <a:endParaRPr lang="en-US" sz="1500" dirty="0"/>
           </a:p>
         </p:txBody>
       </p:sp>
@@ -5648,7 +6233,7 @@
                   <a:schemeClr val="tx1"/>
                 </a:solidFill>
               </a:rPr>
-              <a:t>Mission : piège le renard ! 🪤</a:t>
+              <a:t>Deux ateliers au choix</a:t>
             </a:r>
             <a:endParaRPr lang="en-US" sz="3000" dirty="0"/>
           </a:p>
@@ -5662,12 +6247,12 @@
         </p:nvSpPr>
         <p:spPr>
           <a:xfrm>
-            <a:off x="640080" y="1234440"/>
-            <a:ext cx="1874520" cy="2377440"/>
+            <a:off x="640080" y="1188720"/>
+            <a:ext cx="3749040" cy="2743200"/>
           </a:xfrm>
           <a:prstGeom prst="roundRect">
             <a:avLst>
-              <a:gd name="adj" fmla="val 8780"/>
+              <a:gd name="adj" fmla="val 6000"/>
             </a:avLst>
           </a:prstGeom>
           <a:solidFill>
@@ -5690,135 +6275,18 @@
       </p:sp>
       <p:sp>
         <p:nvSpPr>
-          <p:cNvPr id="4" name="Text 2"/>
-          <p:cNvSpPr txBox="1"/>
-          <p:nvPr/>
-        </p:nvSpPr>
-        <p:spPr>
-          <a:xfrm>
-            <a:off x="640080" y="1325880"/>
-            <a:ext cx="1874520" cy="731520"/>
-          </a:xfrm>
-          <a:prstGeom prst="rect">
-            <a:avLst/>
-          </a:prstGeom>
-          <a:noFill/>
-          <a:ln/>
-        </p:spPr>
-        <p:txBody>
-          <a:bodyPr wrap="square" lIns="1016" tIns="1016" rIns="1016" bIns="1016" rtlCol="0" anchor="t"/>
-          <a:lstStyle/>
-          <a:p>
-            <a:pPr algn="ctr" indent="0" marL="0">
-              <a:buNone/>
-            </a:pPr>
-            <a:r>
-              <a:rPr lang="en-US" sz="3200" dirty="0">
-                <a:solidFill>
-                  <a:schemeClr val="tx1"/>
-                </a:solidFill>
-                <a:latin typeface="Calibri" pitchFamily="34" charset="0"/>
-                <a:ea typeface="Calibri" pitchFamily="34" charset="-122"/>
-                <a:cs typeface="Calibri" pitchFamily="34" charset="-120"/>
-              </a:rPr>
-              <a:t>🎲</a:t>
-            </a:r>
-            <a:endParaRPr lang="en-US" sz="3200" dirty="0"/>
-          </a:p>
-        </p:txBody>
-      </p:sp>
-      <p:sp>
-        <p:nvSpPr>
-          <p:cNvPr id="5" name="Text 3"/>
-          <p:cNvSpPr txBox="1"/>
-          <p:nvPr/>
-        </p:nvSpPr>
-        <p:spPr>
-          <a:xfrm>
-            <a:off x="640080" y="2103120"/>
-            <a:ext cx="1874520" cy="411480"/>
-          </a:xfrm>
-          <a:prstGeom prst="rect">
-            <a:avLst/>
-          </a:prstGeom>
-          <a:noFill/>
-          <a:ln/>
-        </p:spPr>
-        <p:txBody>
-          <a:bodyPr wrap="square" lIns="1016" tIns="1016" rIns="1016" bIns="1016" rtlCol="0" anchor="t"/>
-          <a:lstStyle/>
-          <a:p>
-            <a:pPr algn="ctr" indent="0" marL="0">
-              <a:buNone/>
-            </a:pPr>
-            <a:r>
-              <a:rPr lang="en-US" sz="1700" b="1" dirty="0">
-                <a:solidFill>
-                  <a:schemeClr val="tx1"/>
-                </a:solidFill>
-                <a:latin typeface="Century Gothic" pitchFamily="34" charset="0"/>
-                <a:ea typeface="Century Gothic" pitchFamily="34" charset="-122"/>
-                <a:cs typeface="Century Gothic" pitchFamily="34" charset="-120"/>
-              </a:rPr>
-              <a:t>Je pige</a:t>
-            </a:r>
-            <a:endParaRPr lang="en-US" sz="1700" dirty="0"/>
-          </a:p>
-        </p:txBody>
-      </p:sp>
-      <p:sp>
-        <p:nvSpPr>
-          <p:cNvPr id="6" name="Text 4"/>
-          <p:cNvSpPr txBox="1"/>
-          <p:nvPr/>
-        </p:nvSpPr>
-        <p:spPr>
-          <a:xfrm>
-            <a:off x="731520" y="2560320"/>
-            <a:ext cx="1691640" cy="914400"/>
-          </a:xfrm>
-          <a:prstGeom prst="rect">
-            <a:avLst/>
-          </a:prstGeom>
-          <a:noFill/>
-          <a:ln/>
-        </p:spPr>
-        <p:txBody>
-          <a:bodyPr wrap="square" lIns="1016" tIns="1016" rIns="1016" bIns="1016" rtlCol="0" anchor="t"/>
-          <a:lstStyle/>
-          <a:p>
-            <a:pPr algn="ctr" indent="0" marL="0">
-              <a:buNone/>
-            </a:pPr>
-            <a:r>
-              <a:rPr lang="en-US" sz="1300" dirty="0">
-                <a:solidFill>
-                  <a:schemeClr val="tx1"/>
-                </a:solidFill>
-                <a:latin typeface="Calibri" pitchFamily="34" charset="0"/>
-                <a:ea typeface="Calibri" pitchFamily="34" charset="-122"/>
-                <a:cs typeface="Calibri" pitchFamily="34" charset="-120"/>
-              </a:rPr>
-              <a:t>une carte-produit farfelue</a:t>
-            </a:r>
-            <a:endParaRPr lang="en-US" sz="1300" dirty="0"/>
-          </a:p>
-        </p:txBody>
-      </p:sp>
-      <p:sp>
-        <p:nvSpPr>
-          <p:cNvPr id="7" name="carte"/>
+          <p:cNvPr id="4" name="carte"/>
           <p:cNvSpPr/>
           <p:nvPr/>
         </p:nvSpPr>
         <p:spPr>
           <a:xfrm>
-            <a:off x="2651760" y="1234440"/>
-            <a:ext cx="1874520" cy="2377440"/>
+            <a:off x="4663440" y="1188720"/>
+            <a:ext cx="3749040" cy="2743200"/>
           </a:xfrm>
           <a:prstGeom prst="roundRect">
             <a:avLst>
-              <a:gd name="adj" fmla="val 8780"/>
+              <a:gd name="adj" fmla="val 6000"/>
             </a:avLst>
           </a:prstGeom>
           <a:solidFill>
@@ -5841,30 +6309,53 @@
       </p:sp>
       <p:sp>
         <p:nvSpPr>
-          <p:cNvPr id="8" name="Text 6"/>
+          <p:cNvPr id="5" name="Text 3"/>
           <p:cNvSpPr txBox="1"/>
           <p:nvPr/>
         </p:nvSpPr>
         <p:spPr>
           <a:xfrm>
-            <a:off x="2651760" y="1325880"/>
-            <a:ext cx="1874520" cy="731520"/>
-          </a:xfrm>
-          <a:prstGeom prst="rect">
-            <a:avLst/>
-          </a:prstGeom>
-          <a:noFill/>
-          <a:ln/>
-        </p:spPr>
-        <p:txBody>
-          <a:bodyPr wrap="square" lIns="1016" tIns="1016" rIns="1016" bIns="1016" rtlCol="0" anchor="t"/>
+            <a:off x="822960" y="1325880"/>
+            <a:ext cx="3383280" cy="2468880"/>
+          </a:xfrm>
+          <a:prstGeom prst="rect">
+            <a:avLst/>
+          </a:prstGeom>
+          <a:noFill/>
+          <a:ln/>
+        </p:spPr>
+        <p:txBody>
+          <a:bodyPr wrap="square" lIns="1016" tIns="1016" rIns="1016" bIns="1016" rtlCol="0" anchor="ctr"/>
           <a:lstStyle/>
           <a:p>
             <a:pPr algn="ctr" indent="0" marL="0">
-              <a:buNone/>
-            </a:pPr>
-            <a:r>
-              <a:rPr lang="en-US" sz="3200" dirty="0">
+              <a:spcAft>
+                <a:spcPts val="600"/>
+              </a:spcAft>
+              <a:buNone/>
+            </a:pPr>
+            <a:r>
+              <a:rPr lang="en-US" sz="2200" b="1" dirty="0">
+                <a:solidFill>
+                  <a:schemeClr val="tx1"/>
+                </a:solidFill>
+                <a:latin typeface="Century Gothic" pitchFamily="34" charset="0"/>
+                <a:ea typeface="Century Gothic" pitchFamily="34" charset="-122"/>
+                <a:cs typeface="Century Gothic" pitchFamily="34" charset="-120"/>
+              </a:rPr>
+              <a:t>À l'ordinateur</a:t>
+            </a:r>
+            <a:endParaRPr lang="en-US" sz="2200" dirty="0"/>
+          </a:p>
+          <a:p>
+            <a:pPr algn="ctr" indent="0" marL="0">
+              <a:spcAft>
+                <a:spcPts val="600"/>
+              </a:spcAft>
+              <a:buNone/>
+            </a:pPr>
+            <a:r>
+              <a:rPr lang="en-US" sz="1500" b="1" dirty="0">
                 <a:solidFill>
                   <a:schemeClr val="tx1"/>
                 </a:solidFill>
@@ -5872,38 +6363,61 @@
                 <a:ea typeface="Calibri" pitchFamily="34" charset="-122"/>
                 <a:cs typeface="Calibri" pitchFamily="34" charset="-120"/>
               </a:rPr>
-              <a:t>📝</a:t>
-            </a:r>
-            <a:endParaRPr lang="en-US" sz="3200" dirty="0"/>
-          </a:p>
-        </p:txBody>
-      </p:sp>
-      <p:sp>
-        <p:nvSpPr>
-          <p:cNvPr id="9" name="Text 7"/>
+              <a:t>Atelier « Piège le renard ! »</a:t>
+            </a:r>
+            <a:endParaRPr lang="en-US" sz="2200" dirty="0"/>
+          </a:p>
+          <a:p>
+            <a:pPr algn="ctr" indent="0" marL="0">
+              <a:spcAft>
+                <a:spcPts val="600"/>
+              </a:spcAft>
+              <a:buNone/>
+            </a:pPr>
+            <a:r>
+              <a:rPr lang="en-US" sz="1400" dirty="0">
+                <a:solidFill>
+                  <a:schemeClr val="tx1"/>
+                </a:solidFill>
+                <a:latin typeface="Calibri" pitchFamily="34" charset="0"/>
+                <a:ea typeface="Calibri" pitchFamily="34" charset="-122"/>
+                <a:cs typeface="Calibri" pitchFamily="34" charset="-120"/>
+              </a:rPr>
+              <a:t>Je choisis mes ruses, mes couleurs, mon prix. Je télécharge l'image et je la publie dans le canal Teams.</a:t>
+            </a:r>
+            <a:endParaRPr lang="en-US" sz="2200" dirty="0"/>
+          </a:p>
+        </p:txBody>
+      </p:sp>
+      <p:sp>
+        <p:nvSpPr>
+          <p:cNvPr id="6" name="Text 4"/>
           <p:cNvSpPr txBox="1"/>
           <p:nvPr/>
         </p:nvSpPr>
         <p:spPr>
           <a:xfrm>
-            <a:off x="2651760" y="2103120"/>
-            <a:ext cx="1874520" cy="411480"/>
-          </a:xfrm>
-          <a:prstGeom prst="rect">
-            <a:avLst/>
-          </a:prstGeom>
-          <a:noFill/>
-          <a:ln/>
-        </p:spPr>
-        <p:txBody>
-          <a:bodyPr wrap="square" lIns="1016" tIns="1016" rIns="1016" bIns="1016" rtlCol="0" anchor="t"/>
+            <a:off x="4846320" y="1325880"/>
+            <a:ext cx="3383280" cy="2468880"/>
+          </a:xfrm>
+          <a:prstGeom prst="rect">
+            <a:avLst/>
+          </a:prstGeom>
+          <a:noFill/>
+          <a:ln/>
+        </p:spPr>
+        <p:txBody>
+          <a:bodyPr wrap="square" lIns="1016" tIns="1016" rIns="1016" bIns="1016" rtlCol="0" anchor="ctr"/>
           <a:lstStyle/>
           <a:p>
             <a:pPr algn="ctr" indent="0" marL="0">
-              <a:buNone/>
-            </a:pPr>
-            <a:r>
-              <a:rPr lang="en-US" sz="1700" b="1" dirty="0">
+              <a:spcAft>
+                <a:spcPts val="600"/>
+              </a:spcAft>
+              <a:buNone/>
+            </a:pPr>
+            <a:r>
+              <a:rPr lang="en-US" sz="2200" b="1" dirty="0">
                 <a:solidFill>
                   <a:schemeClr val="tx1"/>
                 </a:solidFill>
@@ -5911,38 +6425,19 @@
                 <a:ea typeface="Century Gothic" pitchFamily="34" charset="-122"/>
                 <a:cs typeface="Century Gothic" pitchFamily="34" charset="-120"/>
               </a:rPr>
-              <a:t>Je planifie</a:t>
-            </a:r>
-            <a:endParaRPr lang="en-US" sz="1700" dirty="0"/>
-          </a:p>
-        </p:txBody>
-      </p:sp>
-      <p:sp>
-        <p:nvSpPr>
-          <p:cNvPr id="10" name="Text 8"/>
-          <p:cNvSpPr txBox="1"/>
-          <p:nvPr/>
-        </p:nvSpPr>
-        <p:spPr>
-          <a:xfrm>
-            <a:off x="2743200" y="2560320"/>
-            <a:ext cx="1691640" cy="914400"/>
-          </a:xfrm>
-          <a:prstGeom prst="rect">
-            <a:avLst/>
-          </a:prstGeom>
-          <a:noFill/>
-          <a:ln/>
-        </p:spPr>
-        <p:txBody>
-          <a:bodyPr wrap="square" lIns="1016" tIns="1016" rIns="1016" bIns="1016" rtlCol="0" anchor="t"/>
-          <a:lstStyle/>
+              <a:t>Sur papier</a:t>
+            </a:r>
+            <a:endParaRPr lang="en-US" sz="2200" dirty="0"/>
+          </a:p>
           <a:p>
             <a:pPr algn="ctr" indent="0" marL="0">
-              <a:buNone/>
-            </a:pPr>
-            <a:r>
-              <a:rPr lang="en-US" sz="1300" dirty="0">
+              <a:spcAft>
+                <a:spcPts val="600"/>
+              </a:spcAft>
+              <a:buNone/>
+            </a:pPr>
+            <a:r>
+              <a:rPr lang="en-US" sz="1500" b="1" dirty="0">
                 <a:solidFill>
                   <a:schemeClr val="tx1"/>
                 </a:solidFill>
@@ -5950,72 +6445,19 @@
                 <a:ea typeface="Calibri" pitchFamily="34" charset="-122"/>
                 <a:cs typeface="Calibri" pitchFamily="34" charset="-120"/>
               </a:rPr>
-              <a:t>cahier p. 4 : slogan, prix, au moins 3 ruses</a:t>
-            </a:r>
-            <a:endParaRPr lang="en-US" sz="1300" dirty="0"/>
-          </a:p>
-        </p:txBody>
-      </p:sp>
-      <p:sp>
-        <p:nvSpPr>
-          <p:cNvPr id="11" name="carte"/>
-          <p:cNvSpPr/>
-          <p:nvPr/>
-        </p:nvSpPr>
-        <p:spPr>
-          <a:xfrm>
-            <a:off x="4663440" y="1234440"/>
-            <a:ext cx="1874520" cy="2377440"/>
-          </a:xfrm>
-          <a:prstGeom prst="roundRect">
-            <a:avLst>
-              <a:gd name="adj" fmla="val 8780"/>
-            </a:avLst>
-          </a:prstGeom>
-          <a:solidFill>
-            <a:schemeClr val="accent2"/>
-          </a:solidFill>
-          <a:ln w="12700">
-            <a:solidFill>
-              <a:schemeClr val="accent2"/>
-            </a:solidFill>
-            <a:prstDash val="solid"/>
-          </a:ln>
-          <a:effectLst>
-            <a:outerShdw sx="100000" sy="100000" kx="0" ky="0" algn="bl" rotWithShape="0" blurRad="101600" dist="38100" dir="5400000">
-              <a:srgbClr val="BFCFCC">
-                <a:alpha val="100000"/>
-              </a:srgbClr>
-            </a:outerShdw>
-          </a:effectLst>
-        </p:spPr>
-      </p:sp>
-      <p:sp>
-        <p:nvSpPr>
-          <p:cNvPr id="12" name="Text 10"/>
-          <p:cNvSpPr txBox="1"/>
-          <p:nvPr/>
-        </p:nvSpPr>
-        <p:spPr>
-          <a:xfrm>
-            <a:off x="4663440" y="1325880"/>
-            <a:ext cx="1874520" cy="731520"/>
-          </a:xfrm>
-          <a:prstGeom prst="rect">
-            <a:avLst/>
-          </a:prstGeom>
-          <a:noFill/>
-          <a:ln/>
-        </p:spPr>
-        <p:txBody>
-          <a:bodyPr wrap="square" lIns="1016" tIns="1016" rIns="1016" bIns="1016" rtlCol="0" anchor="t"/>
-          <a:lstStyle/>
+              <a:t>Gabarit + étiquettes-ruses</a:t>
+            </a:r>
+            <a:endParaRPr lang="en-US" sz="2200" dirty="0"/>
+          </a:p>
           <a:p>
             <a:pPr algn="ctr" indent="0" marL="0">
-              <a:buNone/>
-            </a:pPr>
-            <a:r>
-              <a:rPr lang="en-US" sz="3200" dirty="0">
+              <a:spcAft>
+                <a:spcPts val="600"/>
+              </a:spcAft>
+              <a:buNone/>
+            </a:pPr>
+            <a:r>
+              <a:rPr lang="en-US" sz="1400" dirty="0">
                 <a:solidFill>
                   <a:schemeClr val="tx1"/>
                 </a:solidFill>
@@ -6023,255 +6465,26 @@
                 <a:ea typeface="Calibri" pitchFamily="34" charset="-122"/>
                 <a:cs typeface="Calibri" pitchFamily="34" charset="-120"/>
               </a:rPr>
-              <a:t>🎨</a:t>
-            </a:r>
-            <a:endParaRPr lang="en-US" sz="3200" dirty="0"/>
-          </a:p>
-        </p:txBody>
-      </p:sp>
-      <p:sp>
-        <p:nvSpPr>
-          <p:cNvPr id="13" name="Text 11"/>
-          <p:cNvSpPr txBox="1"/>
-          <p:nvPr/>
-        </p:nvSpPr>
-        <p:spPr>
-          <a:xfrm>
-            <a:off x="4663440" y="2103120"/>
-            <a:ext cx="1874520" cy="411480"/>
-          </a:xfrm>
-          <a:prstGeom prst="rect">
-            <a:avLst/>
-          </a:prstGeom>
-          <a:noFill/>
-          <a:ln/>
-        </p:spPr>
-        <p:txBody>
-          <a:bodyPr wrap="square" lIns="1016" tIns="1016" rIns="1016" bIns="1016" rtlCol="0" anchor="t"/>
-          <a:lstStyle/>
-          <a:p>
-            <a:pPr algn="ctr" indent="0" marL="0">
-              <a:buNone/>
-            </a:pPr>
-            <a:r>
-              <a:rPr lang="en-US" sz="1700" b="1" dirty="0">
-                <a:solidFill>
-                  <a:schemeClr val="tx1"/>
-                </a:solidFill>
-                <a:latin typeface="Century Gothic" pitchFamily="34" charset="0"/>
-                <a:ea typeface="Century Gothic" pitchFamily="34" charset="-122"/>
-                <a:cs typeface="Century Gothic" pitchFamily="34" charset="-120"/>
-              </a:rPr>
-              <a:t>Je fabrique</a:t>
-            </a:r>
-            <a:endParaRPr lang="en-US" sz="1700" dirty="0"/>
-          </a:p>
-        </p:txBody>
-      </p:sp>
-      <p:sp>
-        <p:nvSpPr>
-          <p:cNvPr id="14" name="Text 12"/>
-          <p:cNvSpPr txBox="1"/>
-          <p:nvPr/>
-        </p:nvSpPr>
-        <p:spPr>
-          <a:xfrm>
-            <a:off x="4754880" y="2560320"/>
-            <a:ext cx="1691640" cy="914400"/>
-          </a:xfrm>
-          <a:prstGeom prst="rect">
-            <a:avLst/>
-          </a:prstGeom>
-          <a:noFill/>
-          <a:ln/>
-        </p:spPr>
-        <p:txBody>
-          <a:bodyPr wrap="square" lIns="1016" tIns="1016" rIns="1016" bIns="1016" rtlCol="0" anchor="t"/>
-          <a:lstStyle/>
-          <a:p>
-            <a:pPr algn="ctr" indent="0" marL="0">
-              <a:buNone/>
-            </a:pPr>
-            <a:r>
-              <a:rPr lang="en-US" sz="1300" dirty="0">
-                <a:solidFill>
-                  <a:schemeClr val="tx1"/>
-                </a:solidFill>
-                <a:latin typeface="Calibri" pitchFamily="34" charset="0"/>
-                <a:ea typeface="Calibri" pitchFamily="34" charset="-122"/>
-                <a:cs typeface="Calibri" pitchFamily="34" charset="-120"/>
-              </a:rPr>
-              <a:t>ma pub à l'ordi ou sur papier</a:t>
-            </a:r>
-            <a:endParaRPr lang="en-US" sz="1300" dirty="0"/>
-          </a:p>
-        </p:txBody>
-      </p:sp>
-      <p:sp>
-        <p:nvSpPr>
-          <p:cNvPr id="15" name="carte"/>
+              <a:t>Je dessine mon produit, je colle mes étiquettes, j'écris les petits caractères.</a:t>
+            </a:r>
+            <a:endParaRPr lang="en-US" sz="2200" dirty="0"/>
+          </a:p>
+        </p:txBody>
+      </p:sp>
+      <p:sp>
+        <p:nvSpPr>
+          <p:cNvPr id="7" name="bulle"/>
           <p:cNvSpPr/>
           <p:nvPr/>
         </p:nvSpPr>
         <p:spPr>
           <a:xfrm>
-            <a:off x="6675120" y="1234440"/>
-            <a:ext cx="1874520" cy="2377440"/>
+            <a:off x="640080" y="4114800"/>
+            <a:ext cx="7772400" cy="548640"/>
           </a:xfrm>
           <a:prstGeom prst="roundRect">
             <a:avLst>
-              <a:gd name="adj" fmla="val 8780"/>
-            </a:avLst>
-          </a:prstGeom>
-          <a:solidFill>
-            <a:schemeClr val="accent6"/>
-          </a:solidFill>
-          <a:ln w="12700">
-            <a:solidFill>
-              <a:schemeClr val="accent6"/>
-            </a:solidFill>
-            <a:prstDash val="solid"/>
-          </a:ln>
-          <a:effectLst>
-            <a:outerShdw sx="100000" sy="100000" kx="0" ky="0" algn="bl" rotWithShape="0" blurRad="101600" dist="38100" dir="5400000">
-              <a:srgbClr val="BFCFCC">
-                <a:alpha val="100000"/>
-              </a:srgbClr>
-            </a:outerShdw>
-          </a:effectLst>
-        </p:spPr>
-      </p:sp>
-      <p:sp>
-        <p:nvSpPr>
-          <p:cNvPr id="16" name="Text 14"/>
-          <p:cNvSpPr txBox="1"/>
-          <p:nvPr/>
-        </p:nvSpPr>
-        <p:spPr>
-          <a:xfrm>
-            <a:off x="6675120" y="1325880"/>
-            <a:ext cx="1874520" cy="731520"/>
-          </a:xfrm>
-          <a:prstGeom prst="rect">
-            <a:avLst/>
-          </a:prstGeom>
-          <a:noFill/>
-          <a:ln/>
-        </p:spPr>
-        <p:txBody>
-          <a:bodyPr wrap="square" lIns="1016" tIns="1016" rIns="1016" bIns="1016" rtlCol="0" anchor="t"/>
-          <a:lstStyle/>
-          <a:p>
-            <a:pPr algn="ctr" indent="0" marL="0">
-              <a:buNone/>
-            </a:pPr>
-            <a:r>
-              <a:rPr lang="en-US" sz="3200" dirty="0">
-                <a:solidFill>
-                  <a:schemeClr val="tx1"/>
-                </a:solidFill>
-                <a:latin typeface="Calibri" pitchFamily="34" charset="0"/>
-                <a:ea typeface="Calibri" pitchFamily="34" charset="-122"/>
-                <a:cs typeface="Calibri" pitchFamily="34" charset="-120"/>
-              </a:rPr>
-              <a:t>🤫</a:t>
-            </a:r>
-            <a:endParaRPr lang="en-US" sz="3200" dirty="0"/>
-          </a:p>
-        </p:txBody>
-      </p:sp>
-      <p:sp>
-        <p:nvSpPr>
-          <p:cNvPr id="17" name="Text 15"/>
-          <p:cNvSpPr txBox="1"/>
-          <p:nvPr/>
-        </p:nvSpPr>
-        <p:spPr>
-          <a:xfrm>
-            <a:off x="6675120" y="2103120"/>
-            <a:ext cx="1874520" cy="411480"/>
-          </a:xfrm>
-          <a:prstGeom prst="rect">
-            <a:avLst/>
-          </a:prstGeom>
-          <a:noFill/>
-          <a:ln/>
-        </p:spPr>
-        <p:txBody>
-          <a:bodyPr wrap="square" lIns="1016" tIns="1016" rIns="1016" bIns="1016" rtlCol="0" anchor="t"/>
-          <a:lstStyle/>
-          <a:p>
-            <a:pPr algn="ctr" indent="0" marL="0">
-              <a:buNone/>
-            </a:pPr>
-            <a:r>
-              <a:rPr lang="en-US" sz="1700" b="1" dirty="0">
-                <a:solidFill>
-                  <a:schemeClr val="tx1"/>
-                </a:solidFill>
-                <a:latin typeface="Century Gothic" pitchFamily="34" charset="0"/>
-                <a:ea typeface="Century Gothic" pitchFamily="34" charset="-122"/>
-                <a:cs typeface="Century Gothic" pitchFamily="34" charset="-120"/>
-              </a:rPr>
-              <a:t>Je cache</a:t>
-            </a:r>
-            <a:endParaRPr lang="en-US" sz="1700" dirty="0"/>
-          </a:p>
-        </p:txBody>
-      </p:sp>
-      <p:sp>
-        <p:nvSpPr>
-          <p:cNvPr id="18" name="Text 16"/>
-          <p:cNvSpPr txBox="1"/>
-          <p:nvPr/>
-        </p:nvSpPr>
-        <p:spPr>
-          <a:xfrm>
-            <a:off x="6766560" y="2560320"/>
-            <a:ext cx="1691640" cy="914400"/>
-          </a:xfrm>
-          <a:prstGeom prst="rect">
-            <a:avLst/>
-          </a:prstGeom>
-          <a:noFill/>
-          <a:ln/>
-        </p:spPr>
-        <p:txBody>
-          <a:bodyPr wrap="square" lIns="1016" tIns="1016" rIns="1016" bIns="1016" rtlCol="0" anchor="t"/>
-          <a:lstStyle/>
-          <a:p>
-            <a:pPr algn="ctr" indent="0" marL="0">
-              <a:buNone/>
-            </a:pPr>
-            <a:r>
-              <a:rPr lang="en-US" sz="1300" dirty="0">
-                <a:solidFill>
-                  <a:schemeClr val="tx1"/>
-                </a:solidFill>
-                <a:latin typeface="Calibri" pitchFamily="34" charset="0"/>
-                <a:ea typeface="Calibri" pitchFamily="34" charset="-122"/>
-                <a:cs typeface="Calibri" pitchFamily="34" charset="-120"/>
-              </a:rPr>
-              <a:t>mes ruses… le renard est rusé !</a:t>
-            </a:r>
-            <a:endParaRPr lang="en-US" sz="1300" dirty="0"/>
-          </a:p>
-        </p:txBody>
-      </p:sp>
-      <p:sp>
-        <p:nvSpPr>
-          <p:cNvPr id="19" name="bulle"/>
-          <p:cNvSpPr/>
-          <p:nvPr/>
-        </p:nvSpPr>
-        <p:spPr>
-          <a:xfrm>
-            <a:off x="640080" y="3886200"/>
-            <a:ext cx="7818120" cy="685800"/>
-          </a:xfrm>
-          <a:prstGeom prst="roundRect">
-            <a:avLst>
-              <a:gd name="adj" fmla="val 24000"/>
+              <a:gd name="adj" fmla="val 30000"/>
             </a:avLst>
           </a:prstGeom>
           <a:solidFill>
@@ -6294,18 +6507,18 @@
       </p:sp>
       <p:sp>
         <p:nvSpPr>
-          <p:cNvPr id="20" name="Shape 18"/>
+          <p:cNvPr id="8" name="Shape 6"/>
           <p:cNvSpPr/>
           <p:nvPr/>
         </p:nvSpPr>
         <p:spPr>
           <a:xfrm>
-            <a:off x="640080" y="3886200"/>
-            <a:ext cx="7818120" cy="685800"/>
+            <a:off x="640080" y="4114800"/>
+            <a:ext cx="7772400" cy="548640"/>
           </a:xfrm>
           <a:prstGeom prst="roundRect">
             <a:avLst>
-              <a:gd name="adj" fmla="val 24000"/>
+              <a:gd name="adj" fmla="val 30000"/>
             </a:avLst>
           </a:prstGeom>
           <a:ln w="25400">
@@ -6318,14 +6531,14 @@
       </p:sp>
       <p:sp>
         <p:nvSpPr>
-          <p:cNvPr id="21" name="Text 19"/>
+          <p:cNvPr id="9" name="Text 7"/>
           <p:cNvSpPr txBox="1"/>
           <p:nvPr/>
         </p:nvSpPr>
         <p:spPr>
           <a:xfrm>
-            <a:off x="731520" y="3931920"/>
-            <a:ext cx="7635240" cy="594360"/>
+            <a:off x="731520" y="4160520"/>
+            <a:ext cx="7589520" cy="457200"/>
           </a:xfrm>
           <a:prstGeom prst="rect">
             <a:avLst/>
@@ -6349,7 +6562,7 @@
                 <a:ea typeface="Calibri" pitchFamily="34" charset="-122"/>
                 <a:cs typeface="Calibri" pitchFamily="34" charset="-120"/>
               </a:rPr>
-              <a:t>Le produit est inutile ? Parfait ! Ta pub doit quand même donner envie… c'est ça, le défi.</a:t>
+              <a:t>L'atelier en ligne peut lire ta pub à voix haute.</a:t>
             </a:r>
             <a:endParaRPr lang="en-US" sz="1500" dirty="0"/>
           </a:p>
@@ -6460,7 +6673,7 @@
                   <a:schemeClr val="tx1"/>
                 </a:solidFill>
               </a:rPr>
-              <a:t>Deux ateliers au choix</a:t>
+              <a:t>La galerie : le renard résiste !</a:t>
             </a:r>
             <a:endParaRPr lang="en-US" sz="3000" dirty="0"/>
           </a:p>
@@ -6475,11 +6688,11 @@
         <p:spPr>
           <a:xfrm>
             <a:off x="640080" y="1188720"/>
-            <a:ext cx="3749040" cy="2743200"/>
+            <a:ext cx="5852160" cy="868680"/>
           </a:xfrm>
           <a:prstGeom prst="roundRect">
             <a:avLst>
-              <a:gd name="adj" fmla="val 6000"/>
+              <a:gd name="adj" fmla="val 18947"/>
             </a:avLst>
           </a:prstGeom>
           <a:solidFill>
@@ -6502,18 +6715,113 @@
       </p:sp>
       <p:sp>
         <p:nvSpPr>
-          <p:cNvPr id="4" name="carte"/>
+          <p:cNvPr id="4" name="Text 2"/>
+          <p:cNvSpPr txBox="1"/>
+          <p:nvPr/>
+        </p:nvSpPr>
+        <p:spPr>
+          <a:xfrm>
+            <a:off x="777240" y="1188720"/>
+            <a:ext cx="548640" cy="868680"/>
+          </a:xfrm>
+          <a:prstGeom prst="rect">
+            <a:avLst/>
+          </a:prstGeom>
+          <a:noFill/>
+          <a:ln/>
+        </p:spPr>
+        <p:txBody>
+          <a:bodyPr wrap="square" lIns="1016" tIns="1016" rIns="1016" bIns="1016" rtlCol="0" anchor="ctr"/>
+          <a:lstStyle/>
+          <a:p>
+            <a:pPr indent="0" marL="0">
+              <a:buNone/>
+            </a:pPr>
+            <a:r>
+              <a:rPr lang="en-US" sz="2800" b="1" dirty="0">
+                <a:solidFill>
+                  <a:schemeClr val="accent1"/>
+                </a:solidFill>
+                <a:latin typeface="Century Gothic" pitchFamily="34" charset="0"/>
+                <a:ea typeface="Century Gothic" pitchFamily="34" charset="-122"/>
+                <a:cs typeface="Century Gothic" pitchFamily="34" charset="-120"/>
+              </a:rPr>
+              <a:t>1</a:t>
+            </a:r>
+            <a:endParaRPr lang="en-US" sz="2800" dirty="0"/>
+          </a:p>
+        </p:txBody>
+      </p:sp>
+      <p:sp>
+        <p:nvSpPr>
+          <p:cNvPr id="5" name="Text 3"/>
+          <p:cNvSpPr txBox="1"/>
+          <p:nvPr/>
+        </p:nvSpPr>
+        <p:spPr>
+          <a:xfrm>
+            <a:off x="1371600" y="1234440"/>
+            <a:ext cx="5029200" cy="777240"/>
+          </a:xfrm>
+          <a:prstGeom prst="rect">
+            <a:avLst/>
+          </a:prstGeom>
+          <a:noFill/>
+          <a:ln/>
+        </p:spPr>
+        <p:txBody>
+          <a:bodyPr wrap="square" lIns="1016" tIns="1016" rIns="1016" bIns="1016" rtlCol="0" anchor="ctr"/>
+          <a:lstStyle/>
+          <a:p>
+            <a:pPr indent="0" marL="0">
+              <a:buNone/>
+            </a:pPr>
+            <a:r>
+              <a:rPr lang="en-US" sz="1600" b="1" dirty="0">
+                <a:solidFill>
+                  <a:schemeClr val="tx1"/>
+                </a:solidFill>
+                <a:latin typeface="Calibri" pitchFamily="34" charset="0"/>
+                <a:ea typeface="Calibri" pitchFamily="34" charset="-122"/>
+                <a:cs typeface="Calibri" pitchFamily="34" charset="-120"/>
+              </a:rPr>
+              <a:t>Une équipe montre sa pub</a:t>
+            </a:r>
+            <a:endParaRPr lang="en-US" sz="1600" dirty="0"/>
+          </a:p>
+          <a:p>
+            <a:pPr indent="0" marL="0">
+              <a:buNone/>
+            </a:pPr>
+            <a:r>
+              <a:rPr lang="en-US" sz="1300" dirty="0">
+                <a:solidFill>
+                  <a:schemeClr val="tx1"/>
+                </a:solidFill>
+                <a:latin typeface="Calibri" pitchFamily="34" charset="0"/>
+                <a:ea typeface="Calibri" pitchFamily="34" charset="-122"/>
+                <a:cs typeface="Calibri" pitchFamily="34" charset="-120"/>
+              </a:rPr>
+              <a:t>(affiche ou image dans Teams)</a:t>
+            </a:r>
+            <a:endParaRPr lang="en-US" sz="1600" dirty="0"/>
+          </a:p>
+        </p:txBody>
+      </p:sp>
+      <p:sp>
+        <p:nvSpPr>
+          <p:cNvPr id="6" name="carte"/>
           <p:cNvSpPr/>
           <p:nvPr/>
         </p:nvSpPr>
         <p:spPr>
           <a:xfrm>
-            <a:off x="4663440" y="1188720"/>
-            <a:ext cx="3749040" cy="2743200"/>
+            <a:off x="640080" y="2194560"/>
+            <a:ext cx="5852160" cy="868680"/>
           </a:xfrm>
           <a:prstGeom prst="roundRect">
             <a:avLst>
-              <a:gd name="adj" fmla="val 6000"/>
+              <a:gd name="adj" fmla="val 18947"/>
             </a:avLst>
           </a:prstGeom>
           <a:solidFill>
@@ -6536,14 +6844,14 @@
       </p:sp>
       <p:sp>
         <p:nvSpPr>
-          <p:cNvPr id="5" name="Text 3"/>
+          <p:cNvPr id="7" name="Text 5"/>
           <p:cNvSpPr txBox="1"/>
           <p:nvPr/>
         </p:nvSpPr>
         <p:spPr>
           <a:xfrm>
-            <a:off x="822960" y="1325880"/>
-            <a:ext cx="3383280" cy="2468880"/>
+            <a:off x="777240" y="2194560"/>
+            <a:ext cx="548640" cy="868680"/>
           </a:xfrm>
           <a:prstGeom prst="rect">
             <a:avLst/>
@@ -6555,34 +6863,50 @@
           <a:bodyPr wrap="square" lIns="1016" tIns="1016" rIns="1016" bIns="1016" rtlCol="0" anchor="ctr"/>
           <a:lstStyle/>
           <a:p>
-            <a:pPr algn="ctr" indent="0" marL="0">
-              <a:spcAft>
-                <a:spcPts val="600"/>
-              </a:spcAft>
-              <a:buNone/>
-            </a:pPr>
-            <a:r>
-              <a:rPr lang="en-US" sz="2200" b="1" dirty="0">
-                <a:solidFill>
-                  <a:schemeClr val="tx1"/>
+            <a:pPr indent="0" marL="0">
+              <a:buNone/>
+            </a:pPr>
+            <a:r>
+              <a:rPr lang="en-US" sz="2800" b="1" dirty="0">
+                <a:solidFill>
+                  <a:schemeClr val="accent1"/>
                 </a:solidFill>
                 <a:latin typeface="Century Gothic" pitchFamily="34" charset="0"/>
                 <a:ea typeface="Century Gothic" pitchFamily="34" charset="-122"/>
                 <a:cs typeface="Century Gothic" pitchFamily="34" charset="-120"/>
               </a:rPr>
-              <a:t>💻 À l'ordinateur</a:t>
-            </a:r>
-            <a:endParaRPr lang="en-US" sz="2200" dirty="0"/>
-          </a:p>
-          <a:p>
-            <a:pPr algn="ctr" indent="0" marL="0">
-              <a:spcAft>
-                <a:spcPts val="600"/>
-              </a:spcAft>
-              <a:buNone/>
-            </a:pPr>
-            <a:r>
-              <a:rPr lang="en-US" sz="1500" b="1" dirty="0">
+              <a:t>2</a:t>
+            </a:r>
+            <a:endParaRPr lang="en-US" sz="2800" dirty="0"/>
+          </a:p>
+        </p:txBody>
+      </p:sp>
+      <p:sp>
+        <p:nvSpPr>
+          <p:cNvPr id="8" name="Text 6"/>
+          <p:cNvSpPr txBox="1"/>
+          <p:nvPr/>
+        </p:nvSpPr>
+        <p:spPr>
+          <a:xfrm>
+            <a:off x="1371600" y="2240280"/>
+            <a:ext cx="5029200" cy="777240"/>
+          </a:xfrm>
+          <a:prstGeom prst="rect">
+            <a:avLst/>
+          </a:prstGeom>
+          <a:noFill/>
+          <a:ln/>
+        </p:spPr>
+        <p:txBody>
+          <a:bodyPr wrap="square" lIns="1016" tIns="1016" rIns="1016" bIns="1016" rtlCol="0" anchor="ctr"/>
+          <a:lstStyle/>
+          <a:p>
+            <a:pPr indent="0" marL="0">
+              <a:buNone/>
+            </a:pPr>
+            <a:r>
+              <a:rPr lang="en-US" sz="1600" b="1" dirty="0">
                 <a:solidFill>
                   <a:schemeClr val="tx1"/>
                 </a:solidFill>
@@ -6590,19 +6914,16 @@
                 <a:ea typeface="Calibri" pitchFamily="34" charset="-122"/>
                 <a:cs typeface="Calibri" pitchFamily="34" charset="-120"/>
               </a:rPr>
-              <a:t>Atelier « Piège le renard ! »</a:t>
-            </a:r>
-            <a:endParaRPr lang="en-US" sz="2200" dirty="0"/>
-          </a:p>
-          <a:p>
-            <a:pPr algn="ctr" indent="0" marL="0">
-              <a:spcAft>
-                <a:spcPts val="600"/>
-              </a:spcAft>
-              <a:buNone/>
-            </a:pPr>
-            <a:r>
-              <a:rPr lang="en-US" sz="1400" dirty="0">
+              <a:t>Les détectives lèvent</a:t>
+            </a:r>
+            <a:endParaRPr lang="en-US" sz="1600" dirty="0"/>
+          </a:p>
+          <a:p>
+            <a:pPr indent="0" marL="0">
+              <a:buNone/>
+            </a:pPr>
+            <a:r>
+              <a:rPr lang="en-US" sz="1300" dirty="0">
                 <a:solidFill>
                   <a:schemeClr val="tx1"/>
                 </a:solidFill>
@@ -6610,116 +6931,34 @@
                 <a:ea typeface="Calibri" pitchFamily="34" charset="-122"/>
                 <a:cs typeface="Calibri" pitchFamily="34" charset="-120"/>
               </a:rPr>
-              <a:t>Je choisis mes ruses, mes couleurs, mon prix. Je télécharge l'image et je la publie dans le canal Teams.</a:t>
-            </a:r>
-            <a:endParaRPr lang="en-US" sz="2200" dirty="0"/>
-          </a:p>
-        </p:txBody>
-      </p:sp>
-      <p:sp>
-        <p:nvSpPr>
-          <p:cNvPr id="6" name="Text 4"/>
-          <p:cNvSpPr txBox="1"/>
-          <p:nvPr/>
-        </p:nvSpPr>
-        <p:spPr>
-          <a:xfrm>
-            <a:off x="4846320" y="1325880"/>
-            <a:ext cx="3383280" cy="2468880"/>
-          </a:xfrm>
-          <a:prstGeom prst="rect">
-            <a:avLst/>
-          </a:prstGeom>
-          <a:noFill/>
-          <a:ln/>
-        </p:spPr>
-        <p:txBody>
-          <a:bodyPr wrap="square" lIns="1016" tIns="1016" rIns="1016" bIns="1016" rtlCol="0" anchor="ctr"/>
-          <a:lstStyle/>
-          <a:p>
-            <a:pPr algn="ctr" indent="0" marL="0">
-              <a:spcAft>
-                <a:spcPts val="600"/>
-              </a:spcAft>
-              <a:buNone/>
-            </a:pPr>
-            <a:r>
-              <a:rPr lang="en-US" sz="2200" b="1" dirty="0">
-                <a:solidFill>
-                  <a:schemeClr val="tx1"/>
-                </a:solidFill>
-                <a:latin typeface="Century Gothic" pitchFamily="34" charset="0"/>
-                <a:ea typeface="Century Gothic" pitchFamily="34" charset="-122"/>
-                <a:cs typeface="Century Gothic" pitchFamily="34" charset="-120"/>
-              </a:rPr>
-              <a:t>✂️ Sur papier</a:t>
-            </a:r>
-            <a:endParaRPr lang="en-US" sz="2200" dirty="0"/>
-          </a:p>
-          <a:p>
-            <a:pPr algn="ctr" indent="0" marL="0">
-              <a:spcAft>
-                <a:spcPts val="600"/>
-              </a:spcAft>
-              <a:buNone/>
-            </a:pPr>
-            <a:r>
-              <a:rPr lang="en-US" sz="1500" b="1" dirty="0">
-                <a:solidFill>
-                  <a:schemeClr val="tx1"/>
-                </a:solidFill>
-                <a:latin typeface="Calibri" pitchFamily="34" charset="0"/>
-                <a:ea typeface="Calibri" pitchFamily="34" charset="-122"/>
-                <a:cs typeface="Calibri" pitchFamily="34" charset="-120"/>
-              </a:rPr>
-              <a:t>Gabarit + étiquettes-ruses</a:t>
-            </a:r>
-            <a:endParaRPr lang="en-US" sz="2200" dirty="0"/>
-          </a:p>
-          <a:p>
-            <a:pPr algn="ctr" indent="0" marL="0">
-              <a:spcAft>
-                <a:spcPts val="600"/>
-              </a:spcAft>
-              <a:buNone/>
-            </a:pPr>
-            <a:r>
-              <a:rPr lang="en-US" sz="1400" dirty="0">
-                <a:solidFill>
-                  <a:schemeClr val="tx1"/>
-                </a:solidFill>
-                <a:latin typeface="Calibri" pitchFamily="34" charset="0"/>
-                <a:ea typeface="Calibri" pitchFamily="34" charset="-122"/>
-                <a:cs typeface="Calibri" pitchFamily="34" charset="-120"/>
-              </a:rPr>
-              <a:t>Je dessine mon produit, je colle mes étiquettes, j'écris les petits caractères.</a:t>
-            </a:r>
-            <a:endParaRPr lang="en-US" sz="2200" dirty="0"/>
-          </a:p>
-        </p:txBody>
-      </p:sp>
-      <p:sp>
-        <p:nvSpPr>
-          <p:cNvPr id="7" name="bulle"/>
+              <a:t>la carte-loupe de chaque ruse vue</a:t>
+            </a:r>
+            <a:endParaRPr lang="en-US" sz="1600" dirty="0"/>
+          </a:p>
+        </p:txBody>
+      </p:sp>
+      <p:sp>
+        <p:nvSpPr>
+          <p:cNvPr id="9" name="carte"/>
           <p:cNvSpPr/>
           <p:nvPr/>
         </p:nvSpPr>
         <p:spPr>
           <a:xfrm>
-            <a:off x="640080" y="4114800"/>
-            <a:ext cx="7772400" cy="548640"/>
+            <a:off x="640080" y="3200400"/>
+            <a:ext cx="5852160" cy="868680"/>
           </a:xfrm>
           <a:prstGeom prst="roundRect">
             <a:avLst>
-              <a:gd name="adj" fmla="val 30000"/>
+              <a:gd name="adj" fmla="val 18947"/>
             </a:avLst>
           </a:prstGeom>
           <a:solidFill>
-            <a:srgbClr val="FFFFFF"/>
+            <a:schemeClr val="accent2"/>
           </a:solidFill>
           <a:ln w="12700">
             <a:solidFill>
-              <a:srgbClr val="FFFFFF"/>
+              <a:schemeClr val="accent2"/>
             </a:solidFill>
             <a:prstDash val="solid"/>
           </a:ln>
@@ -6734,38 +6973,14 @@
       </p:sp>
       <p:sp>
         <p:nvSpPr>
-          <p:cNvPr id="8" name="Shape 6"/>
-          <p:cNvSpPr/>
-          <p:nvPr/>
-        </p:nvSpPr>
-        <p:spPr>
-          <a:xfrm>
-            <a:off x="640080" y="4114800"/>
-            <a:ext cx="7772400" cy="548640"/>
-          </a:xfrm>
-          <a:prstGeom prst="roundRect">
-            <a:avLst>
-              <a:gd name="adj" fmla="val 30000"/>
-            </a:avLst>
-          </a:prstGeom>
-          <a:ln w="25400">
-            <a:solidFill>
-              <a:schemeClr val="accent1"/>
-            </a:solidFill>
-            <a:prstDash val="solid"/>
-          </a:ln>
-        </p:spPr>
-      </p:sp>
-      <p:sp>
-        <p:nvSpPr>
-          <p:cNvPr id="9" name="Text 7"/>
+          <p:cNvPr id="10" name="Text 8"/>
           <p:cNvSpPr txBox="1"/>
           <p:nvPr/>
         </p:nvSpPr>
         <p:spPr>
           <a:xfrm>
-            <a:off x="731520" y="4160520"/>
-            <a:ext cx="7589520" cy="457200"/>
+            <a:off x="777240" y="3200400"/>
+            <a:ext cx="548640" cy="868680"/>
           </a:xfrm>
           <a:prstGeom prst="rect">
             <a:avLst/>
@@ -6781,7 +6996,46 @@
               <a:buNone/>
             </a:pPr>
             <a:r>
-              <a:rPr lang="en-US" sz="1500" i="1" dirty="0">
+              <a:rPr lang="en-US" sz="2800" b="1" dirty="0">
+                <a:solidFill>
+                  <a:schemeClr val="accent1"/>
+                </a:solidFill>
+                <a:latin typeface="Century Gothic" pitchFamily="34" charset="0"/>
+                <a:ea typeface="Century Gothic" pitchFamily="34" charset="-122"/>
+                <a:cs typeface="Century Gothic" pitchFamily="34" charset="-120"/>
+              </a:rPr>
+              <a:t>3</a:t>
+            </a:r>
+            <a:endParaRPr lang="en-US" sz="2800" dirty="0"/>
+          </a:p>
+        </p:txBody>
+      </p:sp>
+      <p:sp>
+        <p:nvSpPr>
+          <p:cNvPr id="11" name="Text 9"/>
+          <p:cNvSpPr txBox="1"/>
+          <p:nvPr/>
+        </p:nvSpPr>
+        <p:spPr>
+          <a:xfrm>
+            <a:off x="1371600" y="3246120"/>
+            <a:ext cx="5029200" cy="777240"/>
+          </a:xfrm>
+          <a:prstGeom prst="rect">
+            <a:avLst/>
+          </a:prstGeom>
+          <a:noFill/>
+          <a:ln/>
+        </p:spPr>
+        <p:txBody>
+          <a:bodyPr wrap="square" lIns="1016" tIns="1016" rIns="1016" bIns="1016" rtlCol="0" anchor="ctr"/>
+          <a:lstStyle/>
+          <a:p>
+            <a:pPr indent="0" marL="0">
+              <a:buNone/>
+            </a:pPr>
+            <a:r>
+              <a:rPr lang="en-US" sz="1600" b="1" dirty="0">
                 <a:solidFill>
                   <a:schemeClr val="tx1"/>
                 </a:solidFill>
@@ -6789,12 +7043,53 @@
                 <a:ea typeface="Calibri" pitchFamily="34" charset="-122"/>
                 <a:cs typeface="Calibri" pitchFamily="34" charset="-120"/>
               </a:rPr>
-              <a:t>🔊 L'atelier ordinateur peut lire ta pub à voix haute.</a:t>
-            </a:r>
-            <a:endParaRPr lang="en-US" sz="1500" dirty="0"/>
-          </a:p>
-        </p:txBody>
-      </p:sp>
+              <a:t>Une ruse non trouvée ?</a:t>
+            </a:r>
+            <a:endParaRPr lang="en-US" sz="1600" dirty="0"/>
+          </a:p>
+          <a:p>
+            <a:pPr indent="0" marL="0">
+              <a:buNone/>
+            </a:pPr>
+            <a:r>
+              <a:rPr lang="en-US" sz="1300" dirty="0">
+                <a:solidFill>
+                  <a:schemeClr val="tx1"/>
+                </a:solidFill>
+                <a:latin typeface="Calibri" pitchFamily="34" charset="0"/>
+                <a:ea typeface="Calibri" pitchFamily="34" charset="-122"/>
+                <a:cs typeface="Calibri" pitchFamily="34" charset="-120"/>
+              </a:rPr>
+              <a:t>1 point pour l'équipe créatrice !</a:t>
+            </a:r>
+            <a:endParaRPr lang="en-US" sz="1600" dirty="0"/>
+          </a:p>
+        </p:txBody>
+      </p:sp>
+      <p:pic>
+        <p:nvPicPr>
+          <p:cNvPr id="12" name="renard" descr="Renard">    </p:cNvPr>
+          <p:cNvPicPr>
+            <a:picLocks noChangeAspect="1"/>
+          </p:cNvPicPr>
+          <p:nvPr/>
+        </p:nvPicPr>
+        <p:blipFill>
+          <a:blip r:embed="rId1"/>
+          <a:stretch>
+            <a:fillRect/>
+          </a:stretch>
+        </p:blipFill>
+        <p:spPr>
+          <a:xfrm>
+            <a:off x="6766560" y="2103120"/>
+            <a:ext cx="1828800" cy="1746504"/>
+          </a:xfrm>
+          <a:prstGeom prst="rect">
+            <a:avLst/>
+          </a:prstGeom>
+        </p:spPr>
+      </p:pic>
       <p:sp>
         <p:nvSpPr>
           <p:cNvPr id="25" name="Slide Number Placeholder 0"/>
@@ -6900,7 +7195,7 @@
                   <a:schemeClr val="tx1"/>
                 </a:solidFill>
               </a:rPr>
-              <a:t>La galerie : le renard résiste !</a:t>
+              <a:t>Le bouclier du renard</a:t>
             </a:r>
             <a:endParaRPr lang="en-US" sz="3000" dirty="0"/>
           </a:p>
@@ -6915,11 +7210,11 @@
         <p:spPr>
           <a:xfrm>
             <a:off x="640080" y="1188720"/>
-            <a:ext cx="5852160" cy="868680"/>
+            <a:ext cx="2514600" cy="1737360"/>
           </a:xfrm>
           <a:prstGeom prst="roundRect">
             <a:avLst>
-              <a:gd name="adj" fmla="val 18947"/>
+              <a:gd name="adj" fmla="val 9474"/>
             </a:avLst>
           </a:prstGeom>
           <a:solidFill>
@@ -6948,24 +7243,24 @@
         </p:nvSpPr>
         <p:spPr>
           <a:xfrm>
-            <a:off x="777240" y="1188720"/>
-            <a:ext cx="548640" cy="868680"/>
-          </a:xfrm>
-          <a:prstGeom prst="rect">
-            <a:avLst/>
-          </a:prstGeom>
-          <a:noFill/>
-          <a:ln/>
-        </p:spPr>
-        <p:txBody>
-          <a:bodyPr wrap="square" lIns="1016" tIns="1016" rIns="1016" bIns="1016" rtlCol="0" anchor="ctr"/>
-          <a:lstStyle/>
-          <a:p>
-            <a:pPr indent="0" marL="0">
-              <a:buNone/>
-            </a:pPr>
-            <a:r>
-              <a:rPr lang="en-US" sz="2800" b="1" dirty="0">
+            <a:off x="640080" y="1234440"/>
+            <a:ext cx="2514600" cy="640080"/>
+          </a:xfrm>
+          <a:prstGeom prst="rect">
+            <a:avLst/>
+          </a:prstGeom>
+          <a:noFill/>
+          <a:ln/>
+        </p:spPr>
+        <p:txBody>
+          <a:bodyPr wrap="square" lIns="1016" tIns="1016" rIns="1016" bIns="1016" rtlCol="0" anchor="t"/>
+          <a:lstStyle/>
+          <a:p>
+            <a:pPr algn="ctr" indent="0" marL="0">
+              <a:buNone/>
+            </a:pPr>
+            <a:r>
+              <a:rPr lang="en-US" sz="3400" b="1" dirty="0">
                 <a:solidFill>
                   <a:schemeClr val="accent1"/>
                 </a:solidFill>
@@ -6975,7 +7270,7 @@
               </a:rPr>
               <a:t>1</a:t>
             </a:r>
-            <a:endParaRPr lang="en-US" sz="2800" dirty="0"/>
+            <a:endParaRPr lang="en-US" sz="3400" dirty="0"/>
           </a:p>
         </p:txBody>
       </p:sp>
@@ -6987,8 +7282,8 @@
         </p:nvSpPr>
         <p:spPr>
           <a:xfrm>
-            <a:off x="1371600" y="1234440"/>
-            <a:ext cx="5029200" cy="777240"/>
+            <a:off x="731520" y="1874520"/>
+            <a:ext cx="2331720" cy="822960"/>
           </a:xfrm>
           <a:prstGeom prst="rect">
             <a:avLst/>
@@ -7000,11 +7295,11 @@
           <a:bodyPr wrap="square" lIns="1016" tIns="1016" rIns="1016" bIns="1016" rtlCol="0" anchor="ctr"/>
           <a:lstStyle/>
           <a:p>
-            <a:pPr indent="0" marL="0">
-              <a:buNone/>
-            </a:pPr>
-            <a:r>
-              <a:rPr lang="en-US" sz="1600" b="1" dirty="0">
+            <a:pPr algn="ctr" indent="0" marL="0">
+              <a:buNone/>
+            </a:pPr>
+            <a:r>
+              <a:rPr lang="en-US" sz="1700" b="1" dirty="0">
                 <a:solidFill>
                   <a:schemeClr val="tx1"/>
                 </a:solidFill>
@@ -7012,26 +7307,9 @@
                 <a:ea typeface="Calibri" pitchFamily="34" charset="-122"/>
                 <a:cs typeface="Calibri" pitchFamily="34" charset="-120"/>
               </a:rPr>
-              <a:t>Une équipe montre sa pub</a:t>
-            </a:r>
-            <a:endParaRPr lang="en-US" sz="1600" dirty="0"/>
-          </a:p>
-          <a:p>
-            <a:pPr indent="0" marL="0">
-              <a:buNone/>
-            </a:pPr>
-            <a:r>
-              <a:rPr lang="en-US" sz="1300" dirty="0">
-                <a:solidFill>
-                  <a:schemeClr val="tx1"/>
-                </a:solidFill>
-                <a:latin typeface="Calibri" pitchFamily="34" charset="0"/>
-                <a:ea typeface="Calibri" pitchFamily="34" charset="-122"/>
-                <a:cs typeface="Calibri" pitchFamily="34" charset="-120"/>
-              </a:rPr>
-              <a:t>(affiche ou image dans Teams)</a:t>
-            </a:r>
-            <a:endParaRPr lang="en-US" sz="1600" dirty="0"/>
+              <a:t>Besoin ou désir ?</a:t>
+            </a:r>
+            <a:endParaRPr lang="en-US" sz="1700" dirty="0"/>
           </a:p>
         </p:txBody>
       </p:sp>
@@ -7043,12 +7321,12 @@
         </p:nvSpPr>
         <p:spPr>
           <a:xfrm>
-            <a:off x="640080" y="2194560"/>
-            <a:ext cx="5852160" cy="868680"/>
+            <a:off x="3337560" y="1188720"/>
+            <a:ext cx="2514600" cy="1737360"/>
           </a:xfrm>
           <a:prstGeom prst="roundRect">
             <a:avLst>
-              <a:gd name="adj" fmla="val 18947"/>
+              <a:gd name="adj" fmla="val 9474"/>
             </a:avLst>
           </a:prstGeom>
           <a:solidFill>
@@ -7077,24 +7355,24 @@
         </p:nvSpPr>
         <p:spPr>
           <a:xfrm>
-            <a:off x="777240" y="2194560"/>
-            <a:ext cx="548640" cy="868680"/>
-          </a:xfrm>
-          <a:prstGeom prst="rect">
-            <a:avLst/>
-          </a:prstGeom>
-          <a:noFill/>
-          <a:ln/>
-        </p:spPr>
-        <p:txBody>
-          <a:bodyPr wrap="square" lIns="1016" tIns="1016" rIns="1016" bIns="1016" rtlCol="0" anchor="ctr"/>
-          <a:lstStyle/>
-          <a:p>
-            <a:pPr indent="0" marL="0">
-              <a:buNone/>
-            </a:pPr>
-            <a:r>
-              <a:rPr lang="en-US" sz="2800" b="1" dirty="0">
+            <a:off x="3337560" y="1234440"/>
+            <a:ext cx="2514600" cy="640080"/>
+          </a:xfrm>
+          <a:prstGeom prst="rect">
+            <a:avLst/>
+          </a:prstGeom>
+          <a:noFill/>
+          <a:ln/>
+        </p:spPr>
+        <p:txBody>
+          <a:bodyPr wrap="square" lIns="1016" tIns="1016" rIns="1016" bIns="1016" rtlCol="0" anchor="t"/>
+          <a:lstStyle/>
+          <a:p>
+            <a:pPr algn="ctr" indent="0" marL="0">
+              <a:buNone/>
+            </a:pPr>
+            <a:r>
+              <a:rPr lang="en-US" sz="3400" b="1" dirty="0">
                 <a:solidFill>
                   <a:schemeClr val="accent1"/>
                 </a:solidFill>
@@ -7104,7 +7382,7 @@
               </a:rPr>
               <a:t>2</a:t>
             </a:r>
-            <a:endParaRPr lang="en-US" sz="2800" dirty="0"/>
+            <a:endParaRPr lang="en-US" sz="3400" dirty="0"/>
           </a:p>
         </p:txBody>
       </p:sp>
@@ -7116,8 +7394,8 @@
         </p:nvSpPr>
         <p:spPr>
           <a:xfrm>
-            <a:off x="1371600" y="2240280"/>
-            <a:ext cx="5029200" cy="777240"/>
+            <a:off x="3429000" y="1874520"/>
+            <a:ext cx="2331720" cy="822960"/>
           </a:xfrm>
           <a:prstGeom prst="rect">
             <a:avLst/>
@@ -7129,11 +7407,11 @@
           <a:bodyPr wrap="square" lIns="1016" tIns="1016" rIns="1016" bIns="1016" rtlCol="0" anchor="ctr"/>
           <a:lstStyle/>
           <a:p>
-            <a:pPr indent="0" marL="0">
-              <a:buNone/>
-            </a:pPr>
-            <a:r>
-              <a:rPr lang="en-US" sz="1600" b="1" dirty="0">
+            <a:pPr algn="ctr" indent="0" marL="0">
+              <a:buNone/>
+            </a:pPr>
+            <a:r>
+              <a:rPr lang="en-US" sz="1700" b="1" dirty="0">
                 <a:solidFill>
                   <a:schemeClr val="tx1"/>
                 </a:solidFill>
@@ -7141,26 +7419,9 @@
                 <a:ea typeface="Calibri" pitchFamily="34" charset="-122"/>
                 <a:cs typeface="Calibri" pitchFamily="34" charset="-120"/>
               </a:rPr>
-              <a:t>Les détectives lèvent</a:t>
-            </a:r>
-            <a:endParaRPr lang="en-US" sz="1600" dirty="0"/>
-          </a:p>
-          <a:p>
-            <a:pPr indent="0" marL="0">
-              <a:buNone/>
-            </a:pPr>
-            <a:r>
-              <a:rPr lang="en-US" sz="1300" dirty="0">
-                <a:solidFill>
-                  <a:schemeClr val="tx1"/>
-                </a:solidFill>
-                <a:latin typeface="Calibri" pitchFamily="34" charset="0"/>
-                <a:ea typeface="Calibri" pitchFamily="34" charset="-122"/>
-                <a:cs typeface="Calibri" pitchFamily="34" charset="-120"/>
-              </a:rPr>
-              <a:t>la carte-loupe de chaque ruse vue</a:t>
-            </a:r>
-            <a:endParaRPr lang="en-US" sz="1600" dirty="0"/>
+              <a:t>Combien ça coûte VRAIMENT ?</a:t>
+            </a:r>
+            <a:endParaRPr lang="en-US" sz="1700" dirty="0"/>
           </a:p>
         </p:txBody>
       </p:sp>
@@ -7172,12 +7433,12 @@
         </p:nvSpPr>
         <p:spPr>
           <a:xfrm>
-            <a:off x="640080" y="3200400"/>
-            <a:ext cx="5852160" cy="868680"/>
+            <a:off x="6035040" y="1188720"/>
+            <a:ext cx="2514600" cy="1737360"/>
           </a:xfrm>
           <a:prstGeom prst="roundRect">
             <a:avLst>
-              <a:gd name="adj" fmla="val 18947"/>
+              <a:gd name="adj" fmla="val 9474"/>
             </a:avLst>
           </a:prstGeom>
           <a:solidFill>
@@ -7206,494 +7467,6 @@
         </p:nvSpPr>
         <p:spPr>
           <a:xfrm>
-            <a:off x="777240" y="3200400"/>
-            <a:ext cx="548640" cy="868680"/>
-          </a:xfrm>
-          <a:prstGeom prst="rect">
-            <a:avLst/>
-          </a:prstGeom>
-          <a:noFill/>
-          <a:ln/>
-        </p:spPr>
-        <p:txBody>
-          <a:bodyPr wrap="square" lIns="1016" tIns="1016" rIns="1016" bIns="1016" rtlCol="0" anchor="ctr"/>
-          <a:lstStyle/>
-          <a:p>
-            <a:pPr indent="0" marL="0">
-              <a:buNone/>
-            </a:pPr>
-            <a:r>
-              <a:rPr lang="en-US" sz="2800" b="1" dirty="0">
-                <a:solidFill>
-                  <a:schemeClr val="accent1"/>
-                </a:solidFill>
-                <a:latin typeface="Century Gothic" pitchFamily="34" charset="0"/>
-                <a:ea typeface="Century Gothic" pitchFamily="34" charset="-122"/>
-                <a:cs typeface="Century Gothic" pitchFamily="34" charset="-120"/>
-              </a:rPr>
-              <a:t>3</a:t>
-            </a:r>
-            <a:endParaRPr lang="en-US" sz="2800" dirty="0"/>
-          </a:p>
-        </p:txBody>
-      </p:sp>
-      <p:sp>
-        <p:nvSpPr>
-          <p:cNvPr id="11" name="Text 9"/>
-          <p:cNvSpPr txBox="1"/>
-          <p:nvPr/>
-        </p:nvSpPr>
-        <p:spPr>
-          <a:xfrm>
-            <a:off x="1371600" y="3246120"/>
-            <a:ext cx="5029200" cy="777240"/>
-          </a:xfrm>
-          <a:prstGeom prst="rect">
-            <a:avLst/>
-          </a:prstGeom>
-          <a:noFill/>
-          <a:ln/>
-        </p:spPr>
-        <p:txBody>
-          <a:bodyPr wrap="square" lIns="1016" tIns="1016" rIns="1016" bIns="1016" rtlCol="0" anchor="ctr"/>
-          <a:lstStyle/>
-          <a:p>
-            <a:pPr indent="0" marL="0">
-              <a:buNone/>
-            </a:pPr>
-            <a:r>
-              <a:rPr lang="en-US" sz="1600" b="1" dirty="0">
-                <a:solidFill>
-                  <a:schemeClr val="tx1"/>
-                </a:solidFill>
-                <a:latin typeface="Calibri" pitchFamily="34" charset="0"/>
-                <a:ea typeface="Calibri" pitchFamily="34" charset="-122"/>
-                <a:cs typeface="Calibri" pitchFamily="34" charset="-120"/>
-              </a:rPr>
-              <a:t>Une ruse non trouvée ?</a:t>
-            </a:r>
-            <a:endParaRPr lang="en-US" sz="1600" dirty="0"/>
-          </a:p>
-          <a:p>
-            <a:pPr indent="0" marL="0">
-              <a:buNone/>
-            </a:pPr>
-            <a:r>
-              <a:rPr lang="en-US" sz="1300" dirty="0">
-                <a:solidFill>
-                  <a:schemeClr val="tx1"/>
-                </a:solidFill>
-                <a:latin typeface="Calibri" pitchFamily="34" charset="0"/>
-                <a:ea typeface="Calibri" pitchFamily="34" charset="-122"/>
-                <a:cs typeface="Calibri" pitchFamily="34" charset="-120"/>
-              </a:rPr>
-              <a:t>1 point pour l'équipe créatrice !</a:t>
-            </a:r>
-            <a:endParaRPr lang="en-US" sz="1600" dirty="0"/>
-          </a:p>
-        </p:txBody>
-      </p:sp>
-      <p:pic>
-        <p:nvPicPr>
-          <p:cNvPr id="12" name="renard" descr="Renard">    </p:cNvPr>
-          <p:cNvPicPr>
-            <a:picLocks noChangeAspect="1"/>
-          </p:cNvPicPr>
-          <p:nvPr/>
-        </p:nvPicPr>
-        <p:blipFill>
-          <a:blip r:embed="rId1"/>
-          <a:stretch>
-            <a:fillRect/>
-          </a:stretch>
-        </p:blipFill>
-        <p:spPr>
-          <a:xfrm>
-            <a:off x="6766560" y="2103120"/>
-            <a:ext cx="1828800" cy="1746504"/>
-          </a:xfrm>
-          <a:prstGeom prst="rect">
-            <a:avLst/>
-          </a:prstGeom>
-        </p:spPr>
-      </p:pic>
-      <p:sp>
-        <p:nvSpPr>
-          <p:cNvPr id="25" name="Slide Number Placeholder 0"/>
-          <p:cNvSpPr>
-            <a:spLocks noGrp="1"/>
-          </p:cNvSpPr>
-          <p:nvPr>
-            <p:ph type="sldNum" sz="quarter" idx="4294967295"/>
-          </p:nvPr>
-        </p:nvSpPr>
-        <p:spPr>
-          <a:xfrm>
-            <a:off x="8458200" y="4754880"/>
-            <a:ext cx="457200" cy="274320"/>
-          </a:xfrm>
-          <a:prstGeom prst="rect">
-            <a:avLst/>
-          </a:prstGeom>
-          <a:extLst>
-            <a:ext uri="{C572A759-6A51-4108-AA02-DFA0A04FC94B}">
-              <ma14:wrappingTextBoxFlag xmlns:ma14="http://schemas.microsoft.com/office/mac/drawingml/2011/main" val="0"/>
-            </a:ext>
-          </a:extLst>
-        </p:spPr>
-        <p:txBody>
-          <a:bodyPr/>
-          <a:lstStyle>
-            <a:lvl1pPr>
-              <a:defRPr sz="1000">
-                <a:solidFill>
-                  <a:srgbClr val="8A8F95"/>
-                </a:solidFill>
-                <a:latin typeface="Calibri"/>
-                <a:ea typeface="Calibri"/>
-                <a:cs typeface="Calibri"/>
-              </a:defRPr>
-            </a:lvl1pPr>
-          </a:lstStyle>
-          <a:p>
-            <a:pPr algn="l"/>
-            <a:fld id="{F7021451-1387-4CA6-816F-3879F97B5CBC}" type="slidenum">
-              <a:rPr b="0" lang="en-US"/>
-              <a:t>18</a:t>
-            </a:fld>
-            <a:endParaRPr lang="en-US"/>
-          </a:p>
-        </p:txBody>
-      </p:sp>
-    </p:spTree>
-  </p:cSld>
-  <p:clrMapOvr>
-    <a:masterClrMapping/>
-  </p:clrMapOvr>
-</p:sld>
-</file>
-
-<file path=ppt/slides/slide19.xml><?xml version="1.0" encoding="utf-8"?>
-<p:sld xmlns:a="http://schemas.openxmlformats.org/drawingml/2006/main" xmlns:r="http://schemas.openxmlformats.org/officeDocument/2006/relationships" xmlns:p="http://schemas.openxmlformats.org/presentationml/2006/main">
-  <p:cSld name="Slide 19">
-    <p:spTree>
-      <p:nvGrpSpPr>
-        <p:cNvPr id="1" name=""/>
-        <p:cNvGrpSpPr/>
-        <p:nvPr/>
-      </p:nvGrpSpPr>
-      <p:grpSpPr>
-        <a:xfrm>
-          <a:off x="0" y="0"/>
-          <a:ext cx="0" cy="0"/>
-          <a:chOff x="0" y="0"/>
-          <a:chExt cx="0" cy="0"/>
-        </a:xfrm>
-      </p:grpSpPr>
-      <p:sp>
-        <p:nvSpPr>
-          <p:cNvPr id="2" name="Text 0"/>
-          <p:cNvSpPr/>
-          <p:nvPr>
-            <p:ph idx="100" type="title" hasCustomPrompt="1"/>
-          </p:nvPr>
-        </p:nvSpPr>
-        <p:spPr>
-          <a:xfrm>
-            <a:off x="640080" y="320040"/>
-            <a:ext cx="7315200" cy="731520"/>
-          </a:xfrm>
-          <a:prstGeom prst="rect">
-            <a:avLst/>
-          </a:prstGeom>
-          <a:noFill/>
-          <a:ln/>
-        </p:spPr>
-        <p:txBody>
-          <a:bodyPr wrap="square" lIns="0" tIns="0" rIns="0" bIns="0" rtlCol="0" anchor="ctr"/>
-          <a:lstStyle/>
-          <a:p>
-            <a:pPr indent="0" marL="0">
-              <a:buNone/>
-            </a:pPr>
-            <a:r>
-              <a:rPr lang="en-US" sz="3000" b="1" dirty="0">
-                <a:solidFill>
-                  <a:schemeClr val="tx1"/>
-                </a:solidFill>
-              </a:rPr>
-              <a:t>Le bouclier du renard 🛡️</a:t>
-            </a:r>
-            <a:endParaRPr lang="en-US" sz="3000" dirty="0"/>
-          </a:p>
-        </p:txBody>
-      </p:sp>
-      <p:sp>
-        <p:nvSpPr>
-          <p:cNvPr id="3" name="carte"/>
-          <p:cNvSpPr/>
-          <p:nvPr/>
-        </p:nvSpPr>
-        <p:spPr>
-          <a:xfrm>
-            <a:off x="640080" y="1188720"/>
-            <a:ext cx="2514600" cy="1737360"/>
-          </a:xfrm>
-          <a:prstGeom prst="roundRect">
-            <a:avLst>
-              <a:gd name="adj" fmla="val 9474"/>
-            </a:avLst>
-          </a:prstGeom>
-          <a:solidFill>
-            <a:schemeClr val="accent4"/>
-          </a:solidFill>
-          <a:ln w="12700">
-            <a:solidFill>
-              <a:schemeClr val="accent4"/>
-            </a:solidFill>
-            <a:prstDash val="solid"/>
-          </a:ln>
-          <a:effectLst>
-            <a:outerShdw sx="100000" sy="100000" kx="0" ky="0" algn="bl" rotWithShape="0" blurRad="101600" dist="38100" dir="5400000">
-              <a:srgbClr val="BFCFCC">
-                <a:alpha val="100000"/>
-              </a:srgbClr>
-            </a:outerShdw>
-          </a:effectLst>
-        </p:spPr>
-      </p:sp>
-      <p:sp>
-        <p:nvSpPr>
-          <p:cNvPr id="4" name="Text 2"/>
-          <p:cNvSpPr txBox="1"/>
-          <p:nvPr/>
-        </p:nvSpPr>
-        <p:spPr>
-          <a:xfrm>
-            <a:off x="640080" y="1234440"/>
-            <a:ext cx="2514600" cy="640080"/>
-          </a:xfrm>
-          <a:prstGeom prst="rect">
-            <a:avLst/>
-          </a:prstGeom>
-          <a:noFill/>
-          <a:ln/>
-        </p:spPr>
-        <p:txBody>
-          <a:bodyPr wrap="square" lIns="1016" tIns="1016" rIns="1016" bIns="1016" rtlCol="0" anchor="t"/>
-          <a:lstStyle/>
-          <a:p>
-            <a:pPr algn="ctr" indent="0" marL="0">
-              <a:buNone/>
-            </a:pPr>
-            <a:r>
-              <a:rPr lang="en-US" sz="3400" b="1" dirty="0">
-                <a:solidFill>
-                  <a:schemeClr val="accent1"/>
-                </a:solidFill>
-                <a:latin typeface="Century Gothic" pitchFamily="34" charset="0"/>
-                <a:ea typeface="Century Gothic" pitchFamily="34" charset="-122"/>
-                <a:cs typeface="Century Gothic" pitchFamily="34" charset="-120"/>
-              </a:rPr>
-              <a:t>1</a:t>
-            </a:r>
-            <a:endParaRPr lang="en-US" sz="3400" dirty="0"/>
-          </a:p>
-        </p:txBody>
-      </p:sp>
-      <p:sp>
-        <p:nvSpPr>
-          <p:cNvPr id="5" name="Text 3"/>
-          <p:cNvSpPr txBox="1"/>
-          <p:nvPr/>
-        </p:nvSpPr>
-        <p:spPr>
-          <a:xfrm>
-            <a:off x="731520" y="1874520"/>
-            <a:ext cx="2331720" cy="822960"/>
-          </a:xfrm>
-          <a:prstGeom prst="rect">
-            <a:avLst/>
-          </a:prstGeom>
-          <a:noFill/>
-          <a:ln/>
-        </p:spPr>
-        <p:txBody>
-          <a:bodyPr wrap="square" lIns="1016" tIns="1016" rIns="1016" bIns="1016" rtlCol="0" anchor="ctr"/>
-          <a:lstStyle/>
-          <a:p>
-            <a:pPr algn="ctr" indent="0" marL="0">
-              <a:buNone/>
-            </a:pPr>
-            <a:r>
-              <a:rPr lang="en-US" sz="1700" b="1" dirty="0">
-                <a:solidFill>
-                  <a:schemeClr val="tx1"/>
-                </a:solidFill>
-                <a:latin typeface="Calibri" pitchFamily="34" charset="0"/>
-                <a:ea typeface="Calibri" pitchFamily="34" charset="-122"/>
-                <a:cs typeface="Calibri" pitchFamily="34" charset="-120"/>
-              </a:rPr>
-              <a:t>Besoin ou désir ?</a:t>
-            </a:r>
-            <a:endParaRPr lang="en-US" sz="1700" dirty="0"/>
-          </a:p>
-        </p:txBody>
-      </p:sp>
-      <p:sp>
-        <p:nvSpPr>
-          <p:cNvPr id="6" name="carte"/>
-          <p:cNvSpPr/>
-          <p:nvPr/>
-        </p:nvSpPr>
-        <p:spPr>
-          <a:xfrm>
-            <a:off x="3337560" y="1188720"/>
-            <a:ext cx="2514600" cy="1737360"/>
-          </a:xfrm>
-          <a:prstGeom prst="roundRect">
-            <a:avLst>
-              <a:gd name="adj" fmla="val 9474"/>
-            </a:avLst>
-          </a:prstGeom>
-          <a:solidFill>
-            <a:schemeClr val="accent3"/>
-          </a:solidFill>
-          <a:ln w="12700">
-            <a:solidFill>
-              <a:schemeClr val="accent3"/>
-            </a:solidFill>
-            <a:prstDash val="solid"/>
-          </a:ln>
-          <a:effectLst>
-            <a:outerShdw sx="100000" sy="100000" kx="0" ky="0" algn="bl" rotWithShape="0" blurRad="101600" dist="38100" dir="5400000">
-              <a:srgbClr val="BFCFCC">
-                <a:alpha val="100000"/>
-              </a:srgbClr>
-            </a:outerShdw>
-          </a:effectLst>
-        </p:spPr>
-      </p:sp>
-      <p:sp>
-        <p:nvSpPr>
-          <p:cNvPr id="7" name="Text 5"/>
-          <p:cNvSpPr txBox="1"/>
-          <p:nvPr/>
-        </p:nvSpPr>
-        <p:spPr>
-          <a:xfrm>
-            <a:off x="3337560" y="1234440"/>
-            <a:ext cx="2514600" cy="640080"/>
-          </a:xfrm>
-          <a:prstGeom prst="rect">
-            <a:avLst/>
-          </a:prstGeom>
-          <a:noFill/>
-          <a:ln/>
-        </p:spPr>
-        <p:txBody>
-          <a:bodyPr wrap="square" lIns="1016" tIns="1016" rIns="1016" bIns="1016" rtlCol="0" anchor="t"/>
-          <a:lstStyle/>
-          <a:p>
-            <a:pPr algn="ctr" indent="0" marL="0">
-              <a:buNone/>
-            </a:pPr>
-            <a:r>
-              <a:rPr lang="en-US" sz="3400" b="1" dirty="0">
-                <a:solidFill>
-                  <a:schemeClr val="accent1"/>
-                </a:solidFill>
-                <a:latin typeface="Century Gothic" pitchFamily="34" charset="0"/>
-                <a:ea typeface="Century Gothic" pitchFamily="34" charset="-122"/>
-                <a:cs typeface="Century Gothic" pitchFamily="34" charset="-120"/>
-              </a:rPr>
-              <a:t>2</a:t>
-            </a:r>
-            <a:endParaRPr lang="en-US" sz="3400" dirty="0"/>
-          </a:p>
-        </p:txBody>
-      </p:sp>
-      <p:sp>
-        <p:nvSpPr>
-          <p:cNvPr id="8" name="Text 6"/>
-          <p:cNvSpPr txBox="1"/>
-          <p:nvPr/>
-        </p:nvSpPr>
-        <p:spPr>
-          <a:xfrm>
-            <a:off x="3429000" y="1874520"/>
-            <a:ext cx="2331720" cy="822960"/>
-          </a:xfrm>
-          <a:prstGeom prst="rect">
-            <a:avLst/>
-          </a:prstGeom>
-          <a:noFill/>
-          <a:ln/>
-        </p:spPr>
-        <p:txBody>
-          <a:bodyPr wrap="square" lIns="1016" tIns="1016" rIns="1016" bIns="1016" rtlCol="0" anchor="ctr"/>
-          <a:lstStyle/>
-          <a:p>
-            <a:pPr algn="ctr" indent="0" marL="0">
-              <a:buNone/>
-            </a:pPr>
-            <a:r>
-              <a:rPr lang="en-US" sz="1700" b="1" dirty="0">
-                <a:solidFill>
-                  <a:schemeClr val="tx1"/>
-                </a:solidFill>
-                <a:latin typeface="Calibri" pitchFamily="34" charset="0"/>
-                <a:ea typeface="Calibri" pitchFamily="34" charset="-122"/>
-                <a:cs typeface="Calibri" pitchFamily="34" charset="-120"/>
-              </a:rPr>
-              <a:t>Combien ça coûte VRAIMENT ?</a:t>
-            </a:r>
-            <a:endParaRPr lang="en-US" sz="1700" dirty="0"/>
-          </a:p>
-        </p:txBody>
-      </p:sp>
-      <p:sp>
-        <p:nvSpPr>
-          <p:cNvPr id="9" name="carte"/>
-          <p:cNvSpPr/>
-          <p:nvPr/>
-        </p:nvSpPr>
-        <p:spPr>
-          <a:xfrm>
-            <a:off x="6035040" y="1188720"/>
-            <a:ext cx="2514600" cy="1737360"/>
-          </a:xfrm>
-          <a:prstGeom prst="roundRect">
-            <a:avLst>
-              <a:gd name="adj" fmla="val 9474"/>
-            </a:avLst>
-          </a:prstGeom>
-          <a:solidFill>
-            <a:schemeClr val="accent2"/>
-          </a:solidFill>
-          <a:ln w="12700">
-            <a:solidFill>
-              <a:schemeClr val="accent2"/>
-            </a:solidFill>
-            <a:prstDash val="solid"/>
-          </a:ln>
-          <a:effectLst>
-            <a:outerShdw sx="100000" sy="100000" kx="0" ky="0" algn="bl" rotWithShape="0" blurRad="101600" dist="38100" dir="5400000">
-              <a:srgbClr val="BFCFCC">
-                <a:alpha val="100000"/>
-              </a:srgbClr>
-            </a:outerShdw>
-          </a:effectLst>
-        </p:spPr>
-      </p:sp>
-      <p:sp>
-        <p:nvSpPr>
-          <p:cNvPr id="10" name="Text 8"/>
-          <p:cNvSpPr txBox="1"/>
-          <p:nvPr/>
-        </p:nvSpPr>
-        <p:spPr>
-          <a:xfrm>
             <a:off x="6035040" y="1234440"/>
             <a:ext cx="2514600" cy="640080"/>
           </a:xfrm>
@@ -7896,7 +7669,7 @@
             <a:pPr algn="l"/>
             <a:fld id="{F7021451-1387-4CA6-816F-3879F97B5CBC}" type="slidenum">
               <a:rPr b="0" lang="en-US"/>
-              <a:t>19</a:t>
+              <a:t>18</a:t>
             </a:fld>
             <a:endParaRPr lang="en-US"/>
           </a:p>
@@ -7959,7 +7732,7 @@
                   <a:schemeClr val="tx1"/>
                 </a:solidFill>
               </a:rPr>
-              <a:t>Notre menu ce matin</a:t>
+              <a:t>Notre matinée</a:t>
             </a:r>
             <a:endParaRPr lang="en-US" sz="3000" dirty="0"/>
           </a:p>
@@ -7974,11 +7747,11 @@
         <p:spPr>
           <a:xfrm>
             <a:off x="640080" y="1234440"/>
-            <a:ext cx="1828800" cy="1463040"/>
+            <a:ext cx="2514600" cy="1371600"/>
           </a:xfrm>
           <a:prstGeom prst="roundRect">
             <a:avLst>
-              <a:gd name="adj" fmla="val 11250"/>
+              <a:gd name="adj" fmla="val 12000"/>
             </a:avLst>
           </a:prstGeom>
           <a:solidFill>
@@ -8001,42 +7774,28 @@
       </p:sp>
       <p:sp>
         <p:nvSpPr>
-          <p:cNvPr id="4" name="Text 2"/>
-          <p:cNvSpPr txBox="1"/>
-          <p:nvPr/>
-        </p:nvSpPr>
-        <p:spPr>
-          <a:xfrm>
-            <a:off x="640080" y="1344168"/>
-            <a:ext cx="1828800" cy="548640"/>
-          </a:xfrm>
-          <a:prstGeom prst="rect">
-            <a:avLst/>
-          </a:prstGeom>
-          <a:noFill/>
-          <a:ln/>
-        </p:spPr>
-        <p:txBody>
-          <a:bodyPr wrap="square" lIns="1016" tIns="1016" rIns="1016" bIns="1016" rtlCol="0" anchor="t"/>
-          <a:lstStyle/>
-          <a:p>
-            <a:pPr algn="ctr" indent="0" marL="0">
-              <a:buNone/>
-            </a:pPr>
-            <a:r>
-              <a:rPr lang="en-US" sz="2800" dirty="0">
-                <a:solidFill>
-                  <a:schemeClr val="tx1"/>
-                </a:solidFill>
-                <a:latin typeface="Calibri" pitchFamily="34" charset="0"/>
-                <a:ea typeface="Calibri" pitchFamily="34" charset="-122"/>
-                <a:cs typeface="Calibri" pitchFamily="34" charset="-120"/>
-              </a:rPr>
-              <a:t>🖼️</a:t>
-            </a:r>
-            <a:endParaRPr lang="en-US" sz="2800" dirty="0"/>
-          </a:p>
-        </p:txBody>
+          <p:cNvPr id="4" name="Shape 2"/>
+          <p:cNvSpPr/>
+          <p:nvPr/>
+        </p:nvSpPr>
+        <p:spPr>
+          <a:xfrm>
+            <a:off x="822960" y="1691640"/>
+            <a:ext cx="457200" cy="457200"/>
+          </a:xfrm>
+          <a:prstGeom prst="ellipse">
+            <a:avLst/>
+          </a:prstGeom>
+          <a:solidFill>
+            <a:schemeClr val="accent1"/>
+          </a:solidFill>
+          <a:ln w="12700">
+            <a:solidFill>
+              <a:schemeClr val="accent1"/>
+            </a:solidFill>
+            <a:prstDash val="solid"/>
+          </a:ln>
+        </p:spPr>
       </p:sp>
       <p:sp>
         <p:nvSpPr>
@@ -8046,34 +7805,34 @@
         </p:nvSpPr>
         <p:spPr>
           <a:xfrm>
-            <a:off x="640080" y="1874520"/>
-            <a:ext cx="1828800" cy="384048"/>
-          </a:xfrm>
-          <a:prstGeom prst="rect">
-            <a:avLst/>
-          </a:prstGeom>
-          <a:noFill/>
-          <a:ln/>
-        </p:spPr>
-        <p:txBody>
-          <a:bodyPr wrap="square" lIns="1016" tIns="1016" rIns="1016" bIns="1016" rtlCol="0" anchor="t"/>
+            <a:off x="822960" y="1691640"/>
+            <a:ext cx="457200" cy="457200"/>
+          </a:xfrm>
+          <a:prstGeom prst="rect">
+            <a:avLst/>
+          </a:prstGeom>
+          <a:noFill/>
+          <a:ln/>
+        </p:spPr>
+        <p:txBody>
+          <a:bodyPr wrap="square" lIns="0" tIns="0" rIns="0" bIns="0" rtlCol="0" anchor="ctr"/>
           <a:lstStyle/>
           <a:p>
             <a:pPr algn="ctr" indent="0" marL="0">
               <a:buNone/>
             </a:pPr>
             <a:r>
-              <a:rPr lang="en-US" sz="1400" b="1" dirty="0">
-                <a:solidFill>
-                  <a:schemeClr val="tx1"/>
+              <a:rPr lang="en-US" sz="1700" b="1" dirty="0">
+                <a:solidFill>
+                  <a:srgbClr val="FFFFFF"/>
                 </a:solidFill>
                 <a:latin typeface="Century Gothic" pitchFamily="34" charset="0"/>
                 <a:ea typeface="Century Gothic" pitchFamily="34" charset="-122"/>
                 <a:cs typeface="Century Gothic" pitchFamily="34" charset="-120"/>
               </a:rPr>
-              <a:t>Le musée des pubs</a:t>
-            </a:r>
-            <a:endParaRPr lang="en-US" sz="1400" dirty="0"/>
+              <a:t>1</a:t>
+            </a:r>
+            <a:endParaRPr lang="en-US" sz="1700" dirty="0"/>
           </a:p>
         </p:txBody>
       </p:sp>
@@ -8085,34 +7844,34 @@
         </p:nvSpPr>
         <p:spPr>
           <a:xfrm>
-            <a:off x="640080" y="2258568"/>
-            <a:ext cx="1828800" cy="329184"/>
-          </a:xfrm>
-          <a:prstGeom prst="rect">
-            <a:avLst/>
-          </a:prstGeom>
-          <a:noFill/>
-          <a:ln/>
-        </p:spPr>
-        <p:txBody>
-          <a:bodyPr wrap="square" lIns="1016" tIns="1016" rIns="1016" bIns="1016" rtlCol="0" anchor="t"/>
-          <a:lstStyle/>
-          <a:p>
-            <a:pPr algn="ctr" indent="0" marL="0">
-              <a:buNone/>
-            </a:pPr>
-            <a:r>
-              <a:rPr lang="en-US" sz="1200" dirty="0">
-                <a:solidFill>
-                  <a:srgbClr val="6B7076"/>
-                </a:solidFill>
-                <a:latin typeface="Calibri" pitchFamily="34" charset="0"/>
-                <a:ea typeface="Calibri" pitchFamily="34" charset="-122"/>
-                <a:cs typeface="Calibri" pitchFamily="34" charset="-120"/>
-              </a:rPr>
-              <a:t>grand groupe</a:t>
-            </a:r>
-            <a:endParaRPr lang="en-US" sz="1200" dirty="0"/>
+            <a:off x="1417320" y="1234440"/>
+            <a:ext cx="1645920" cy="1371600"/>
+          </a:xfrm>
+          <a:prstGeom prst="rect">
+            <a:avLst/>
+          </a:prstGeom>
+          <a:noFill/>
+          <a:ln/>
+        </p:spPr>
+        <p:txBody>
+          <a:bodyPr wrap="square" lIns="1016" tIns="1016" rIns="1016" bIns="1016" rtlCol="0" anchor="ctr"/>
+          <a:lstStyle/>
+          <a:p>
+            <a:pPr indent="0" marL="0">
+              <a:buNone/>
+            </a:pPr>
+            <a:r>
+              <a:rPr lang="en-US" sz="1500" b="1" dirty="0">
+                <a:solidFill>
+                  <a:schemeClr val="tx1"/>
+                </a:solidFill>
+                <a:latin typeface="Century Gothic" pitchFamily="34" charset="0"/>
+                <a:ea typeface="Century Gothic" pitchFamily="34" charset="-122"/>
+                <a:cs typeface="Century Gothic" pitchFamily="34" charset="-120"/>
+              </a:rPr>
+              <a:t>Le musée des pubs</a:t>
+            </a:r>
+            <a:endParaRPr lang="en-US" sz="1500" dirty="0"/>
           </a:p>
         </p:txBody>
       </p:sp>
@@ -8124,12 +7883,12 @@
         </p:nvSpPr>
         <p:spPr>
           <a:xfrm>
-            <a:off x="2651760" y="1234440"/>
-            <a:ext cx="1828800" cy="1463040"/>
+            <a:off x="3337560" y="1234440"/>
+            <a:ext cx="2514600" cy="1371600"/>
           </a:xfrm>
           <a:prstGeom prst="roundRect">
             <a:avLst>
-              <a:gd name="adj" fmla="val 11250"/>
+              <a:gd name="adj" fmla="val 12000"/>
             </a:avLst>
           </a:prstGeom>
           <a:solidFill>
@@ -8152,42 +7911,28 @@
       </p:sp>
       <p:sp>
         <p:nvSpPr>
-          <p:cNvPr id="8" name="Text 6"/>
-          <p:cNvSpPr txBox="1"/>
-          <p:nvPr/>
-        </p:nvSpPr>
-        <p:spPr>
-          <a:xfrm>
-            <a:off x="2651760" y="1344168"/>
-            <a:ext cx="1828800" cy="548640"/>
-          </a:xfrm>
-          <a:prstGeom prst="rect">
-            <a:avLst/>
-          </a:prstGeom>
-          <a:noFill/>
-          <a:ln/>
-        </p:spPr>
-        <p:txBody>
-          <a:bodyPr wrap="square" lIns="1016" tIns="1016" rIns="1016" bIns="1016" rtlCol="0" anchor="t"/>
-          <a:lstStyle/>
-          <a:p>
-            <a:pPr algn="ctr" indent="0" marL="0">
-              <a:buNone/>
-            </a:pPr>
-            <a:r>
-              <a:rPr lang="en-US" sz="2800" dirty="0">
-                <a:solidFill>
-                  <a:schemeClr val="tx1"/>
-                </a:solidFill>
-                <a:latin typeface="Calibri" pitchFamily="34" charset="0"/>
-                <a:ea typeface="Calibri" pitchFamily="34" charset="-122"/>
-                <a:cs typeface="Calibri" pitchFamily="34" charset="-120"/>
-              </a:rPr>
-              <a:t>🔎</a:t>
-            </a:r>
-            <a:endParaRPr lang="en-US" sz="2800" dirty="0"/>
-          </a:p>
-        </p:txBody>
+          <p:cNvPr id="8" name="Shape 6"/>
+          <p:cNvSpPr/>
+          <p:nvPr/>
+        </p:nvSpPr>
+        <p:spPr>
+          <a:xfrm>
+            <a:off x="3520440" y="1691640"/>
+            <a:ext cx="457200" cy="457200"/>
+          </a:xfrm>
+          <a:prstGeom prst="ellipse">
+            <a:avLst/>
+          </a:prstGeom>
+          <a:solidFill>
+            <a:schemeClr val="accent1"/>
+          </a:solidFill>
+          <a:ln w="12700">
+            <a:solidFill>
+              <a:schemeClr val="accent1"/>
+            </a:solidFill>
+            <a:prstDash val="solid"/>
+          </a:ln>
+        </p:spPr>
       </p:sp>
       <p:sp>
         <p:nvSpPr>
@@ -8197,34 +7942,34 @@
         </p:nvSpPr>
         <p:spPr>
           <a:xfrm>
-            <a:off x="2651760" y="1874520"/>
-            <a:ext cx="1828800" cy="384048"/>
-          </a:xfrm>
-          <a:prstGeom prst="rect">
-            <a:avLst/>
-          </a:prstGeom>
-          <a:noFill/>
-          <a:ln/>
-        </p:spPr>
-        <p:txBody>
-          <a:bodyPr wrap="square" lIns="1016" tIns="1016" rIns="1016" bIns="1016" rtlCol="0" anchor="t"/>
+            <a:off x="3520440" y="1691640"/>
+            <a:ext cx="457200" cy="457200"/>
+          </a:xfrm>
+          <a:prstGeom prst="rect">
+            <a:avLst/>
+          </a:prstGeom>
+          <a:noFill/>
+          <a:ln/>
+        </p:spPr>
+        <p:txBody>
+          <a:bodyPr wrap="square" lIns="0" tIns="0" rIns="0" bIns="0" rtlCol="0" anchor="ctr"/>
           <a:lstStyle/>
           <a:p>
             <a:pPr algn="ctr" indent="0" marL="0">
               <a:buNone/>
             </a:pPr>
             <a:r>
-              <a:rPr lang="en-US" sz="1400" b="1" dirty="0">
-                <a:solidFill>
-                  <a:schemeClr val="tx1"/>
+              <a:rPr lang="en-US" sz="1700" b="1" dirty="0">
+                <a:solidFill>
+                  <a:srgbClr val="FFFFFF"/>
                 </a:solidFill>
                 <a:latin typeface="Century Gothic" pitchFamily="34" charset="0"/>
                 <a:ea typeface="Century Gothic" pitchFamily="34" charset="-122"/>
                 <a:cs typeface="Century Gothic" pitchFamily="34" charset="-120"/>
               </a:rPr>
-              <a:t>6 enquêtes debout</a:t>
-            </a:r>
-            <a:endParaRPr lang="en-US" sz="1400" dirty="0"/>
+              <a:t>2</a:t>
+            </a:r>
+            <a:endParaRPr lang="en-US" sz="1700" dirty="0"/>
           </a:p>
         </p:txBody>
       </p:sp>
@@ -8236,34 +7981,34 @@
         </p:nvSpPr>
         <p:spPr>
           <a:xfrm>
-            <a:off x="2651760" y="2258568"/>
-            <a:ext cx="1828800" cy="329184"/>
-          </a:xfrm>
-          <a:prstGeom prst="rect">
-            <a:avLst/>
-          </a:prstGeom>
-          <a:noFill/>
-          <a:ln/>
-        </p:spPr>
-        <p:txBody>
-          <a:bodyPr wrap="square" lIns="1016" tIns="1016" rIns="1016" bIns="1016" rtlCol="0" anchor="t"/>
-          <a:lstStyle/>
-          <a:p>
-            <a:pPr algn="ctr" indent="0" marL="0">
-              <a:buNone/>
-            </a:pPr>
-            <a:r>
-              <a:rPr lang="en-US" sz="1200" dirty="0">
-                <a:solidFill>
-                  <a:srgbClr val="6B7076"/>
-                </a:solidFill>
-                <a:latin typeface="Calibri" pitchFamily="34" charset="0"/>
-                <a:ea typeface="Calibri" pitchFamily="34" charset="-122"/>
-                <a:cs typeface="Calibri" pitchFamily="34" charset="-120"/>
-              </a:rPr>
-              <a:t>en équipe</a:t>
-            </a:r>
-            <a:endParaRPr lang="en-US" sz="1200" dirty="0"/>
+            <a:off x="4114800" y="1234440"/>
+            <a:ext cx="1645920" cy="1371600"/>
+          </a:xfrm>
+          <a:prstGeom prst="rect">
+            <a:avLst/>
+          </a:prstGeom>
+          <a:noFill/>
+          <a:ln/>
+        </p:spPr>
+        <p:txBody>
+          <a:bodyPr wrap="square" lIns="1016" tIns="1016" rIns="1016" bIns="1016" rtlCol="0" anchor="ctr"/>
+          <a:lstStyle/>
+          <a:p>
+            <a:pPr indent="0" marL="0">
+              <a:buNone/>
+            </a:pPr>
+            <a:r>
+              <a:rPr lang="en-US" sz="1500" b="1" dirty="0">
+                <a:solidFill>
+                  <a:schemeClr val="tx1"/>
+                </a:solidFill>
+                <a:latin typeface="Century Gothic" pitchFamily="34" charset="0"/>
+                <a:ea typeface="Century Gothic" pitchFamily="34" charset="-122"/>
+                <a:cs typeface="Century Gothic" pitchFamily="34" charset="-120"/>
+              </a:rPr>
+              <a:t>6 enquêtes en classe collabo-réflexive</a:t>
+            </a:r>
+            <a:endParaRPr lang="en-US" sz="1500" dirty="0"/>
           </a:p>
         </p:txBody>
       </p:sp>
@@ -8275,12 +8020,149 @@
         </p:nvSpPr>
         <p:spPr>
           <a:xfrm>
-            <a:off x="4663440" y="1234440"/>
-            <a:ext cx="1828800" cy="1463040"/>
+            <a:off x="6035040" y="1234440"/>
+            <a:ext cx="2514600" cy="1371600"/>
           </a:xfrm>
           <a:prstGeom prst="roundRect">
             <a:avLst>
-              <a:gd name="adj" fmla="val 11250"/>
+              <a:gd name="adj" fmla="val 12000"/>
+            </a:avLst>
+          </a:prstGeom>
+          <a:solidFill>
+            <a:schemeClr val="accent2"/>
+          </a:solidFill>
+          <a:ln w="12700">
+            <a:solidFill>
+              <a:schemeClr val="accent2"/>
+            </a:solidFill>
+            <a:prstDash val="solid"/>
+          </a:ln>
+          <a:effectLst>
+            <a:outerShdw sx="100000" sy="100000" kx="0" ky="0" algn="bl" rotWithShape="0" blurRad="101600" dist="38100" dir="5400000">
+              <a:srgbClr val="BFCFCC">
+                <a:alpha val="100000"/>
+              </a:srgbClr>
+            </a:outerShdw>
+          </a:effectLst>
+        </p:spPr>
+      </p:sp>
+      <p:sp>
+        <p:nvSpPr>
+          <p:cNvPr id="12" name="Shape 10"/>
+          <p:cNvSpPr/>
+          <p:nvPr/>
+        </p:nvSpPr>
+        <p:spPr>
+          <a:xfrm>
+            <a:off x="6217920" y="1691640"/>
+            <a:ext cx="457200" cy="457200"/>
+          </a:xfrm>
+          <a:prstGeom prst="ellipse">
+            <a:avLst/>
+          </a:prstGeom>
+          <a:solidFill>
+            <a:schemeClr val="accent1"/>
+          </a:solidFill>
+          <a:ln w="12700">
+            <a:solidFill>
+              <a:schemeClr val="accent1"/>
+            </a:solidFill>
+            <a:prstDash val="solid"/>
+          </a:ln>
+        </p:spPr>
+      </p:sp>
+      <p:sp>
+        <p:nvSpPr>
+          <p:cNvPr id="13" name="Text 11"/>
+          <p:cNvSpPr txBox="1"/>
+          <p:nvPr/>
+        </p:nvSpPr>
+        <p:spPr>
+          <a:xfrm>
+            <a:off x="6217920" y="1691640"/>
+            <a:ext cx="457200" cy="457200"/>
+          </a:xfrm>
+          <a:prstGeom prst="rect">
+            <a:avLst/>
+          </a:prstGeom>
+          <a:noFill/>
+          <a:ln/>
+        </p:spPr>
+        <p:txBody>
+          <a:bodyPr wrap="square" lIns="0" tIns="0" rIns="0" bIns="0" rtlCol="0" anchor="ctr"/>
+          <a:lstStyle/>
+          <a:p>
+            <a:pPr algn="ctr" indent="0" marL="0">
+              <a:buNone/>
+            </a:pPr>
+            <a:r>
+              <a:rPr lang="en-US" sz="1700" b="1" dirty="0">
+                <a:solidFill>
+                  <a:srgbClr val="FFFFFF"/>
+                </a:solidFill>
+                <a:latin typeface="Century Gothic" pitchFamily="34" charset="0"/>
+                <a:ea typeface="Century Gothic" pitchFamily="34" charset="-122"/>
+                <a:cs typeface="Century Gothic" pitchFamily="34" charset="-120"/>
+              </a:rPr>
+              <a:t>3</a:t>
+            </a:r>
+            <a:endParaRPr lang="en-US" sz="1700" dirty="0"/>
+          </a:p>
+        </p:txBody>
+      </p:sp>
+      <p:sp>
+        <p:nvSpPr>
+          <p:cNvPr id="14" name="Text 12"/>
+          <p:cNvSpPr txBox="1"/>
+          <p:nvPr/>
+        </p:nvSpPr>
+        <p:spPr>
+          <a:xfrm>
+            <a:off x="6812280" y="1234440"/>
+            <a:ext cx="1645920" cy="1371600"/>
+          </a:xfrm>
+          <a:prstGeom prst="rect">
+            <a:avLst/>
+          </a:prstGeom>
+          <a:noFill/>
+          <a:ln/>
+        </p:spPr>
+        <p:txBody>
+          <a:bodyPr wrap="square" lIns="1016" tIns="1016" rIns="1016" bIns="1016" rtlCol="0" anchor="ctr"/>
+          <a:lstStyle/>
+          <a:p>
+            <a:pPr indent="0" marL="0">
+              <a:buNone/>
+            </a:pPr>
+            <a:r>
+              <a:rPr lang="en-US" sz="1500" b="1" dirty="0">
+                <a:solidFill>
+                  <a:schemeClr val="tx1"/>
+                </a:solidFill>
+                <a:latin typeface="Century Gothic" pitchFamily="34" charset="0"/>
+                <a:ea typeface="Century Gothic" pitchFamily="34" charset="-122"/>
+                <a:cs typeface="Century Gothic" pitchFamily="34" charset="-120"/>
+              </a:rPr>
+              <a:t>Les 8 ruses de la pub</a:t>
+            </a:r>
+            <a:endParaRPr lang="en-US" sz="1500" dirty="0"/>
+          </a:p>
+        </p:txBody>
+      </p:sp>
+      <p:sp>
+        <p:nvSpPr>
+          <p:cNvPr id="15" name="étape 4"/>
+          <p:cNvSpPr/>
+          <p:nvPr/>
+        </p:nvSpPr>
+        <p:spPr>
+          <a:xfrm>
+            <a:off x="640080" y="2834640"/>
+            <a:ext cx="2514600" cy="1371600"/>
+          </a:xfrm>
+          <a:prstGeom prst="roundRect">
+            <a:avLst>
+              <a:gd name="adj" fmla="val 12000"/>
             </a:avLst>
           </a:prstGeom>
           <a:solidFill>
@@ -8303,220 +8185,94 @@
       </p:sp>
       <p:sp>
         <p:nvSpPr>
-          <p:cNvPr id="12" name="Text 10"/>
+          <p:cNvPr id="16" name="Shape 14"/>
+          <p:cNvSpPr/>
+          <p:nvPr/>
+        </p:nvSpPr>
+        <p:spPr>
+          <a:xfrm>
+            <a:off x="822960" y="3291840"/>
+            <a:ext cx="457200" cy="457200"/>
+          </a:xfrm>
+          <a:prstGeom prst="ellipse">
+            <a:avLst/>
+          </a:prstGeom>
+          <a:solidFill>
+            <a:schemeClr val="accent1"/>
+          </a:solidFill>
+          <a:ln w="12700">
+            <a:solidFill>
+              <a:schemeClr val="accent1"/>
+            </a:solidFill>
+            <a:prstDash val="solid"/>
+          </a:ln>
+        </p:spPr>
+      </p:sp>
+      <p:sp>
+        <p:nvSpPr>
+          <p:cNvPr id="17" name="Text 15"/>
           <p:cNvSpPr txBox="1"/>
           <p:nvPr/>
         </p:nvSpPr>
         <p:spPr>
           <a:xfrm>
-            <a:off x="4663440" y="1344168"/>
-            <a:ext cx="1828800" cy="548640"/>
-          </a:xfrm>
-          <a:prstGeom prst="rect">
-            <a:avLst/>
-          </a:prstGeom>
-          <a:noFill/>
-          <a:ln/>
-        </p:spPr>
-        <p:txBody>
-          <a:bodyPr wrap="square" lIns="1016" tIns="1016" rIns="1016" bIns="1016" rtlCol="0" anchor="t"/>
+            <a:off x="822960" y="3291840"/>
+            <a:ext cx="457200" cy="457200"/>
+          </a:xfrm>
+          <a:prstGeom prst="rect">
+            <a:avLst/>
+          </a:prstGeom>
+          <a:noFill/>
+          <a:ln/>
+        </p:spPr>
+        <p:txBody>
+          <a:bodyPr wrap="square" lIns="0" tIns="0" rIns="0" bIns="0" rtlCol="0" anchor="ctr"/>
           <a:lstStyle/>
           <a:p>
             <a:pPr algn="ctr" indent="0" marL="0">
               <a:buNone/>
             </a:pPr>
             <a:r>
-              <a:rPr lang="en-US" sz="2800" dirty="0">
-                <a:solidFill>
-                  <a:schemeClr val="tx1"/>
-                </a:solidFill>
-                <a:latin typeface="Calibri" pitchFamily="34" charset="0"/>
-                <a:ea typeface="Calibri" pitchFamily="34" charset="-122"/>
-                <a:cs typeface="Calibri" pitchFamily="34" charset="-120"/>
-              </a:rPr>
-              <a:t>🦊</a:t>
-            </a:r>
-            <a:endParaRPr lang="en-US" sz="2800" dirty="0"/>
-          </a:p>
-        </p:txBody>
-      </p:sp>
-      <p:sp>
-        <p:nvSpPr>
-          <p:cNvPr id="13" name="Text 11"/>
-          <p:cNvSpPr txBox="1"/>
-          <p:nvPr/>
-        </p:nvSpPr>
-        <p:spPr>
-          <a:xfrm>
-            <a:off x="4663440" y="1874520"/>
-            <a:ext cx="1828800" cy="384048"/>
-          </a:xfrm>
-          <a:prstGeom prst="rect">
-            <a:avLst/>
-          </a:prstGeom>
-          <a:noFill/>
-          <a:ln/>
-        </p:spPr>
-        <p:txBody>
-          <a:bodyPr wrap="square" lIns="1016" tIns="1016" rIns="1016" bIns="1016" rtlCol="0" anchor="t"/>
-          <a:lstStyle/>
-          <a:p>
-            <a:pPr algn="ctr" indent="0" marL="0">
-              <a:buNone/>
-            </a:pPr>
-            <a:r>
-              <a:rPr lang="en-US" sz="1400" b="1" dirty="0">
-                <a:solidFill>
-                  <a:schemeClr val="tx1"/>
+              <a:rPr lang="en-US" sz="1700" b="1" dirty="0">
+                <a:solidFill>
+                  <a:srgbClr val="FFFFFF"/>
                 </a:solidFill>
                 <a:latin typeface="Century Gothic" pitchFamily="34" charset="0"/>
                 <a:ea typeface="Century Gothic" pitchFamily="34" charset="-122"/>
                 <a:cs typeface="Century Gothic" pitchFamily="34" charset="-120"/>
               </a:rPr>
-              <a:t>Les 8 ruses</a:t>
-            </a:r>
-            <a:endParaRPr lang="en-US" sz="1400" dirty="0"/>
-          </a:p>
-        </p:txBody>
-      </p:sp>
-      <p:sp>
-        <p:nvSpPr>
-          <p:cNvPr id="14" name="Text 12"/>
+              <a:t>4</a:t>
+            </a:r>
+            <a:endParaRPr lang="en-US" sz="1700" dirty="0"/>
+          </a:p>
+        </p:txBody>
+      </p:sp>
+      <p:sp>
+        <p:nvSpPr>
+          <p:cNvPr id="18" name="Text 16"/>
           <p:cNvSpPr txBox="1"/>
           <p:nvPr/>
         </p:nvSpPr>
         <p:spPr>
           <a:xfrm>
-            <a:off x="4663440" y="2258568"/>
-            <a:ext cx="1828800" cy="329184"/>
-          </a:xfrm>
-          <a:prstGeom prst="rect">
-            <a:avLst/>
-          </a:prstGeom>
-          <a:noFill/>
-          <a:ln/>
-        </p:spPr>
-        <p:txBody>
-          <a:bodyPr wrap="square" lIns="1016" tIns="1016" rIns="1016" bIns="1016" rtlCol="0" anchor="t"/>
-          <a:lstStyle/>
-          <a:p>
-            <a:pPr algn="ctr" indent="0" marL="0">
-              <a:buNone/>
-            </a:pPr>
-            <a:r>
-              <a:rPr lang="en-US" sz="1200" dirty="0">
-                <a:solidFill>
-                  <a:srgbClr val="6B7076"/>
-                </a:solidFill>
-                <a:latin typeface="Calibri" pitchFamily="34" charset="0"/>
-                <a:ea typeface="Calibri" pitchFamily="34" charset="-122"/>
-                <a:cs typeface="Calibri" pitchFamily="34" charset="-120"/>
-              </a:rPr>
-              <a:t>grand groupe</a:t>
-            </a:r>
-            <a:endParaRPr lang="en-US" sz="1200" dirty="0"/>
-          </a:p>
-        </p:txBody>
-      </p:sp>
-      <p:sp>
-        <p:nvSpPr>
-          <p:cNvPr id="15" name="étape 4"/>
-          <p:cNvSpPr/>
-          <p:nvPr/>
-        </p:nvSpPr>
-        <p:spPr>
-          <a:xfrm>
-            <a:off x="6675120" y="1234440"/>
-            <a:ext cx="1828800" cy="1463040"/>
-          </a:xfrm>
-          <a:prstGeom prst="roundRect">
-            <a:avLst>
-              <a:gd name="adj" fmla="val 11250"/>
-            </a:avLst>
-          </a:prstGeom>
-          <a:solidFill>
-            <a:schemeClr val="accent2"/>
-          </a:solidFill>
-          <a:ln w="12700">
-            <a:solidFill>
-              <a:schemeClr val="accent2"/>
-            </a:solidFill>
-            <a:prstDash val="solid"/>
-          </a:ln>
-          <a:effectLst>
-            <a:outerShdw sx="100000" sy="100000" kx="0" ky="0" algn="bl" rotWithShape="0" blurRad="101600" dist="38100" dir="5400000">
-              <a:srgbClr val="BFCFCC">
-                <a:alpha val="100000"/>
-              </a:srgbClr>
-            </a:outerShdw>
-          </a:effectLst>
-        </p:spPr>
-      </p:sp>
-      <p:sp>
-        <p:nvSpPr>
-          <p:cNvPr id="16" name="Text 14"/>
-          <p:cNvSpPr txBox="1"/>
-          <p:nvPr/>
-        </p:nvSpPr>
-        <p:spPr>
-          <a:xfrm>
-            <a:off x="6675120" y="1344168"/>
-            <a:ext cx="1828800" cy="548640"/>
-          </a:xfrm>
-          <a:prstGeom prst="rect">
-            <a:avLst/>
-          </a:prstGeom>
-          <a:noFill/>
-          <a:ln/>
-        </p:spPr>
-        <p:txBody>
-          <a:bodyPr wrap="square" lIns="1016" tIns="1016" rIns="1016" bIns="1016" rtlCol="0" anchor="t"/>
-          <a:lstStyle/>
-          <a:p>
-            <a:pPr algn="ctr" indent="0" marL="0">
-              <a:buNone/>
-            </a:pPr>
-            <a:r>
-              <a:rPr lang="en-US" sz="2800" dirty="0">
-                <a:solidFill>
-                  <a:schemeClr val="tx1"/>
-                </a:solidFill>
-                <a:latin typeface="Calibri" pitchFamily="34" charset="0"/>
-                <a:ea typeface="Calibri" pitchFamily="34" charset="-122"/>
-                <a:cs typeface="Calibri" pitchFamily="34" charset="-120"/>
-              </a:rPr>
-              <a:t>☕</a:t>
-            </a:r>
-            <a:endParaRPr lang="en-US" sz="2800" dirty="0"/>
-          </a:p>
-        </p:txBody>
-      </p:sp>
-      <p:sp>
-        <p:nvSpPr>
-          <p:cNvPr id="17" name="Text 15"/>
-          <p:cNvSpPr txBox="1"/>
-          <p:nvPr/>
-        </p:nvSpPr>
-        <p:spPr>
-          <a:xfrm>
-            <a:off x="6675120" y="1874520"/>
-            <a:ext cx="1828800" cy="384048"/>
-          </a:xfrm>
-          <a:prstGeom prst="rect">
-            <a:avLst/>
-          </a:prstGeom>
-          <a:noFill/>
-          <a:ln/>
-        </p:spPr>
-        <p:txBody>
-          <a:bodyPr wrap="square" lIns="1016" tIns="1016" rIns="1016" bIns="1016" rtlCol="0" anchor="t"/>
-          <a:lstStyle/>
-          <a:p>
-            <a:pPr algn="ctr" indent="0" marL="0">
-              <a:buNone/>
-            </a:pPr>
-            <a:r>
-              <a:rPr lang="en-US" sz="1400" b="1" dirty="0">
+            <a:off x="1417320" y="2834640"/>
+            <a:ext cx="1645920" cy="1371600"/>
+          </a:xfrm>
+          <a:prstGeom prst="rect">
+            <a:avLst/>
+          </a:prstGeom>
+          <a:noFill/>
+          <a:ln/>
+        </p:spPr>
+        <p:txBody>
+          <a:bodyPr wrap="square" lIns="1016" tIns="1016" rIns="1016" bIns="1016" rtlCol="0" anchor="ctr"/>
+          <a:lstStyle/>
+          <a:p>
+            <a:pPr indent="0" marL="0">
+              <a:buNone/>
+            </a:pPr>
+            <a:r>
+              <a:rPr lang="en-US" sz="1500" b="1" dirty="0">
                 <a:solidFill>
                   <a:schemeClr val="tx1"/>
                 </a:solidFill>
@@ -8524,37 +8280,9 @@
                 <a:ea typeface="Century Gothic" pitchFamily="34" charset="-122"/>
                 <a:cs typeface="Century Gothic" pitchFamily="34" charset="-120"/>
               </a:rPr>
-              <a:t>Pause</a:t>
-            </a:r>
-            <a:endParaRPr lang="en-US" sz="1400" dirty="0"/>
-          </a:p>
-        </p:txBody>
-      </p:sp>
-      <p:sp>
-        <p:nvSpPr>
-          <p:cNvPr id="18" name="Text 16"/>
-          <p:cNvSpPr txBox="1"/>
-          <p:nvPr/>
-        </p:nvSpPr>
-        <p:spPr>
-          <a:xfrm>
-            <a:off x="6675120" y="2258568"/>
-            <a:ext cx="1828800" cy="329184"/>
-          </a:xfrm>
-          <a:prstGeom prst="rect">
-            <a:avLst/>
-          </a:prstGeom>
-          <a:noFill/>
-          <a:ln/>
-        </p:spPr>
-        <p:txBody>
-          <a:bodyPr wrap="square" lIns="1016" tIns="1016" rIns="1016" bIns="1016" rtlCol="0" anchor="t"/>
-          <a:lstStyle/>
-          <a:p>
-            <a:pPr algn="ctr" indent="0" marL="0">
-              <a:buNone/>
-            </a:pPr>
-            <a:endParaRPr lang="en-US" sz="1200" dirty="0"/>
+              <a:t>Piège le renard !</a:t>
+            </a:r>
+            <a:endParaRPr lang="en-US" sz="1500" dirty="0"/>
           </a:p>
         </p:txBody>
       </p:sp>
@@ -8566,12 +8294,12 @@
         </p:nvSpPr>
         <p:spPr>
           <a:xfrm>
-            <a:off x="640080" y="2926080"/>
-            <a:ext cx="1828800" cy="1463040"/>
+            <a:off x="3337560" y="2834640"/>
+            <a:ext cx="2514600" cy="1371600"/>
           </a:xfrm>
           <a:prstGeom prst="roundRect">
             <a:avLst>
-              <a:gd name="adj" fmla="val 11250"/>
+              <a:gd name="adj" fmla="val 12000"/>
             </a:avLst>
           </a:prstGeom>
           <a:solidFill>
@@ -8594,42 +8322,28 @@
       </p:sp>
       <p:sp>
         <p:nvSpPr>
-          <p:cNvPr id="20" name="Text 18"/>
-          <p:cNvSpPr txBox="1"/>
-          <p:nvPr/>
-        </p:nvSpPr>
-        <p:spPr>
-          <a:xfrm>
-            <a:off x="640080" y="3035808"/>
-            <a:ext cx="1828800" cy="548640"/>
-          </a:xfrm>
-          <a:prstGeom prst="rect">
-            <a:avLst/>
-          </a:prstGeom>
-          <a:noFill/>
-          <a:ln/>
-        </p:spPr>
-        <p:txBody>
-          <a:bodyPr wrap="square" lIns="1016" tIns="1016" rIns="1016" bIns="1016" rtlCol="0" anchor="t"/>
-          <a:lstStyle/>
-          <a:p>
-            <a:pPr algn="ctr" indent="0" marL="0">
-              <a:buNone/>
-            </a:pPr>
-            <a:r>
-              <a:rPr lang="en-US" sz="2800" dirty="0">
-                <a:solidFill>
-                  <a:schemeClr val="tx1"/>
-                </a:solidFill>
-                <a:latin typeface="Calibri" pitchFamily="34" charset="0"/>
-                <a:ea typeface="Calibri" pitchFamily="34" charset="-122"/>
-                <a:cs typeface="Calibri" pitchFamily="34" charset="-120"/>
-              </a:rPr>
-              <a:t>🎨</a:t>
-            </a:r>
-            <a:endParaRPr lang="en-US" sz="2800" dirty="0"/>
-          </a:p>
-        </p:txBody>
+          <p:cNvPr id="20" name="Shape 18"/>
+          <p:cNvSpPr/>
+          <p:nvPr/>
+        </p:nvSpPr>
+        <p:spPr>
+          <a:xfrm>
+            <a:off x="3520440" y="3291840"/>
+            <a:ext cx="457200" cy="457200"/>
+          </a:xfrm>
+          <a:prstGeom prst="ellipse">
+            <a:avLst/>
+          </a:prstGeom>
+          <a:solidFill>
+            <a:schemeClr val="accent1"/>
+          </a:solidFill>
+          <a:ln w="12700">
+            <a:solidFill>
+              <a:schemeClr val="accent1"/>
+            </a:solidFill>
+            <a:prstDash val="solid"/>
+          </a:ln>
+        </p:spPr>
       </p:sp>
       <p:sp>
         <p:nvSpPr>
@@ -8639,34 +8353,34 @@
         </p:nvSpPr>
         <p:spPr>
           <a:xfrm>
-            <a:off x="640080" y="3566160"/>
-            <a:ext cx="1828800" cy="384048"/>
-          </a:xfrm>
-          <a:prstGeom prst="rect">
-            <a:avLst/>
-          </a:prstGeom>
-          <a:noFill/>
-          <a:ln/>
-        </p:spPr>
-        <p:txBody>
-          <a:bodyPr wrap="square" lIns="1016" tIns="1016" rIns="1016" bIns="1016" rtlCol="0" anchor="t"/>
+            <a:off x="3520440" y="3291840"/>
+            <a:ext cx="457200" cy="457200"/>
+          </a:xfrm>
+          <a:prstGeom prst="rect">
+            <a:avLst/>
+          </a:prstGeom>
+          <a:noFill/>
+          <a:ln/>
+        </p:spPr>
+        <p:txBody>
+          <a:bodyPr wrap="square" lIns="0" tIns="0" rIns="0" bIns="0" rtlCol="0" anchor="ctr"/>
           <a:lstStyle/>
           <a:p>
             <a:pPr algn="ctr" indent="0" marL="0">
               <a:buNone/>
             </a:pPr>
             <a:r>
-              <a:rPr lang="en-US" sz="1400" b="1" dirty="0">
-                <a:solidFill>
-                  <a:schemeClr val="tx1"/>
+              <a:rPr lang="en-US" sz="1700" b="1" dirty="0">
+                <a:solidFill>
+                  <a:srgbClr val="FFFFFF"/>
                 </a:solidFill>
                 <a:latin typeface="Century Gothic" pitchFamily="34" charset="0"/>
                 <a:ea typeface="Century Gothic" pitchFamily="34" charset="-122"/>
                 <a:cs typeface="Century Gothic" pitchFamily="34" charset="-120"/>
               </a:rPr>
-              <a:t>Piège le renard !</a:t>
-            </a:r>
-            <a:endParaRPr lang="en-US" sz="1400" dirty="0"/>
+              <a:t>5</a:t>
+            </a:r>
+            <a:endParaRPr lang="en-US" sz="1700" dirty="0"/>
           </a:p>
         </p:txBody>
       </p:sp>
@@ -8678,34 +8392,34 @@
         </p:nvSpPr>
         <p:spPr>
           <a:xfrm>
-            <a:off x="640080" y="3950208"/>
-            <a:ext cx="1828800" cy="329184"/>
-          </a:xfrm>
-          <a:prstGeom prst="rect">
-            <a:avLst/>
-          </a:prstGeom>
-          <a:noFill/>
-          <a:ln/>
-        </p:spPr>
-        <p:txBody>
-          <a:bodyPr wrap="square" lIns="1016" tIns="1016" rIns="1016" bIns="1016" rtlCol="0" anchor="t"/>
-          <a:lstStyle/>
-          <a:p>
-            <a:pPr algn="ctr" indent="0" marL="0">
-              <a:buNone/>
-            </a:pPr>
-            <a:r>
-              <a:rPr lang="en-US" sz="1200" dirty="0">
-                <a:solidFill>
-                  <a:srgbClr val="6B7076"/>
-                </a:solidFill>
-                <a:latin typeface="Calibri" pitchFamily="34" charset="0"/>
-                <a:ea typeface="Calibri" pitchFamily="34" charset="-122"/>
-                <a:cs typeface="Calibri" pitchFamily="34" charset="-120"/>
-              </a:rPr>
-              <a:t>ordi ou papier</a:t>
-            </a:r>
-            <a:endParaRPr lang="en-US" sz="1200" dirty="0"/>
+            <a:off x="4114800" y="2834640"/>
+            <a:ext cx="1645920" cy="1371600"/>
+          </a:xfrm>
+          <a:prstGeom prst="rect">
+            <a:avLst/>
+          </a:prstGeom>
+          <a:noFill/>
+          <a:ln/>
+        </p:spPr>
+        <p:txBody>
+          <a:bodyPr wrap="square" lIns="1016" tIns="1016" rIns="1016" bIns="1016" rtlCol="0" anchor="ctr"/>
+          <a:lstStyle/>
+          <a:p>
+            <a:pPr indent="0" marL="0">
+              <a:buNone/>
+            </a:pPr>
+            <a:r>
+              <a:rPr lang="en-US" sz="1500" b="1" dirty="0">
+                <a:solidFill>
+                  <a:schemeClr val="tx1"/>
+                </a:solidFill>
+                <a:latin typeface="Century Gothic" pitchFamily="34" charset="0"/>
+                <a:ea typeface="Century Gothic" pitchFamily="34" charset="-122"/>
+                <a:cs typeface="Century Gothic" pitchFamily="34" charset="-120"/>
+              </a:rPr>
+              <a:t>La galerie</a:t>
+            </a:r>
+            <a:endParaRPr lang="en-US" sz="1500" dirty="0"/>
           </a:p>
         </p:txBody>
       </p:sp>
@@ -8717,12 +8431,12 @@
         </p:nvSpPr>
         <p:spPr>
           <a:xfrm>
-            <a:off x="2651760" y="2926080"/>
-            <a:ext cx="1828800" cy="1463040"/>
+            <a:off x="6035040" y="2834640"/>
+            <a:ext cx="2514600" cy="1371600"/>
           </a:xfrm>
           <a:prstGeom prst="roundRect">
             <a:avLst>
-              <a:gd name="adj" fmla="val 11250"/>
+              <a:gd name="adj" fmla="val 12000"/>
             </a:avLst>
           </a:prstGeom>
           <a:solidFill>
@@ -8745,42 +8459,28 @@
       </p:sp>
       <p:sp>
         <p:nvSpPr>
-          <p:cNvPr id="24" name="Text 22"/>
-          <p:cNvSpPr txBox="1"/>
-          <p:nvPr/>
-        </p:nvSpPr>
-        <p:spPr>
-          <a:xfrm>
-            <a:off x="2651760" y="3035808"/>
-            <a:ext cx="1828800" cy="548640"/>
-          </a:xfrm>
-          <a:prstGeom prst="rect">
-            <a:avLst/>
-          </a:prstGeom>
-          <a:noFill/>
-          <a:ln/>
-        </p:spPr>
-        <p:txBody>
-          <a:bodyPr wrap="square" lIns="1016" tIns="1016" rIns="1016" bIns="1016" rtlCol="0" anchor="t"/>
-          <a:lstStyle/>
-          <a:p>
-            <a:pPr algn="ctr" indent="0" marL="0">
-              <a:buNone/>
-            </a:pPr>
-            <a:r>
-              <a:rPr lang="en-US" sz="2800" dirty="0">
-                <a:solidFill>
-                  <a:schemeClr val="tx1"/>
-                </a:solidFill>
-                <a:latin typeface="Calibri" pitchFamily="34" charset="0"/>
-                <a:ea typeface="Calibri" pitchFamily="34" charset="-122"/>
-                <a:cs typeface="Calibri" pitchFamily="34" charset="-120"/>
-              </a:rPr>
-              <a:t>🕵️</a:t>
-            </a:r>
-            <a:endParaRPr lang="en-US" sz="2800" dirty="0"/>
-          </a:p>
-        </p:txBody>
+          <p:cNvPr id="24" name="Shape 22"/>
+          <p:cNvSpPr/>
+          <p:nvPr/>
+        </p:nvSpPr>
+        <p:spPr>
+          <a:xfrm>
+            <a:off x="6217920" y="3291840"/>
+            <a:ext cx="457200" cy="457200"/>
+          </a:xfrm>
+          <a:prstGeom prst="ellipse">
+            <a:avLst/>
+          </a:prstGeom>
+          <a:solidFill>
+            <a:schemeClr val="accent1"/>
+          </a:solidFill>
+          <a:ln w="12700">
+            <a:solidFill>
+              <a:schemeClr val="accent1"/>
+            </a:solidFill>
+            <a:prstDash val="solid"/>
+          </a:ln>
+        </p:spPr>
       </p:sp>
       <p:sp>
         <p:nvSpPr>
@@ -8790,34 +8490,34 @@
         </p:nvSpPr>
         <p:spPr>
           <a:xfrm>
-            <a:off x="2651760" y="3566160"/>
-            <a:ext cx="1828800" cy="384048"/>
-          </a:xfrm>
-          <a:prstGeom prst="rect">
-            <a:avLst/>
-          </a:prstGeom>
-          <a:noFill/>
-          <a:ln/>
-        </p:spPr>
-        <p:txBody>
-          <a:bodyPr wrap="square" lIns="1016" tIns="1016" rIns="1016" bIns="1016" rtlCol="0" anchor="t"/>
+            <a:off x="6217920" y="3291840"/>
+            <a:ext cx="457200" cy="457200"/>
+          </a:xfrm>
+          <a:prstGeom prst="rect">
+            <a:avLst/>
+          </a:prstGeom>
+          <a:noFill/>
+          <a:ln/>
+        </p:spPr>
+        <p:txBody>
+          <a:bodyPr wrap="square" lIns="0" tIns="0" rIns="0" bIns="0" rtlCol="0" anchor="ctr"/>
           <a:lstStyle/>
           <a:p>
             <a:pPr algn="ctr" indent="0" marL="0">
               <a:buNone/>
             </a:pPr>
             <a:r>
-              <a:rPr lang="en-US" sz="1400" b="1" dirty="0">
-                <a:solidFill>
-                  <a:schemeClr val="tx1"/>
+              <a:rPr lang="en-US" sz="1700" b="1" dirty="0">
+                <a:solidFill>
+                  <a:srgbClr val="FFFFFF"/>
                 </a:solidFill>
                 <a:latin typeface="Century Gothic" pitchFamily="34" charset="0"/>
                 <a:ea typeface="Century Gothic" pitchFamily="34" charset="-122"/>
                 <a:cs typeface="Century Gothic" pitchFamily="34" charset="-120"/>
               </a:rPr>
-              <a:t>La galerie</a:t>
-            </a:r>
-            <a:endParaRPr lang="en-US" sz="1400" dirty="0"/>
+              <a:t>6</a:t>
+            </a:r>
+            <a:endParaRPr lang="en-US" sz="1700" dirty="0"/>
           </a:p>
         </p:txBody>
       </p:sp>
@@ -8829,136 +8529,24 @@
         </p:nvSpPr>
         <p:spPr>
           <a:xfrm>
-            <a:off x="2651760" y="3950208"/>
-            <a:ext cx="1828800" cy="329184"/>
-          </a:xfrm>
-          <a:prstGeom prst="rect">
-            <a:avLst/>
-          </a:prstGeom>
-          <a:noFill/>
-          <a:ln/>
-        </p:spPr>
-        <p:txBody>
-          <a:bodyPr wrap="square" lIns="1016" tIns="1016" rIns="1016" bIns="1016" rtlCol="0" anchor="t"/>
-          <a:lstStyle/>
-          <a:p>
-            <a:pPr algn="ctr" indent="0" marL="0">
-              <a:buNone/>
-            </a:pPr>
-            <a:r>
-              <a:rPr lang="en-US" sz="1200" dirty="0">
-                <a:solidFill>
-                  <a:srgbClr val="6B7076"/>
-                </a:solidFill>
-                <a:latin typeface="Calibri" pitchFamily="34" charset="0"/>
-                <a:ea typeface="Calibri" pitchFamily="34" charset="-122"/>
-                <a:cs typeface="Calibri" pitchFamily="34" charset="-120"/>
-              </a:rPr>
-              <a:t>détectives</a:t>
-            </a:r>
-            <a:endParaRPr lang="en-US" sz="1200" dirty="0"/>
-          </a:p>
-        </p:txBody>
-      </p:sp>
-      <p:sp>
-        <p:nvSpPr>
-          <p:cNvPr id="27" name="étape 7"/>
-          <p:cNvSpPr/>
-          <p:nvPr/>
-        </p:nvSpPr>
-        <p:spPr>
-          <a:xfrm>
-            <a:off x="4663440" y="2926080"/>
-            <a:ext cx="1828800" cy="1463040"/>
-          </a:xfrm>
-          <a:prstGeom prst="roundRect">
-            <a:avLst>
-              <a:gd name="adj" fmla="val 11250"/>
-            </a:avLst>
-          </a:prstGeom>
-          <a:solidFill>
-            <a:schemeClr val="accent6"/>
-          </a:solidFill>
-          <a:ln w="12700">
-            <a:solidFill>
-              <a:schemeClr val="accent6"/>
-            </a:solidFill>
-            <a:prstDash val="solid"/>
-          </a:ln>
-          <a:effectLst>
-            <a:outerShdw sx="100000" sy="100000" kx="0" ky="0" algn="bl" rotWithShape="0" blurRad="101600" dist="38100" dir="5400000">
-              <a:srgbClr val="BFCFCC">
-                <a:alpha val="100000"/>
-              </a:srgbClr>
-            </a:outerShdw>
-          </a:effectLst>
-        </p:spPr>
-      </p:sp>
-      <p:sp>
-        <p:nvSpPr>
-          <p:cNvPr id="28" name="Text 26"/>
-          <p:cNvSpPr txBox="1"/>
-          <p:nvPr/>
-        </p:nvSpPr>
-        <p:spPr>
-          <a:xfrm>
-            <a:off x="4663440" y="3035808"/>
-            <a:ext cx="1828800" cy="548640"/>
-          </a:xfrm>
-          <a:prstGeom prst="rect">
-            <a:avLst/>
-          </a:prstGeom>
-          <a:noFill/>
-          <a:ln/>
-        </p:spPr>
-        <p:txBody>
-          <a:bodyPr wrap="square" lIns="1016" tIns="1016" rIns="1016" bIns="1016" rtlCol="0" anchor="t"/>
-          <a:lstStyle/>
-          <a:p>
-            <a:pPr algn="ctr" indent="0" marL="0">
-              <a:buNone/>
-            </a:pPr>
-            <a:r>
-              <a:rPr lang="en-US" sz="2800" dirty="0">
-                <a:solidFill>
-                  <a:schemeClr val="tx1"/>
-                </a:solidFill>
-                <a:latin typeface="Calibri" pitchFamily="34" charset="0"/>
-                <a:ea typeface="Calibri" pitchFamily="34" charset="-122"/>
-                <a:cs typeface="Calibri" pitchFamily="34" charset="-120"/>
-              </a:rPr>
-              <a:t>🛡️</a:t>
-            </a:r>
-            <a:endParaRPr lang="en-US" sz="2800" dirty="0"/>
-          </a:p>
-        </p:txBody>
-      </p:sp>
-      <p:sp>
-        <p:nvSpPr>
-          <p:cNvPr id="29" name="Text 27"/>
-          <p:cNvSpPr txBox="1"/>
-          <p:nvPr/>
-        </p:nvSpPr>
-        <p:spPr>
-          <a:xfrm>
-            <a:off x="4663440" y="3566160"/>
-            <a:ext cx="1828800" cy="384048"/>
-          </a:xfrm>
-          <a:prstGeom prst="rect">
-            <a:avLst/>
-          </a:prstGeom>
-          <a:noFill/>
-          <a:ln/>
-        </p:spPr>
-        <p:txBody>
-          <a:bodyPr wrap="square" lIns="1016" tIns="1016" rIns="1016" bIns="1016" rtlCol="0" anchor="t"/>
-          <a:lstStyle/>
-          <a:p>
-            <a:pPr algn="ctr" indent="0" marL="0">
-              <a:buNone/>
-            </a:pPr>
-            <a:r>
-              <a:rPr lang="en-US" sz="1400" b="1" dirty="0">
+            <a:off x="6812280" y="2834640"/>
+            <a:ext cx="1645920" cy="1371600"/>
+          </a:xfrm>
+          <a:prstGeom prst="rect">
+            <a:avLst/>
+          </a:prstGeom>
+          <a:noFill/>
+          <a:ln/>
+        </p:spPr>
+        <p:txBody>
+          <a:bodyPr wrap="square" lIns="1016" tIns="1016" rIns="1016" bIns="1016" rtlCol="0" anchor="ctr"/>
+          <a:lstStyle/>
+          <a:p>
+            <a:pPr indent="0" marL="0">
+              <a:buNone/>
+            </a:pPr>
+            <a:r>
+              <a:rPr lang="en-US" sz="1500" b="1" dirty="0">
                 <a:solidFill>
                   <a:schemeClr val="tx1"/>
                 </a:solidFill>
@@ -8966,48 +8554,9 @@
                 <a:ea typeface="Century Gothic" pitchFamily="34" charset="-122"/>
                 <a:cs typeface="Century Gothic" pitchFamily="34" charset="-120"/>
               </a:rPr>
-              <a:t>Le bouclier</a:t>
-            </a:r>
-            <a:endParaRPr lang="en-US" sz="1400" dirty="0"/>
-          </a:p>
-        </p:txBody>
-      </p:sp>
-      <p:sp>
-        <p:nvSpPr>
-          <p:cNvPr id="30" name="Text 28"/>
-          <p:cNvSpPr txBox="1"/>
-          <p:nvPr/>
-        </p:nvSpPr>
-        <p:spPr>
-          <a:xfrm>
-            <a:off x="4663440" y="3950208"/>
-            <a:ext cx="1828800" cy="329184"/>
-          </a:xfrm>
-          <a:prstGeom prst="rect">
-            <a:avLst/>
-          </a:prstGeom>
-          <a:noFill/>
-          <a:ln/>
-        </p:spPr>
-        <p:txBody>
-          <a:bodyPr wrap="square" lIns="1016" tIns="1016" rIns="1016" bIns="1016" rtlCol="0" anchor="t"/>
-          <a:lstStyle/>
-          <a:p>
-            <a:pPr algn="ctr" indent="0" marL="0">
-              <a:buNone/>
-            </a:pPr>
-            <a:r>
-              <a:rPr lang="en-US" sz="1200" dirty="0">
-                <a:solidFill>
-                  <a:srgbClr val="6B7076"/>
-                </a:solidFill>
-                <a:latin typeface="Calibri" pitchFamily="34" charset="0"/>
-                <a:ea typeface="Calibri" pitchFamily="34" charset="-122"/>
-                <a:cs typeface="Calibri" pitchFamily="34" charset="-120"/>
-              </a:rPr>
-              <a:t>billet de sortie</a:t>
-            </a:r>
-            <a:endParaRPr lang="en-US" sz="1200" dirty="0"/>
+              <a:t>Le bouclier du renard</a:t>
+            </a:r>
+            <a:endParaRPr lang="en-US" sz="1500" dirty="0"/>
           </a:p>
         </p:txBody>
       </p:sp>
@@ -9054,430 +8603,6 @@
             <a:fld id="{F7021451-1387-4CA6-816F-3879F97B5CBC}" type="slidenum">
               <a:rPr b="0" lang="en-US"/>
               <a:t>2</a:t>
-            </a:fld>
-            <a:endParaRPr lang="en-US"/>
-          </a:p>
-        </p:txBody>
-      </p:sp>
-    </p:spTree>
-  </p:cSld>
-  <p:clrMapOvr>
-    <a:masterClrMapping/>
-  </p:clrMapOvr>
-</p:sld>
-</file>
-
-<file path=ppt/slides/slide20.xml><?xml version="1.0" encoding="utf-8"?>
-<p:sld xmlns:a="http://schemas.openxmlformats.org/drawingml/2006/main" xmlns:r="http://schemas.openxmlformats.org/officeDocument/2006/relationships" xmlns:p="http://schemas.openxmlformats.org/presentationml/2006/main">
-  <p:cSld name="Slide 20">
-    <p:spTree>
-      <p:nvGrpSpPr>
-        <p:cNvPr id="1" name=""/>
-        <p:cNvGrpSpPr/>
-        <p:nvPr/>
-      </p:nvGrpSpPr>
-      <p:grpSpPr>
-        <a:xfrm>
-          <a:off x="0" y="0"/>
-          <a:ext cx="0" cy="0"/>
-          <a:chOff x="0" y="0"/>
-          <a:chExt cx="0" cy="0"/>
-        </a:xfrm>
-      </p:grpSpPr>
-      <p:sp>
-        <p:nvSpPr>
-          <p:cNvPr id="2" name="Text 0"/>
-          <p:cNvSpPr/>
-          <p:nvPr>
-            <p:ph idx="100" type="title" hasCustomPrompt="1"/>
-          </p:nvPr>
-        </p:nvSpPr>
-        <p:spPr>
-          <a:xfrm>
-            <a:off x="640080" y="320040"/>
-            <a:ext cx="7315200" cy="731520"/>
-          </a:xfrm>
-          <a:prstGeom prst="rect">
-            <a:avLst/>
-          </a:prstGeom>
-          <a:noFill/>
-          <a:ln/>
-        </p:spPr>
-        <p:txBody>
-          <a:bodyPr wrap="square" lIns="0" tIns="0" rIns="0" bIns="0" rtlCol="0" anchor="ctr"/>
-          <a:lstStyle/>
-          <a:p>
-            <a:pPr indent="0" marL="0">
-              <a:buNone/>
-            </a:pPr>
-            <a:r>
-              <a:rPr lang="en-US" sz="3000" b="1" dirty="0">
-                <a:solidFill>
-                  <a:schemeClr val="tx1"/>
-                </a:solidFill>
-              </a:rPr>
-              <a:t>Mon billet de sortie 🚦</a:t>
-            </a:r>
-            <a:endParaRPr lang="en-US" sz="3000" dirty="0"/>
-          </a:p>
-        </p:txBody>
-      </p:sp>
-      <p:sp>
-        <p:nvSpPr>
-          <p:cNvPr id="3" name="Shape 1"/>
-          <p:cNvSpPr/>
-          <p:nvPr/>
-        </p:nvSpPr>
-        <p:spPr>
-          <a:xfrm>
-            <a:off x="731520" y="1188720"/>
-            <a:ext cx="731520" cy="731520"/>
-          </a:xfrm>
-          <a:prstGeom prst="ellipse">
-            <a:avLst/>
-          </a:prstGeom>
-          <a:solidFill>
-            <a:srgbClr val="D7EEDD"/>
-          </a:solidFill>
-          <a:ln w="12700">
-            <a:solidFill>
-              <a:srgbClr val="D7EEDD"/>
-            </a:solidFill>
-            <a:prstDash val="solid"/>
-          </a:ln>
-        </p:spPr>
-      </p:sp>
-      <p:sp>
-        <p:nvSpPr>
-          <p:cNvPr id="4" name="Text 2"/>
-          <p:cNvSpPr txBox="1"/>
-          <p:nvPr/>
-        </p:nvSpPr>
-        <p:spPr>
-          <a:xfrm>
-            <a:off x="1645920" y="1188720"/>
-            <a:ext cx="4846320" cy="731520"/>
-          </a:xfrm>
-          <a:prstGeom prst="rect">
-            <a:avLst/>
-          </a:prstGeom>
-          <a:noFill/>
-          <a:ln/>
-        </p:spPr>
-        <p:txBody>
-          <a:bodyPr wrap="square" lIns="1016" tIns="1016" rIns="1016" bIns="1016" rtlCol="0" anchor="ctr"/>
-          <a:lstStyle/>
-          <a:p>
-            <a:pPr indent="0" marL="0">
-              <a:buNone/>
-            </a:pPr>
-            <a:r>
-              <a:rPr lang="en-US" sz="1800" dirty="0">
-                <a:solidFill>
-                  <a:schemeClr val="tx1"/>
-                </a:solidFill>
-                <a:latin typeface="Calibri" pitchFamily="34" charset="0"/>
-                <a:ea typeface="Calibri" pitchFamily="34" charset="-122"/>
-                <a:cs typeface="Calibri" pitchFamily="34" charset="-120"/>
-              </a:rPr>
-              <a:t>Je reconnais les ruses de la pub seul·e.</a:t>
-            </a:r>
-            <a:endParaRPr lang="en-US" sz="1800" dirty="0"/>
-          </a:p>
-        </p:txBody>
-      </p:sp>
-      <p:sp>
-        <p:nvSpPr>
-          <p:cNvPr id="5" name="Shape 3"/>
-          <p:cNvSpPr/>
-          <p:nvPr/>
-        </p:nvSpPr>
-        <p:spPr>
-          <a:xfrm>
-            <a:off x="731520" y="2103120"/>
-            <a:ext cx="731520" cy="731520"/>
-          </a:xfrm>
-          <a:prstGeom prst="ellipse">
-            <a:avLst/>
-          </a:prstGeom>
-          <a:solidFill>
-            <a:srgbClr val="FBEFC9"/>
-          </a:solidFill>
-          <a:ln w="12700">
-            <a:solidFill>
-              <a:srgbClr val="FBEFC9"/>
-            </a:solidFill>
-            <a:prstDash val="solid"/>
-          </a:ln>
-        </p:spPr>
-      </p:sp>
-      <p:sp>
-        <p:nvSpPr>
-          <p:cNvPr id="6" name="Text 4"/>
-          <p:cNvSpPr txBox="1"/>
-          <p:nvPr/>
-        </p:nvSpPr>
-        <p:spPr>
-          <a:xfrm>
-            <a:off x="1645920" y="2103120"/>
-            <a:ext cx="4846320" cy="731520"/>
-          </a:xfrm>
-          <a:prstGeom prst="rect">
-            <a:avLst/>
-          </a:prstGeom>
-          <a:noFill/>
-          <a:ln/>
-        </p:spPr>
-        <p:txBody>
-          <a:bodyPr wrap="square" lIns="1016" tIns="1016" rIns="1016" bIns="1016" rtlCol="0" anchor="ctr"/>
-          <a:lstStyle/>
-          <a:p>
-            <a:pPr indent="0" marL="0">
-              <a:buNone/>
-            </a:pPr>
-            <a:r>
-              <a:rPr lang="en-US" sz="1800" dirty="0">
-                <a:solidFill>
-                  <a:schemeClr val="tx1"/>
-                </a:solidFill>
-                <a:latin typeface="Calibri" pitchFamily="34" charset="0"/>
-                <a:ea typeface="Calibri" pitchFamily="34" charset="-122"/>
-                <a:cs typeface="Calibri" pitchFamily="34" charset="-120"/>
-              </a:rPr>
-              <a:t>Je les reconnais avec un peu d'aide.</a:t>
-            </a:r>
-            <a:endParaRPr lang="en-US" sz="1800" dirty="0"/>
-          </a:p>
-        </p:txBody>
-      </p:sp>
-      <p:sp>
-        <p:nvSpPr>
-          <p:cNvPr id="7" name="Shape 5"/>
-          <p:cNvSpPr/>
-          <p:nvPr/>
-        </p:nvSpPr>
-        <p:spPr>
-          <a:xfrm>
-            <a:off x="731520" y="3017520"/>
-            <a:ext cx="731520" cy="731520"/>
-          </a:xfrm>
-          <a:prstGeom prst="ellipse">
-            <a:avLst/>
-          </a:prstGeom>
-          <a:solidFill>
-            <a:srgbClr val="F3D0D0"/>
-          </a:solidFill>
-          <a:ln w="12700">
-            <a:solidFill>
-              <a:srgbClr val="F3D0D0"/>
-            </a:solidFill>
-            <a:prstDash val="solid"/>
-          </a:ln>
-        </p:spPr>
-      </p:sp>
-      <p:sp>
-        <p:nvSpPr>
-          <p:cNvPr id="8" name="Text 6"/>
-          <p:cNvSpPr txBox="1"/>
-          <p:nvPr/>
-        </p:nvSpPr>
-        <p:spPr>
-          <a:xfrm>
-            <a:off x="1645920" y="3017520"/>
-            <a:ext cx="4846320" cy="731520"/>
-          </a:xfrm>
-          <a:prstGeom prst="rect">
-            <a:avLst/>
-          </a:prstGeom>
-          <a:noFill/>
-          <a:ln/>
-        </p:spPr>
-        <p:txBody>
-          <a:bodyPr wrap="square" lIns="1016" tIns="1016" rIns="1016" bIns="1016" rtlCol="0" anchor="ctr"/>
-          <a:lstStyle/>
-          <a:p>
-            <a:pPr indent="0" marL="0">
-              <a:buNone/>
-            </a:pPr>
-            <a:r>
-              <a:rPr lang="en-US" sz="1800" dirty="0">
-                <a:solidFill>
-                  <a:schemeClr val="tx1"/>
-                </a:solidFill>
-                <a:latin typeface="Calibri" pitchFamily="34" charset="0"/>
-                <a:ea typeface="Calibri" pitchFamily="34" charset="-122"/>
-                <a:cs typeface="Calibri" pitchFamily="34" charset="-120"/>
-              </a:rPr>
-              <a:t>Pas encore : j'ai besoin d'aide.</a:t>
-            </a:r>
-            <a:endParaRPr lang="en-US" sz="1800" dirty="0"/>
-          </a:p>
-        </p:txBody>
-      </p:sp>
-      <p:sp>
-        <p:nvSpPr>
-          <p:cNvPr id="9" name="bulle"/>
-          <p:cNvSpPr/>
-          <p:nvPr/>
-        </p:nvSpPr>
-        <p:spPr>
-          <a:xfrm>
-            <a:off x="640080" y="3977640"/>
-            <a:ext cx="5852160" cy="685800"/>
-          </a:xfrm>
-          <a:prstGeom prst="roundRect">
-            <a:avLst>
-              <a:gd name="adj" fmla="val 24000"/>
-            </a:avLst>
-          </a:prstGeom>
-          <a:solidFill>
-            <a:srgbClr val="FFFFFF"/>
-          </a:solidFill>
-          <a:ln w="12700">
-            <a:solidFill>
-              <a:srgbClr val="FFFFFF"/>
-            </a:solidFill>
-            <a:prstDash val="solid"/>
-          </a:ln>
-          <a:effectLst>
-            <a:outerShdw sx="100000" sy="100000" kx="0" ky="0" algn="bl" rotWithShape="0" blurRad="101600" dist="38100" dir="5400000">
-              <a:srgbClr val="BFCFCC">
-                <a:alpha val="100000"/>
-              </a:srgbClr>
-            </a:outerShdw>
-          </a:effectLst>
-        </p:spPr>
-      </p:sp>
-      <p:sp>
-        <p:nvSpPr>
-          <p:cNvPr id="10" name="Shape 8"/>
-          <p:cNvSpPr/>
-          <p:nvPr/>
-        </p:nvSpPr>
-        <p:spPr>
-          <a:xfrm>
-            <a:off x="640080" y="3977640"/>
-            <a:ext cx="5852160" cy="685800"/>
-          </a:xfrm>
-          <a:prstGeom prst="roundRect">
-            <a:avLst>
-              <a:gd name="adj" fmla="val 24000"/>
-            </a:avLst>
-          </a:prstGeom>
-          <a:ln w="25400">
-            <a:solidFill>
-              <a:schemeClr val="accent1"/>
-            </a:solidFill>
-            <a:prstDash val="solid"/>
-          </a:ln>
-        </p:spPr>
-      </p:sp>
-      <p:sp>
-        <p:nvSpPr>
-          <p:cNvPr id="11" name="Text 9"/>
-          <p:cNvSpPr txBox="1"/>
-          <p:nvPr/>
-        </p:nvSpPr>
-        <p:spPr>
-          <a:xfrm>
-            <a:off x="731520" y="4023360"/>
-            <a:ext cx="5669280" cy="594360"/>
-          </a:xfrm>
-          <a:prstGeom prst="rect">
-            <a:avLst/>
-          </a:prstGeom>
-          <a:noFill/>
-          <a:ln/>
-        </p:spPr>
-        <p:txBody>
-          <a:bodyPr wrap="square" lIns="1016" tIns="1016" rIns="1016" bIns="1016" rtlCol="0" anchor="ctr"/>
-          <a:lstStyle/>
-          <a:p>
-            <a:pPr indent="0" marL="0">
-              <a:buNone/>
-            </a:pPr>
-            <a:r>
-              <a:rPr lang="en-US" sz="1500" i="1" dirty="0">
-                <a:solidFill>
-                  <a:schemeClr val="tx1"/>
-                </a:solidFill>
-                <a:latin typeface="Calibri" pitchFamily="34" charset="0"/>
-                <a:ea typeface="Calibri" pitchFamily="34" charset="-122"/>
-                <a:cs typeface="Calibri" pitchFamily="34" charset="-120"/>
-              </a:rPr>
-              <a:t>Cette semaine, je montre une pub à quelqu'un et je nomme ses ruses.</a:t>
-            </a:r>
-            <a:endParaRPr lang="en-US" sz="1500" dirty="0"/>
-          </a:p>
-        </p:txBody>
-      </p:sp>
-      <p:pic>
-        <p:nvPicPr>
-          <p:cNvPr id="12" name="renard" descr="Renard">    </p:cNvPr>
-          <p:cNvPicPr>
-            <a:picLocks noChangeAspect="1"/>
-          </p:cNvPicPr>
-          <p:nvPr/>
-        </p:nvPicPr>
-        <p:blipFill>
-          <a:blip r:embed="rId1"/>
-          <a:stretch>
-            <a:fillRect/>
-          </a:stretch>
-        </p:blipFill>
-        <p:spPr>
-          <a:xfrm>
-            <a:off x="6675120" y="2194560"/>
-            <a:ext cx="1920240" cy="1833829"/>
-          </a:xfrm>
-          <a:prstGeom prst="rect">
-            <a:avLst/>
-          </a:prstGeom>
-        </p:spPr>
-      </p:pic>
-      <p:sp>
-        <p:nvSpPr>
-          <p:cNvPr id="25" name="Slide Number Placeholder 0"/>
-          <p:cNvSpPr>
-            <a:spLocks noGrp="1"/>
-          </p:cNvSpPr>
-          <p:nvPr>
-            <p:ph type="sldNum" sz="quarter" idx="4294967295"/>
-          </p:nvPr>
-        </p:nvSpPr>
-        <p:spPr>
-          <a:xfrm>
-            <a:off x="8458200" y="4754880"/>
-            <a:ext cx="457200" cy="274320"/>
-          </a:xfrm>
-          <a:prstGeom prst="rect">
-            <a:avLst/>
-          </a:prstGeom>
-          <a:extLst>
-            <a:ext uri="{C572A759-6A51-4108-AA02-DFA0A04FC94B}">
-              <ma14:wrappingTextBoxFlag xmlns:ma14="http://schemas.microsoft.com/office/mac/drawingml/2011/main" val="0"/>
-            </a:ext>
-          </a:extLst>
-        </p:spPr>
-        <p:txBody>
-          <a:bodyPr/>
-          <a:lstStyle>
-            <a:lvl1pPr>
-              <a:defRPr sz="1000">
-                <a:solidFill>
-                  <a:srgbClr val="8A8F95"/>
-                </a:solidFill>
-                <a:latin typeface="Calibri"/>
-                <a:ea typeface="Calibri"/>
-                <a:cs typeface="Calibri"/>
-              </a:defRPr>
-            </a:lvl1pPr>
-          </a:lstStyle>
-          <a:p>
-            <a:pPr algn="l"/>
-            <a:fld id="{F7021451-1387-4CA6-816F-3879F97B5CBC}" type="slidenum">
-              <a:rPr b="0" lang="en-US"/>
-              <a:t>20</a:t>
             </a:fld>
             <a:endParaRPr lang="en-US"/>
           </a:p>
@@ -9582,14 +8707,78 @@
       </p:sp>
       <p:sp>
         <p:nvSpPr>
-          <p:cNvPr id="4" name="Text 2"/>
+          <p:cNvPr id="4" name="Shape 2"/>
+          <p:cNvSpPr/>
+          <p:nvPr/>
+        </p:nvSpPr>
+        <p:spPr>
+          <a:xfrm>
+            <a:off x="822960" y="1435608"/>
+            <a:ext cx="512064" cy="512064"/>
+          </a:xfrm>
+          <a:prstGeom prst="ellipse">
+            <a:avLst/>
+          </a:prstGeom>
+          <a:solidFill>
+            <a:schemeClr val="accent1"/>
+          </a:solidFill>
+          <a:ln w="12700">
+            <a:solidFill>
+              <a:schemeClr val="accent1"/>
+            </a:solidFill>
+            <a:prstDash val="solid"/>
+          </a:ln>
+        </p:spPr>
+      </p:sp>
+      <p:sp>
+        <p:nvSpPr>
+          <p:cNvPr id="5" name="Text 3"/>
           <p:cNvSpPr txBox="1"/>
           <p:nvPr/>
         </p:nvSpPr>
         <p:spPr>
           <a:xfrm>
-            <a:off x="777240" y="1234440"/>
-            <a:ext cx="731520" cy="914400"/>
+            <a:off x="822960" y="1435608"/>
+            <a:ext cx="512064" cy="512064"/>
+          </a:xfrm>
+          <a:prstGeom prst="rect">
+            <a:avLst/>
+          </a:prstGeom>
+          <a:noFill/>
+          <a:ln/>
+        </p:spPr>
+        <p:txBody>
+          <a:bodyPr wrap="square" lIns="0" tIns="0" rIns="0" bIns="0" rtlCol="0" anchor="ctr"/>
+          <a:lstStyle/>
+          <a:p>
+            <a:pPr algn="ctr" indent="0" marL="0">
+              <a:buNone/>
+            </a:pPr>
+            <a:r>
+              <a:rPr lang="en-US" sz="1904" b="1" dirty="0">
+                <a:solidFill>
+                  <a:srgbClr val="FFFFFF"/>
+                </a:solidFill>
+                <a:latin typeface="Century Gothic" pitchFamily="34" charset="0"/>
+                <a:ea typeface="Century Gothic" pitchFamily="34" charset="-122"/>
+                <a:cs typeface="Century Gothic" pitchFamily="34" charset="-120"/>
+              </a:rPr>
+              <a:t>1</a:t>
+            </a:r>
+            <a:endParaRPr lang="en-US" sz="1904" dirty="0"/>
+          </a:p>
+        </p:txBody>
+      </p:sp>
+      <p:sp>
+        <p:nvSpPr>
+          <p:cNvPr id="6" name="Text 4"/>
+          <p:cNvSpPr txBox="1"/>
+          <p:nvPr/>
+        </p:nvSpPr>
+        <p:spPr>
+          <a:xfrm>
+            <a:off x="1554480" y="1280160"/>
+            <a:ext cx="4754880" cy="822960"/>
           </a:xfrm>
           <a:prstGeom prst="rect">
             <a:avLst/>
@@ -9605,7 +8794,24 @@
               <a:buNone/>
             </a:pPr>
             <a:r>
-              <a:rPr lang="en-US" sz="3000" dirty="0">
+              <a:rPr lang="en-US" sz="1700" b="1" dirty="0">
+                <a:solidFill>
+                  <a:schemeClr val="tx1"/>
+                </a:solidFill>
+                <a:latin typeface="Century Gothic" pitchFamily="34" charset="0"/>
+                <a:ea typeface="Century Gothic" pitchFamily="34" charset="-122"/>
+                <a:cs typeface="Century Gothic" pitchFamily="34" charset="-120"/>
+              </a:rPr>
+              <a:t>RECONNAÎTRE les ruses de la pub</a:t>
+            </a:r>
+            <a:endParaRPr lang="en-US" sz="1700" dirty="0"/>
+          </a:p>
+          <a:p>
+            <a:pPr indent="0" marL="0">
+              <a:buNone/>
+            </a:pPr>
+            <a:r>
+              <a:rPr lang="en-US" sz="1400" dirty="0">
                 <a:solidFill>
                   <a:schemeClr val="tx1"/>
                 </a:solidFill>
@@ -9613,71 +8819,15 @@
                 <a:ea typeface="Calibri" pitchFamily="34" charset="-122"/>
                 <a:cs typeface="Calibri" pitchFamily="34" charset="-120"/>
               </a:rPr>
-              <a:t>🔎</a:t>
-            </a:r>
-            <a:endParaRPr lang="en-US" sz="3000" dirty="0"/>
-          </a:p>
-        </p:txBody>
-      </p:sp>
-      <p:sp>
-        <p:nvSpPr>
-          <p:cNvPr id="5" name="Text 3"/>
-          <p:cNvSpPr txBox="1"/>
-          <p:nvPr/>
-        </p:nvSpPr>
-        <p:spPr>
-          <a:xfrm>
-            <a:off x="1554480" y="1280160"/>
-            <a:ext cx="4754880" cy="822960"/>
-          </a:xfrm>
-          <a:prstGeom prst="rect">
-            <a:avLst/>
-          </a:prstGeom>
-          <a:noFill/>
-          <a:ln/>
-        </p:spPr>
-        <p:txBody>
-          <a:bodyPr wrap="square" lIns="1016" tIns="1016" rIns="1016" bIns="1016" rtlCol="0" anchor="ctr"/>
-          <a:lstStyle/>
-          <a:p>
-            <a:pPr indent="0" marL="0">
-              <a:buNone/>
-            </a:pPr>
-            <a:r>
-              <a:rPr lang="en-US" sz="1700" b="1" dirty="0">
-                <a:solidFill>
-                  <a:schemeClr val="tx1"/>
-                </a:solidFill>
-                <a:latin typeface="Century Gothic" pitchFamily="34" charset="0"/>
-                <a:ea typeface="Century Gothic" pitchFamily="34" charset="-122"/>
-                <a:cs typeface="Century Gothic" pitchFamily="34" charset="-120"/>
-              </a:rPr>
-              <a:t>RECONNAÎTRE les ruses de la pub</a:t>
+              <a:t>pour garder le contrôle de mes choix.</a:t>
             </a:r>
             <a:endParaRPr lang="en-US" sz="1700" dirty="0"/>
           </a:p>
-          <a:p>
-            <a:pPr indent="0" marL="0">
-              <a:buNone/>
-            </a:pPr>
-            <a:r>
-              <a:rPr lang="en-US" sz="1400" dirty="0">
-                <a:solidFill>
-                  <a:schemeClr val="tx1"/>
-                </a:solidFill>
-                <a:latin typeface="Calibri" pitchFamily="34" charset="0"/>
-                <a:ea typeface="Calibri" pitchFamily="34" charset="-122"/>
-                <a:cs typeface="Calibri" pitchFamily="34" charset="-120"/>
-              </a:rPr>
-              <a:t>pour garder le contrôle de mes choix.</a:t>
-            </a:r>
-            <a:endParaRPr lang="en-US" sz="1700" dirty="0"/>
-          </a:p>
-        </p:txBody>
-      </p:sp>
-      <p:sp>
-        <p:nvSpPr>
-          <p:cNvPr id="6" name="carte"/>
+        </p:txBody>
+      </p:sp>
+      <p:sp>
+        <p:nvSpPr>
+          <p:cNvPr id="7" name="carte"/>
           <p:cNvSpPr/>
           <p:nvPr/>
         </p:nvSpPr>
@@ -9711,14 +8861,78 @@
       </p:sp>
       <p:sp>
         <p:nvSpPr>
-          <p:cNvPr id="7" name="Text 5"/>
+          <p:cNvPr id="8" name="Shape 6"/>
+          <p:cNvSpPr/>
+          <p:nvPr/>
+        </p:nvSpPr>
+        <p:spPr>
+          <a:xfrm>
+            <a:off x="822960" y="2532888"/>
+            <a:ext cx="512064" cy="512064"/>
+          </a:xfrm>
+          <a:prstGeom prst="ellipse">
+            <a:avLst/>
+          </a:prstGeom>
+          <a:solidFill>
+            <a:schemeClr val="accent1"/>
+          </a:solidFill>
+          <a:ln w="12700">
+            <a:solidFill>
+              <a:schemeClr val="accent1"/>
+            </a:solidFill>
+            <a:prstDash val="solid"/>
+          </a:ln>
+        </p:spPr>
+      </p:sp>
+      <p:sp>
+        <p:nvSpPr>
+          <p:cNvPr id="9" name="Text 7"/>
           <p:cNvSpPr txBox="1"/>
           <p:nvPr/>
         </p:nvSpPr>
         <p:spPr>
           <a:xfrm>
-            <a:off x="777240" y="2331720"/>
-            <a:ext cx="731520" cy="914400"/>
+            <a:off x="822960" y="2532888"/>
+            <a:ext cx="512064" cy="512064"/>
+          </a:xfrm>
+          <a:prstGeom prst="rect">
+            <a:avLst/>
+          </a:prstGeom>
+          <a:noFill/>
+          <a:ln/>
+        </p:spPr>
+        <p:txBody>
+          <a:bodyPr wrap="square" lIns="0" tIns="0" rIns="0" bIns="0" rtlCol="0" anchor="ctr"/>
+          <a:lstStyle/>
+          <a:p>
+            <a:pPr algn="ctr" indent="0" marL="0">
+              <a:buNone/>
+            </a:pPr>
+            <a:r>
+              <a:rPr lang="en-US" sz="1904" b="1" dirty="0">
+                <a:solidFill>
+                  <a:srgbClr val="FFFFFF"/>
+                </a:solidFill>
+                <a:latin typeface="Century Gothic" pitchFamily="34" charset="0"/>
+                <a:ea typeface="Century Gothic" pitchFamily="34" charset="-122"/>
+                <a:cs typeface="Century Gothic" pitchFamily="34" charset="-120"/>
+              </a:rPr>
+              <a:t>2</a:t>
+            </a:r>
+            <a:endParaRPr lang="en-US" sz="1904" dirty="0"/>
+          </a:p>
+        </p:txBody>
+      </p:sp>
+      <p:sp>
+        <p:nvSpPr>
+          <p:cNvPr id="10" name="Text 8"/>
+          <p:cNvSpPr txBox="1"/>
+          <p:nvPr/>
+        </p:nvSpPr>
+        <p:spPr>
+          <a:xfrm>
+            <a:off x="1554480" y="2377440"/>
+            <a:ext cx="4754880" cy="822960"/>
           </a:xfrm>
           <a:prstGeom prst="rect">
             <a:avLst/>
@@ -9734,7 +8948,24 @@
               <a:buNone/>
             </a:pPr>
             <a:r>
-              <a:rPr lang="en-US" sz="3000" dirty="0">
+              <a:rPr lang="en-US" sz="1700" b="1" dirty="0">
+                <a:solidFill>
+                  <a:schemeClr val="tx1"/>
+                </a:solidFill>
+                <a:latin typeface="Century Gothic" pitchFamily="34" charset="0"/>
+                <a:ea typeface="Century Gothic" pitchFamily="34" charset="-122"/>
+                <a:cs typeface="Century Gothic" pitchFamily="34" charset="-120"/>
+              </a:rPr>
+              <a:t>CALCULER le vrai prix</a:t>
+            </a:r>
+            <a:endParaRPr lang="en-US" sz="1700" dirty="0"/>
+          </a:p>
+          <a:p>
+            <a:pPr indent="0" marL="0">
+              <a:buNone/>
+            </a:pPr>
+            <a:r>
+              <a:rPr lang="en-US" sz="1400" dirty="0">
                 <a:solidFill>
                   <a:schemeClr val="tx1"/>
                 </a:solidFill>
@@ -9742,71 +8973,15 @@
                 <a:ea typeface="Calibri" pitchFamily="34" charset="-122"/>
                 <a:cs typeface="Calibri" pitchFamily="34" charset="-120"/>
               </a:rPr>
-              <a:t>🧮</a:t>
-            </a:r>
-            <a:endParaRPr lang="en-US" sz="3000" dirty="0"/>
-          </a:p>
-        </p:txBody>
-      </p:sp>
-      <p:sp>
-        <p:nvSpPr>
-          <p:cNvPr id="8" name="Text 6"/>
-          <p:cNvSpPr txBox="1"/>
-          <p:nvPr/>
-        </p:nvSpPr>
-        <p:spPr>
-          <a:xfrm>
-            <a:off x="1554480" y="2377440"/>
-            <a:ext cx="4754880" cy="822960"/>
-          </a:xfrm>
-          <a:prstGeom prst="rect">
-            <a:avLst/>
-          </a:prstGeom>
-          <a:noFill/>
-          <a:ln/>
-        </p:spPr>
-        <p:txBody>
-          <a:bodyPr wrap="square" lIns="1016" tIns="1016" rIns="1016" bIns="1016" rtlCol="0" anchor="ctr"/>
-          <a:lstStyle/>
-          <a:p>
-            <a:pPr indent="0" marL="0">
-              <a:buNone/>
-            </a:pPr>
-            <a:r>
-              <a:rPr lang="en-US" sz="1700" b="1" dirty="0">
-                <a:solidFill>
-                  <a:schemeClr val="tx1"/>
-                </a:solidFill>
-                <a:latin typeface="Century Gothic" pitchFamily="34" charset="0"/>
-                <a:ea typeface="Century Gothic" pitchFamily="34" charset="-122"/>
-                <a:cs typeface="Century Gothic" pitchFamily="34" charset="-120"/>
-              </a:rPr>
-              <a:t>CALCULER le vrai prix</a:t>
+              <a:t>avec le truc du renard : j'arrondis, je regroupe, je compare.</a:t>
             </a:r>
             <a:endParaRPr lang="en-US" sz="1700" dirty="0"/>
           </a:p>
-          <a:p>
-            <a:pPr indent="0" marL="0">
-              <a:buNone/>
-            </a:pPr>
-            <a:r>
-              <a:rPr lang="en-US" sz="1400" dirty="0">
-                <a:solidFill>
-                  <a:schemeClr val="tx1"/>
-                </a:solidFill>
-                <a:latin typeface="Calibri" pitchFamily="34" charset="0"/>
-                <a:ea typeface="Calibri" pitchFamily="34" charset="-122"/>
-                <a:cs typeface="Calibri" pitchFamily="34" charset="-120"/>
-              </a:rPr>
-              <a:t>avec le truc du renard : j'arrondis, je regroupe, je compare.</a:t>
-            </a:r>
-            <a:endParaRPr lang="en-US" sz="1700" dirty="0"/>
-          </a:p>
-        </p:txBody>
-      </p:sp>
-      <p:sp>
-        <p:nvSpPr>
-          <p:cNvPr id="9" name="carte"/>
+        </p:txBody>
+      </p:sp>
+      <p:sp>
+        <p:nvSpPr>
+          <p:cNvPr id="11" name="carte"/>
           <p:cNvSpPr/>
           <p:nvPr/>
         </p:nvSpPr>
@@ -9840,14 +9015,78 @@
       </p:sp>
       <p:sp>
         <p:nvSpPr>
-          <p:cNvPr id="10" name="Text 8"/>
+          <p:cNvPr id="12" name="Shape 10"/>
+          <p:cNvSpPr/>
+          <p:nvPr/>
+        </p:nvSpPr>
+        <p:spPr>
+          <a:xfrm>
+            <a:off x="822960" y="3630168"/>
+            <a:ext cx="512064" cy="512064"/>
+          </a:xfrm>
+          <a:prstGeom prst="ellipse">
+            <a:avLst/>
+          </a:prstGeom>
+          <a:solidFill>
+            <a:schemeClr val="accent1"/>
+          </a:solidFill>
+          <a:ln w="12700">
+            <a:solidFill>
+              <a:schemeClr val="accent1"/>
+            </a:solidFill>
+            <a:prstDash val="solid"/>
+          </a:ln>
+        </p:spPr>
+      </p:sp>
+      <p:sp>
+        <p:nvSpPr>
+          <p:cNvPr id="13" name="Text 11"/>
           <p:cNvSpPr txBox="1"/>
           <p:nvPr/>
         </p:nvSpPr>
         <p:spPr>
           <a:xfrm>
-            <a:off x="777240" y="3429000"/>
-            <a:ext cx="731520" cy="914400"/>
+            <a:off x="822960" y="3630168"/>
+            <a:ext cx="512064" cy="512064"/>
+          </a:xfrm>
+          <a:prstGeom prst="rect">
+            <a:avLst/>
+          </a:prstGeom>
+          <a:noFill/>
+          <a:ln/>
+        </p:spPr>
+        <p:txBody>
+          <a:bodyPr wrap="square" lIns="0" tIns="0" rIns="0" bIns="0" rtlCol="0" anchor="ctr"/>
+          <a:lstStyle/>
+          <a:p>
+            <a:pPr algn="ctr" indent="0" marL="0">
+              <a:buNone/>
+            </a:pPr>
+            <a:r>
+              <a:rPr lang="en-US" sz="1904" b="1" dirty="0">
+                <a:solidFill>
+                  <a:srgbClr val="FFFFFF"/>
+                </a:solidFill>
+                <a:latin typeface="Century Gothic" pitchFamily="34" charset="0"/>
+                <a:ea typeface="Century Gothic" pitchFamily="34" charset="-122"/>
+                <a:cs typeface="Century Gothic" pitchFamily="34" charset="-120"/>
+              </a:rPr>
+              <a:t>3</a:t>
+            </a:r>
+            <a:endParaRPr lang="en-US" sz="1904" dirty="0"/>
+          </a:p>
+        </p:txBody>
+      </p:sp>
+      <p:sp>
+        <p:nvSpPr>
+          <p:cNvPr id="14" name="Text 12"/>
+          <p:cNvSpPr txBox="1"/>
+          <p:nvPr/>
+        </p:nvSpPr>
+        <p:spPr>
+          <a:xfrm>
+            <a:off x="1554480" y="3474720"/>
+            <a:ext cx="4754880" cy="822960"/>
           </a:xfrm>
           <a:prstGeom prst="rect">
             <a:avLst/>
@@ -9863,7 +9102,24 @@
               <a:buNone/>
             </a:pPr>
             <a:r>
-              <a:rPr lang="en-US" sz="3000" dirty="0">
+              <a:rPr lang="en-US" sz="1700" b="1" dirty="0">
+                <a:solidFill>
+                  <a:schemeClr val="tx1"/>
+                </a:solidFill>
+                <a:latin typeface="Century Gothic" pitchFamily="34" charset="0"/>
+                <a:ea typeface="Century Gothic" pitchFamily="34" charset="-122"/>
+                <a:cs typeface="Century Gothic" pitchFamily="34" charset="-120"/>
+              </a:rPr>
+              <a:t>ME PROTÉGER</a:t>
+            </a:r>
+            <a:endParaRPr lang="en-US" sz="1700" dirty="0"/>
+          </a:p>
+          <a:p>
+            <a:pPr indent="0" marL="0">
+              <a:buNone/>
+            </a:pPr>
+            <a:r>
+              <a:rPr lang="en-US" sz="1400" dirty="0">
                 <a:solidFill>
                   <a:schemeClr val="tx1"/>
                 </a:solidFill>
@@ -9871,62 +9127,6 @@
                 <a:ea typeface="Calibri" pitchFamily="34" charset="-122"/>
                 <a:cs typeface="Calibri" pitchFamily="34" charset="-120"/>
               </a:rPr>
-              <a:t>🛡️</a:t>
-            </a:r>
-            <a:endParaRPr lang="en-US" sz="3000" dirty="0"/>
-          </a:p>
-        </p:txBody>
-      </p:sp>
-      <p:sp>
-        <p:nvSpPr>
-          <p:cNvPr id="11" name="Text 9"/>
-          <p:cNvSpPr txBox="1"/>
-          <p:nvPr/>
-        </p:nvSpPr>
-        <p:spPr>
-          <a:xfrm>
-            <a:off x="1554480" y="3474720"/>
-            <a:ext cx="4754880" cy="822960"/>
-          </a:xfrm>
-          <a:prstGeom prst="rect">
-            <a:avLst/>
-          </a:prstGeom>
-          <a:noFill/>
-          <a:ln/>
-        </p:spPr>
-        <p:txBody>
-          <a:bodyPr wrap="square" lIns="1016" tIns="1016" rIns="1016" bIns="1016" rtlCol="0" anchor="ctr"/>
-          <a:lstStyle/>
-          <a:p>
-            <a:pPr indent="0" marL="0">
-              <a:buNone/>
-            </a:pPr>
-            <a:r>
-              <a:rPr lang="en-US" sz="1700" b="1" dirty="0">
-                <a:solidFill>
-                  <a:schemeClr val="tx1"/>
-                </a:solidFill>
-                <a:latin typeface="Century Gothic" pitchFamily="34" charset="0"/>
-                <a:ea typeface="Century Gothic" pitchFamily="34" charset="-122"/>
-                <a:cs typeface="Century Gothic" pitchFamily="34" charset="-120"/>
-              </a:rPr>
-              <a:t>ME PROTÉGER</a:t>
-            </a:r>
-            <a:endParaRPr lang="en-US" sz="1700" dirty="0"/>
-          </a:p>
-          <a:p>
-            <a:pPr indent="0" marL="0">
-              <a:buNone/>
-            </a:pPr>
-            <a:r>
-              <a:rPr lang="en-US" sz="1400" dirty="0">
-                <a:solidFill>
-                  <a:schemeClr val="tx1"/>
-                </a:solidFill>
-                <a:latin typeface="Calibri" pitchFamily="34" charset="0"/>
-                <a:ea typeface="Calibri" pitchFamily="34" charset="-122"/>
-                <a:cs typeface="Calibri" pitchFamily="34" charset="-120"/>
-              </a:rPr>
               <a:t>Dire non, attendre, ne jamais donner ma carte.</a:t>
             </a:r>
             <a:endParaRPr lang="en-US" sz="1700" dirty="0"/>
@@ -9935,7 +9135,7 @@
       </p:sp>
       <p:pic>
         <p:nvPicPr>
-          <p:cNvPr id="12" name="renard" descr="Renard">    </p:cNvPr>
+          <p:cNvPr id="15" name="renard" descr="Renard">    </p:cNvPr>
           <p:cNvPicPr>
             <a:picLocks noChangeAspect="1"/>
           </p:cNvPicPr>
@@ -10062,7 +9262,7 @@
                   <a:schemeClr val="tx1"/>
                 </a:solidFill>
               </a:rPr>
-              <a:t>Le musée des pubs 🖼️</a:t>
+              <a:t>Le musée des pubs</a:t>
             </a:r>
             <a:endParaRPr lang="en-US" sz="3000" dirty="0"/>
           </a:p>
@@ -11052,7 +10252,7 @@
                   <a:schemeClr val="tx1"/>
                 </a:solidFill>
               </a:rPr>
-              <a:t>Les règles des détectives</a:t>
+              <a:t>La classe collabo-réflexive</a:t>
             </a:r>
             <a:endParaRPr lang="en-US" sz="3000" dirty="0"/>
           </a:p>
@@ -11094,14 +10294,78 @@
       </p:sp>
       <p:sp>
         <p:nvSpPr>
-          <p:cNvPr id="4" name="Text 2"/>
+          <p:cNvPr id="4" name="Shape 2"/>
+          <p:cNvSpPr/>
+          <p:nvPr/>
+        </p:nvSpPr>
+        <p:spPr>
+          <a:xfrm>
+            <a:off x="1673352" y="1298448"/>
+            <a:ext cx="457200" cy="457200"/>
+          </a:xfrm>
+          <a:prstGeom prst="ellipse">
+            <a:avLst/>
+          </a:prstGeom>
+          <a:solidFill>
+            <a:schemeClr val="accent1"/>
+          </a:solidFill>
+          <a:ln w="12700">
+            <a:solidFill>
+              <a:schemeClr val="accent1"/>
+            </a:solidFill>
+            <a:prstDash val="solid"/>
+          </a:ln>
+        </p:spPr>
+      </p:sp>
+      <p:sp>
+        <p:nvSpPr>
+          <p:cNvPr id="5" name="Text 3"/>
           <p:cNvSpPr txBox="1"/>
           <p:nvPr/>
         </p:nvSpPr>
         <p:spPr>
           <a:xfrm>
-            <a:off x="640080" y="1261872"/>
-            <a:ext cx="2514600" cy="548640"/>
+            <a:off x="1673352" y="1298448"/>
+            <a:ext cx="457200" cy="457200"/>
+          </a:xfrm>
+          <a:prstGeom prst="rect">
+            <a:avLst/>
+          </a:prstGeom>
+          <a:noFill/>
+          <a:ln/>
+        </p:spPr>
+        <p:txBody>
+          <a:bodyPr wrap="square" lIns="0" tIns="0" rIns="0" bIns="0" rtlCol="0" anchor="ctr"/>
+          <a:lstStyle/>
+          <a:p>
+            <a:pPr algn="ctr" indent="0" marL="0">
+              <a:buNone/>
+            </a:pPr>
+            <a:r>
+              <a:rPr lang="en-US" sz="1700" b="1" dirty="0">
+                <a:solidFill>
+                  <a:srgbClr val="FFFFFF"/>
+                </a:solidFill>
+                <a:latin typeface="Century Gothic" pitchFamily="34" charset="0"/>
+                <a:ea typeface="Century Gothic" pitchFamily="34" charset="-122"/>
+                <a:cs typeface="Century Gothic" pitchFamily="34" charset="-120"/>
+              </a:rPr>
+              <a:t>1</a:t>
+            </a:r>
+            <a:endParaRPr lang="en-US" sz="1700" dirty="0"/>
+          </a:p>
+        </p:txBody>
+      </p:sp>
+      <p:sp>
+        <p:nvSpPr>
+          <p:cNvPr id="6" name="Text 4"/>
+          <p:cNvSpPr txBox="1"/>
+          <p:nvPr/>
+        </p:nvSpPr>
+        <p:spPr>
+          <a:xfrm>
+            <a:off x="640080" y="1810512"/>
+            <a:ext cx="2514600" cy="411480"/>
           </a:xfrm>
           <a:prstGeom prst="rect">
             <a:avLst/>
@@ -11117,7 +10381,46 @@
               <a:buNone/>
             </a:pPr>
             <a:r>
-              <a:rPr lang="en-US" sz="2600" dirty="0">
+              <a:rPr lang="en-US" sz="1600" b="1" dirty="0">
+                <a:solidFill>
+                  <a:schemeClr val="tx1"/>
+                </a:solidFill>
+                <a:latin typeface="Century Gothic" pitchFamily="34" charset="0"/>
+                <a:ea typeface="Century Gothic" pitchFamily="34" charset="-122"/>
+                <a:cs typeface="Century Gothic" pitchFamily="34" charset="-120"/>
+              </a:rPr>
+              <a:t>En équipe de 3</a:t>
+            </a:r>
+            <a:endParaRPr lang="en-US" sz="1600" dirty="0"/>
+          </a:p>
+        </p:txBody>
+      </p:sp>
+      <p:sp>
+        <p:nvSpPr>
+          <p:cNvPr id="7" name="Text 5"/>
+          <p:cNvSpPr txBox="1"/>
+          <p:nvPr/>
+        </p:nvSpPr>
+        <p:spPr>
+          <a:xfrm>
+            <a:off x="731520" y="2176272"/>
+            <a:ext cx="2331720" cy="548640"/>
+          </a:xfrm>
+          <a:prstGeom prst="rect">
+            <a:avLst/>
+          </a:prstGeom>
+          <a:noFill/>
+          <a:ln/>
+        </p:spPr>
+        <p:txBody>
+          <a:bodyPr wrap="square" lIns="1016" tIns="1016" rIns="1016" bIns="1016" rtlCol="0" anchor="t"/>
+          <a:lstStyle/>
+          <a:p>
+            <a:pPr algn="ctr" indent="0" marL="0">
+              <a:buNone/>
+            </a:pPr>
+            <a:r>
+              <a:rPr lang="en-US" sz="1300" dirty="0">
                 <a:solidFill>
                   <a:schemeClr val="tx1"/>
                 </a:solidFill>
@@ -11125,85 +10428,7 @@
                 <a:ea typeface="Calibri" pitchFamily="34" charset="-122"/>
                 <a:cs typeface="Calibri" pitchFamily="34" charset="-120"/>
               </a:rPr>
-              <a:t>🎲</a:t>
-            </a:r>
-            <a:endParaRPr lang="en-US" sz="2600" dirty="0"/>
-          </a:p>
-        </p:txBody>
-      </p:sp>
-      <p:sp>
-        <p:nvSpPr>
-          <p:cNvPr id="5" name="Text 3"/>
-          <p:cNvSpPr txBox="1"/>
-          <p:nvPr/>
-        </p:nvSpPr>
-        <p:spPr>
-          <a:xfrm>
-            <a:off x="640080" y="1810512"/>
-            <a:ext cx="2514600" cy="365760"/>
-          </a:xfrm>
-          <a:prstGeom prst="rect">
-            <a:avLst/>
-          </a:prstGeom>
-          <a:noFill/>
-          <a:ln/>
-        </p:spPr>
-        <p:txBody>
-          <a:bodyPr wrap="square" lIns="1016" tIns="1016" rIns="1016" bIns="1016" rtlCol="0" anchor="t"/>
-          <a:lstStyle/>
-          <a:p>
-            <a:pPr algn="ctr" indent="0" marL="0">
-              <a:buNone/>
-            </a:pPr>
-            <a:r>
-              <a:rPr lang="en-US" sz="1600" b="1" dirty="0">
-                <a:solidFill>
-                  <a:schemeClr val="tx1"/>
-                </a:solidFill>
-                <a:latin typeface="Century Gothic" pitchFamily="34" charset="0"/>
-                <a:ea typeface="Century Gothic" pitchFamily="34" charset="-122"/>
-                <a:cs typeface="Century Gothic" pitchFamily="34" charset="-120"/>
-              </a:rPr>
-              <a:t>Équipe au hasard</a:t>
-            </a:r>
-            <a:endParaRPr lang="en-US" sz="1600" dirty="0"/>
-          </a:p>
-        </p:txBody>
-      </p:sp>
-      <p:sp>
-        <p:nvSpPr>
-          <p:cNvPr id="6" name="Text 4"/>
-          <p:cNvSpPr txBox="1"/>
-          <p:nvPr/>
-        </p:nvSpPr>
-        <p:spPr>
-          <a:xfrm>
-            <a:off x="731520" y="2176272"/>
-            <a:ext cx="2331720" cy="548640"/>
-          </a:xfrm>
-          <a:prstGeom prst="rect">
-            <a:avLst/>
-          </a:prstGeom>
-          <a:noFill/>
-          <a:ln/>
-        </p:spPr>
-        <p:txBody>
-          <a:bodyPr wrap="square" lIns="1016" tIns="1016" rIns="1016" bIns="1016" rtlCol="0" anchor="t"/>
-          <a:lstStyle/>
-          <a:p>
-            <a:pPr algn="ctr" indent="0" marL="0">
-              <a:buNone/>
-            </a:pPr>
-            <a:r>
-              <a:rPr lang="en-US" sz="1300" dirty="0">
-                <a:solidFill>
-                  <a:schemeClr val="tx1"/>
-                </a:solidFill>
-                <a:latin typeface="Calibri" pitchFamily="34" charset="0"/>
-                <a:ea typeface="Calibri" pitchFamily="34" charset="-122"/>
-                <a:cs typeface="Calibri" pitchFamily="34" charset="-120"/>
-              </a:rPr>
-              <a:t>On pige sa carte.</a:t>
+              <a:t>Formées par l'enseignante.</a:t>
             </a:r>
             <a:endParaRPr lang="en-US" sz="1300" dirty="0"/>
           </a:p>
@@ -11211,7 +10436,7 @@
       </p:sp>
       <p:sp>
         <p:nvSpPr>
-          <p:cNvPr id="7" name="carte"/>
+          <p:cNvPr id="8" name="carte"/>
           <p:cNvSpPr/>
           <p:nvPr/>
         </p:nvSpPr>
@@ -11245,14 +10470,78 @@
       </p:sp>
       <p:sp>
         <p:nvSpPr>
-          <p:cNvPr id="8" name="Text 6"/>
+          <p:cNvPr id="9" name="Shape 7"/>
+          <p:cNvSpPr/>
+          <p:nvPr/>
+        </p:nvSpPr>
+        <p:spPr>
+          <a:xfrm>
+            <a:off x="4370832" y="1298448"/>
+            <a:ext cx="457200" cy="457200"/>
+          </a:xfrm>
+          <a:prstGeom prst="ellipse">
+            <a:avLst/>
+          </a:prstGeom>
+          <a:solidFill>
+            <a:schemeClr val="accent1"/>
+          </a:solidFill>
+          <a:ln w="12700">
+            <a:solidFill>
+              <a:schemeClr val="accent1"/>
+            </a:solidFill>
+            <a:prstDash val="solid"/>
+          </a:ln>
+        </p:spPr>
+      </p:sp>
+      <p:sp>
+        <p:nvSpPr>
+          <p:cNvPr id="10" name="Text 8"/>
           <p:cNvSpPr txBox="1"/>
           <p:nvPr/>
         </p:nvSpPr>
         <p:spPr>
           <a:xfrm>
-            <a:off x="3337560" y="1261872"/>
-            <a:ext cx="2514600" cy="548640"/>
+            <a:off x="4370832" y="1298448"/>
+            <a:ext cx="457200" cy="457200"/>
+          </a:xfrm>
+          <a:prstGeom prst="rect">
+            <a:avLst/>
+          </a:prstGeom>
+          <a:noFill/>
+          <a:ln/>
+        </p:spPr>
+        <p:txBody>
+          <a:bodyPr wrap="square" lIns="0" tIns="0" rIns="0" bIns="0" rtlCol="0" anchor="ctr"/>
+          <a:lstStyle/>
+          <a:p>
+            <a:pPr algn="ctr" indent="0" marL="0">
+              <a:buNone/>
+            </a:pPr>
+            <a:r>
+              <a:rPr lang="en-US" sz="1700" b="1" dirty="0">
+                <a:solidFill>
+                  <a:srgbClr val="FFFFFF"/>
+                </a:solidFill>
+                <a:latin typeface="Century Gothic" pitchFamily="34" charset="0"/>
+                <a:ea typeface="Century Gothic" pitchFamily="34" charset="-122"/>
+                <a:cs typeface="Century Gothic" pitchFamily="34" charset="-120"/>
+              </a:rPr>
+              <a:t>2</a:t>
+            </a:r>
+            <a:endParaRPr lang="en-US" sz="1700" dirty="0"/>
+          </a:p>
+        </p:txBody>
+      </p:sp>
+      <p:sp>
+        <p:nvSpPr>
+          <p:cNvPr id="11" name="Text 9"/>
+          <p:cNvSpPr txBox="1"/>
+          <p:nvPr/>
+        </p:nvSpPr>
+        <p:spPr>
+          <a:xfrm>
+            <a:off x="3337560" y="1810512"/>
+            <a:ext cx="2514600" cy="411480"/>
           </a:xfrm>
           <a:prstGeom prst="rect">
             <a:avLst/>
@@ -11268,7 +10557,46 @@
               <a:buNone/>
             </a:pPr>
             <a:r>
-              <a:rPr lang="en-US" sz="2600" dirty="0">
+              <a:rPr lang="en-US" sz="1600" b="1" dirty="0">
+                <a:solidFill>
+                  <a:schemeClr val="tx1"/>
+                </a:solidFill>
+                <a:latin typeface="Century Gothic" pitchFamily="34" charset="0"/>
+                <a:ea typeface="Century Gothic" pitchFamily="34" charset="-122"/>
+                <a:cs typeface="Century Gothic" pitchFamily="34" charset="-120"/>
+              </a:rPr>
+              <a:t>Un seul crayon</a:t>
+            </a:r>
+            <a:endParaRPr lang="en-US" sz="1600" dirty="0"/>
+          </a:p>
+        </p:txBody>
+      </p:sp>
+      <p:sp>
+        <p:nvSpPr>
+          <p:cNvPr id="12" name="Text 10"/>
+          <p:cNvSpPr txBox="1"/>
+          <p:nvPr/>
+        </p:nvSpPr>
+        <p:spPr>
+          <a:xfrm>
+            <a:off x="3429000" y="2176272"/>
+            <a:ext cx="2331720" cy="548640"/>
+          </a:xfrm>
+          <a:prstGeom prst="rect">
+            <a:avLst/>
+          </a:prstGeom>
+          <a:noFill/>
+          <a:ln/>
+        </p:spPr>
+        <p:txBody>
+          <a:bodyPr wrap="square" lIns="1016" tIns="1016" rIns="1016" bIns="1016" rtlCol="0" anchor="t"/>
+          <a:lstStyle/>
+          <a:p>
+            <a:pPr algn="ctr" indent="0" marL="0">
+              <a:buNone/>
+            </a:pPr>
+            <a:r>
+              <a:rPr lang="en-US" sz="1300" dirty="0">
                 <a:solidFill>
                   <a:schemeClr val="tx1"/>
                 </a:solidFill>
@@ -11276,46 +10604,144 @@
                 <a:ea typeface="Calibri" pitchFamily="34" charset="-122"/>
                 <a:cs typeface="Calibri" pitchFamily="34" charset="-120"/>
               </a:rPr>
-              <a:t>🧍</a:t>
-            </a:r>
-            <a:endParaRPr lang="en-US" sz="2600" dirty="0"/>
-          </a:p>
-        </p:txBody>
-      </p:sp>
-      <p:sp>
-        <p:nvSpPr>
-          <p:cNvPr id="9" name="Text 7"/>
+              <a:t>Il change de main à chaque pub.</a:t>
+            </a:r>
+            <a:endParaRPr lang="en-US" sz="1300" dirty="0"/>
+          </a:p>
+        </p:txBody>
+      </p:sp>
+      <p:sp>
+        <p:nvSpPr>
+          <p:cNvPr id="13" name="carte"/>
+          <p:cNvSpPr/>
+          <p:nvPr/>
+        </p:nvSpPr>
+        <p:spPr>
+          <a:xfrm>
+            <a:off x="6035040" y="1188720"/>
+            <a:ext cx="2514600" cy="1600200"/>
+          </a:xfrm>
+          <a:prstGeom prst="roundRect">
+            <a:avLst>
+              <a:gd name="adj" fmla="val 10286"/>
+            </a:avLst>
+          </a:prstGeom>
+          <a:solidFill>
+            <a:schemeClr val="accent2"/>
+          </a:solidFill>
+          <a:ln w="12700">
+            <a:solidFill>
+              <a:schemeClr val="accent2"/>
+            </a:solidFill>
+            <a:prstDash val="solid"/>
+          </a:ln>
+          <a:effectLst>
+            <a:outerShdw sx="100000" sy="100000" kx="0" ky="0" algn="bl" rotWithShape="0" blurRad="101600" dist="38100" dir="5400000">
+              <a:srgbClr val="BFCFCC">
+                <a:alpha val="100000"/>
+              </a:srgbClr>
+            </a:outerShdw>
+          </a:effectLst>
+        </p:spPr>
+      </p:sp>
+      <p:sp>
+        <p:nvSpPr>
+          <p:cNvPr id="14" name="Shape 12"/>
+          <p:cNvSpPr/>
+          <p:nvPr/>
+        </p:nvSpPr>
+        <p:spPr>
+          <a:xfrm>
+            <a:off x="7068312" y="1298448"/>
+            <a:ext cx="457200" cy="457200"/>
+          </a:xfrm>
+          <a:prstGeom prst="ellipse">
+            <a:avLst/>
+          </a:prstGeom>
+          <a:solidFill>
+            <a:schemeClr val="accent1"/>
+          </a:solidFill>
+          <a:ln w="12700">
+            <a:solidFill>
+              <a:schemeClr val="accent1"/>
+            </a:solidFill>
+            <a:prstDash val="solid"/>
+          </a:ln>
+        </p:spPr>
+      </p:sp>
+      <p:sp>
+        <p:nvSpPr>
+          <p:cNvPr id="15" name="Text 13"/>
           <p:cNvSpPr txBox="1"/>
           <p:nvPr/>
         </p:nvSpPr>
         <p:spPr>
           <a:xfrm>
-            <a:off x="3337560" y="1810512"/>
-            <a:ext cx="2514600" cy="365760"/>
-          </a:xfrm>
-          <a:prstGeom prst="rect">
-            <a:avLst/>
-          </a:prstGeom>
-          <a:noFill/>
-          <a:ln/>
-        </p:spPr>
-        <p:txBody>
-          <a:bodyPr wrap="square" lIns="1016" tIns="1016" rIns="1016" bIns="1016" rtlCol="0" anchor="t"/>
+            <a:off x="7068312" y="1298448"/>
+            <a:ext cx="457200" cy="457200"/>
+          </a:xfrm>
+          <a:prstGeom prst="rect">
+            <a:avLst/>
+          </a:prstGeom>
+          <a:noFill/>
+          <a:ln/>
+        </p:spPr>
+        <p:txBody>
+          <a:bodyPr wrap="square" lIns="0" tIns="0" rIns="0" bIns="0" rtlCol="0" anchor="ctr"/>
           <a:lstStyle/>
           <a:p>
             <a:pPr algn="ctr" indent="0" marL="0">
               <a:buNone/>
             </a:pPr>
             <a:r>
-              <a:rPr lang="en-US" sz="1600" b="1" dirty="0">
-                <a:solidFill>
-                  <a:schemeClr val="tx1"/>
+              <a:rPr lang="en-US" sz="1700" b="1" dirty="0">
+                <a:solidFill>
+                  <a:srgbClr val="FFFFFF"/>
                 </a:solidFill>
                 <a:latin typeface="Century Gothic" pitchFamily="34" charset="0"/>
                 <a:ea typeface="Century Gothic" pitchFamily="34" charset="-122"/>
                 <a:cs typeface="Century Gothic" pitchFamily="34" charset="-120"/>
               </a:rPr>
-              <a:t>Debout au tableau</a:t>
+              <a:t>3</a:t>
+            </a:r>
+            <a:endParaRPr lang="en-US" sz="1700" dirty="0"/>
+          </a:p>
+        </p:txBody>
+      </p:sp>
+      <p:sp>
+        <p:nvSpPr>
+          <p:cNvPr id="16" name="Text 14"/>
+          <p:cNvSpPr txBox="1"/>
+          <p:nvPr/>
+        </p:nvSpPr>
+        <p:spPr>
+          <a:xfrm>
+            <a:off x="6035040" y="1810512"/>
+            <a:ext cx="2514600" cy="411480"/>
+          </a:xfrm>
+          <a:prstGeom prst="rect">
+            <a:avLst/>
+          </a:prstGeom>
+          <a:noFill/>
+          <a:ln/>
+        </p:spPr>
+        <p:txBody>
+          <a:bodyPr wrap="square" lIns="1016" tIns="1016" rIns="1016" bIns="1016" rtlCol="0" anchor="t"/>
+          <a:lstStyle/>
+          <a:p>
+            <a:pPr algn="ctr" indent="0" marL="0">
+              <a:buNone/>
+            </a:pPr>
+            <a:r>
+              <a:rPr lang="en-US" sz="1600" b="1" dirty="0">
+                <a:solidFill>
+                  <a:schemeClr val="tx1"/>
+                </a:solidFill>
+                <a:latin typeface="Century Gothic" pitchFamily="34" charset="0"/>
+                <a:ea typeface="Century Gothic" pitchFamily="34" charset="-122"/>
+                <a:cs typeface="Century Gothic" pitchFamily="34" charset="-120"/>
+              </a:rPr>
+              <a:t>On n'efface pas</a:t>
             </a:r>
             <a:endParaRPr lang="en-US" sz="1600" dirty="0"/>
           </a:p>
@@ -11323,13 +10749,13 @@
       </p:sp>
       <p:sp>
         <p:nvSpPr>
-          <p:cNvPr id="10" name="Text 8"/>
+          <p:cNvPr id="17" name="Text 15"/>
           <p:cNvSpPr txBox="1"/>
           <p:nvPr/>
         </p:nvSpPr>
         <p:spPr>
           <a:xfrm>
-            <a:off x="3429000" y="2176272"/>
+            <a:off x="6126480" y="2176272"/>
             <a:ext cx="2331720" cy="548640"/>
           </a:xfrm>
           <a:prstGeom prst="rect">
@@ -11354,7 +10780,7 @@
                 <a:ea typeface="Calibri" pitchFamily="34" charset="-122"/>
                 <a:cs typeface="Calibri" pitchFamily="34" charset="-120"/>
               </a:rPr>
-              <a:t>On écrit au mur.</a:t>
+              <a:t>On barre : nos essais sont des traces.</a:t>
             </a:r>
             <a:endParaRPr lang="en-US" sz="1300" dirty="0"/>
           </a:p>
@@ -11362,13 +10788,13 @@
       </p:sp>
       <p:sp>
         <p:nvSpPr>
-          <p:cNvPr id="11" name="carte"/>
+          <p:cNvPr id="18" name="carte"/>
           <p:cNvSpPr/>
           <p:nvPr/>
         </p:nvSpPr>
         <p:spPr>
           <a:xfrm>
-            <a:off x="6035040" y="1188720"/>
+            <a:off x="640080" y="2971800"/>
             <a:ext cx="2514600" cy="1600200"/>
           </a:xfrm>
           <a:prstGeom prst="roundRect">
@@ -11396,14 +10822,14 @@
       </p:sp>
       <p:sp>
         <p:nvSpPr>
-          <p:cNvPr id="12" name="Text 10"/>
+          <p:cNvPr id="19" name="Text 17"/>
           <p:cNvSpPr txBox="1"/>
           <p:nvPr/>
         </p:nvSpPr>
         <p:spPr>
           <a:xfrm>
-            <a:off x="6035040" y="1261872"/>
-            <a:ext cx="2514600" cy="548640"/>
+            <a:off x="640080" y="3291840"/>
+            <a:ext cx="2514600" cy="411480"/>
           </a:xfrm>
           <a:prstGeom prst="rect">
             <a:avLst/>
@@ -11419,7 +10845,46 @@
               <a:buNone/>
             </a:pPr>
             <a:r>
-              <a:rPr lang="en-US" sz="2600" dirty="0">
+              <a:rPr lang="en-US" sz="1600" b="1" dirty="0">
+                <a:solidFill>
+                  <a:schemeClr val="tx1"/>
+                </a:solidFill>
+                <a:latin typeface="Century Gothic" pitchFamily="34" charset="0"/>
+                <a:ea typeface="Century Gothic" pitchFamily="34" charset="-122"/>
+                <a:cs typeface="Century Gothic" pitchFamily="34" charset="-120"/>
+              </a:rPr>
+              <a:t>1. Les ruses</a:t>
+            </a:r>
+            <a:endParaRPr lang="en-US" sz="1600" dirty="0"/>
+          </a:p>
+        </p:txBody>
+      </p:sp>
+      <p:sp>
+        <p:nvSpPr>
+          <p:cNvPr id="20" name="Text 18"/>
+          <p:cNvSpPr txBox="1"/>
+          <p:nvPr/>
+        </p:nvSpPr>
+        <p:spPr>
+          <a:xfrm>
+            <a:off x="731520" y="3749040"/>
+            <a:ext cx="2331720" cy="548640"/>
+          </a:xfrm>
+          <a:prstGeom prst="rect">
+            <a:avLst/>
+          </a:prstGeom>
+          <a:noFill/>
+          <a:ln/>
+        </p:spPr>
+        <p:txBody>
+          <a:bodyPr wrap="square" lIns="1016" tIns="1016" rIns="1016" bIns="1016" rtlCol="0" anchor="t"/>
+          <a:lstStyle/>
+          <a:p>
+            <a:pPr algn="ctr" indent="0" marL="0">
+              <a:buNone/>
+            </a:pPr>
+            <a:r>
+              <a:rPr lang="en-US" sz="1300" dirty="0">
                 <a:solidFill>
                   <a:schemeClr val="tx1"/>
                 </a:solidFill>
@@ -11427,85 +10892,7 @@
                 <a:ea typeface="Calibri" pitchFamily="34" charset="-122"/>
                 <a:cs typeface="Calibri" pitchFamily="34" charset="-120"/>
               </a:rPr>
-              <a:t>✏️</a:t>
-            </a:r>
-            <a:endParaRPr lang="en-US" sz="2600" dirty="0"/>
-          </a:p>
-        </p:txBody>
-      </p:sp>
-      <p:sp>
-        <p:nvSpPr>
-          <p:cNvPr id="13" name="Text 11"/>
-          <p:cNvSpPr txBox="1"/>
-          <p:nvPr/>
-        </p:nvSpPr>
-        <p:spPr>
-          <a:xfrm>
-            <a:off x="6035040" y="1810512"/>
-            <a:ext cx="2514600" cy="365760"/>
-          </a:xfrm>
-          <a:prstGeom prst="rect">
-            <a:avLst/>
-          </a:prstGeom>
-          <a:noFill/>
-          <a:ln/>
-        </p:spPr>
-        <p:txBody>
-          <a:bodyPr wrap="square" lIns="1016" tIns="1016" rIns="1016" bIns="1016" rtlCol="0" anchor="t"/>
-          <a:lstStyle/>
-          <a:p>
-            <a:pPr algn="ctr" indent="0" marL="0">
-              <a:buNone/>
-            </a:pPr>
-            <a:r>
-              <a:rPr lang="en-US" sz="1600" b="1" dirty="0">
-                <a:solidFill>
-                  <a:schemeClr val="tx1"/>
-                </a:solidFill>
-                <a:latin typeface="Century Gothic" pitchFamily="34" charset="0"/>
-                <a:ea typeface="Century Gothic" pitchFamily="34" charset="-122"/>
-                <a:cs typeface="Century Gothic" pitchFamily="34" charset="-120"/>
-              </a:rPr>
-              <a:t>UN seul crayon</a:t>
-            </a:r>
-            <a:endParaRPr lang="en-US" sz="1600" dirty="0"/>
-          </a:p>
-        </p:txBody>
-      </p:sp>
-      <p:sp>
-        <p:nvSpPr>
-          <p:cNvPr id="14" name="Text 12"/>
-          <p:cNvSpPr txBox="1"/>
-          <p:nvPr/>
-        </p:nvSpPr>
-        <p:spPr>
-          <a:xfrm>
-            <a:off x="6126480" y="2176272"/>
-            <a:ext cx="2331720" cy="548640"/>
-          </a:xfrm>
-          <a:prstGeom prst="rect">
-            <a:avLst/>
-          </a:prstGeom>
-          <a:noFill/>
-          <a:ln/>
-        </p:spPr>
-        <p:txBody>
-          <a:bodyPr wrap="square" lIns="1016" tIns="1016" rIns="1016" bIns="1016" rtlCol="0" anchor="t"/>
-          <a:lstStyle/>
-          <a:p>
-            <a:pPr algn="ctr" indent="0" marL="0">
-              <a:buNone/>
-            </a:pPr>
-            <a:r>
-              <a:rPr lang="en-US" sz="1300" dirty="0">
-                <a:solidFill>
-                  <a:schemeClr val="tx1"/>
-                </a:solidFill>
-                <a:latin typeface="Calibri" pitchFamily="34" charset="0"/>
-                <a:ea typeface="Calibri" pitchFamily="34" charset="-122"/>
-                <a:cs typeface="Calibri" pitchFamily="34" charset="-120"/>
-              </a:rPr>
-              <a:t>Il change de main à chaque pub.</a:t>
+              <a:t>Comment la pub donne-t-elle envie ?</a:t>
             </a:r>
             <a:endParaRPr lang="en-US" sz="1300" dirty="0"/>
           </a:p>
@@ -11513,158 +10900,7 @@
       </p:sp>
       <p:sp>
         <p:nvSpPr>
-          <p:cNvPr id="15" name="carte"/>
-          <p:cNvSpPr/>
-          <p:nvPr/>
-        </p:nvSpPr>
-        <p:spPr>
-          <a:xfrm>
-            <a:off x="640080" y="2971800"/>
-            <a:ext cx="2514600" cy="1600200"/>
-          </a:xfrm>
-          <a:prstGeom prst="roundRect">
-            <a:avLst>
-              <a:gd name="adj" fmla="val 10286"/>
-            </a:avLst>
-          </a:prstGeom>
-          <a:solidFill>
-            <a:schemeClr val="accent2"/>
-          </a:solidFill>
-          <a:ln w="12700">
-            <a:solidFill>
-              <a:schemeClr val="accent2"/>
-            </a:solidFill>
-            <a:prstDash val="solid"/>
-          </a:ln>
-          <a:effectLst>
-            <a:outerShdw sx="100000" sy="100000" kx="0" ky="0" algn="bl" rotWithShape="0" blurRad="101600" dist="38100" dir="5400000">
-              <a:srgbClr val="BFCFCC">
-                <a:alpha val="100000"/>
-              </a:srgbClr>
-            </a:outerShdw>
-          </a:effectLst>
-        </p:spPr>
-      </p:sp>
-      <p:sp>
-        <p:nvSpPr>
-          <p:cNvPr id="16" name="Text 14"/>
-          <p:cNvSpPr txBox="1"/>
-          <p:nvPr/>
-        </p:nvSpPr>
-        <p:spPr>
-          <a:xfrm>
-            <a:off x="640080" y="3044952"/>
-            <a:ext cx="2514600" cy="548640"/>
-          </a:xfrm>
-          <a:prstGeom prst="rect">
-            <a:avLst/>
-          </a:prstGeom>
-          <a:noFill/>
-          <a:ln/>
-        </p:spPr>
-        <p:txBody>
-          <a:bodyPr wrap="square" lIns="1016" tIns="1016" rIns="1016" bIns="1016" rtlCol="0" anchor="t"/>
-          <a:lstStyle/>
-          <a:p>
-            <a:pPr algn="ctr" indent="0" marL="0">
-              <a:buNone/>
-            </a:pPr>
-            <a:r>
-              <a:rPr lang="en-US" sz="2600" dirty="0">
-                <a:solidFill>
-                  <a:schemeClr val="tx1"/>
-                </a:solidFill>
-                <a:latin typeface="Calibri" pitchFamily="34" charset="0"/>
-                <a:ea typeface="Calibri" pitchFamily="34" charset="-122"/>
-                <a:cs typeface="Calibri" pitchFamily="34" charset="-120"/>
-              </a:rPr>
-              <a:t>🔎</a:t>
-            </a:r>
-            <a:endParaRPr lang="en-US" sz="2600" dirty="0"/>
-          </a:p>
-        </p:txBody>
-      </p:sp>
-      <p:sp>
-        <p:nvSpPr>
-          <p:cNvPr id="17" name="Text 15"/>
-          <p:cNvSpPr txBox="1"/>
-          <p:nvPr/>
-        </p:nvSpPr>
-        <p:spPr>
-          <a:xfrm>
-            <a:off x="640080" y="3593592"/>
-            <a:ext cx="2514600" cy="365760"/>
-          </a:xfrm>
-          <a:prstGeom prst="rect">
-            <a:avLst/>
-          </a:prstGeom>
-          <a:noFill/>
-          <a:ln/>
-        </p:spPr>
-        <p:txBody>
-          <a:bodyPr wrap="square" lIns="1016" tIns="1016" rIns="1016" bIns="1016" rtlCol="0" anchor="t"/>
-          <a:lstStyle/>
-          <a:p>
-            <a:pPr algn="ctr" indent="0" marL="0">
-              <a:buNone/>
-            </a:pPr>
-            <a:r>
-              <a:rPr lang="en-US" sz="1600" b="1" dirty="0">
-                <a:solidFill>
-                  <a:schemeClr val="tx1"/>
-                </a:solidFill>
-                <a:latin typeface="Century Gothic" pitchFamily="34" charset="0"/>
-                <a:ea typeface="Century Gothic" pitchFamily="34" charset="-122"/>
-                <a:cs typeface="Century Gothic" pitchFamily="34" charset="-120"/>
-              </a:rPr>
-              <a:t>1. Les ruses</a:t>
-            </a:r>
-            <a:endParaRPr lang="en-US" sz="1600" dirty="0"/>
-          </a:p>
-        </p:txBody>
-      </p:sp>
-      <p:sp>
-        <p:nvSpPr>
-          <p:cNvPr id="18" name="Text 16"/>
-          <p:cNvSpPr txBox="1"/>
-          <p:nvPr/>
-        </p:nvSpPr>
-        <p:spPr>
-          <a:xfrm>
-            <a:off x="731520" y="3959352"/>
-            <a:ext cx="2331720" cy="548640"/>
-          </a:xfrm>
-          <a:prstGeom prst="rect">
-            <a:avLst/>
-          </a:prstGeom>
-          <a:noFill/>
-          <a:ln/>
-        </p:spPr>
-        <p:txBody>
-          <a:bodyPr wrap="square" lIns="1016" tIns="1016" rIns="1016" bIns="1016" rtlCol="0" anchor="t"/>
-          <a:lstStyle/>
-          <a:p>
-            <a:pPr algn="ctr" indent="0" marL="0">
-              <a:buNone/>
-            </a:pPr>
-            <a:r>
-              <a:rPr lang="en-US" sz="1300" dirty="0">
-                <a:solidFill>
-                  <a:schemeClr val="tx1"/>
-                </a:solidFill>
-                <a:latin typeface="Calibri" pitchFamily="34" charset="0"/>
-                <a:ea typeface="Calibri" pitchFamily="34" charset="-122"/>
-                <a:cs typeface="Calibri" pitchFamily="34" charset="-120"/>
-              </a:rPr>
-              <a:t>Comment la pub donne envie ?</a:t>
-            </a:r>
-            <a:endParaRPr lang="en-US" sz="1300" dirty="0"/>
-          </a:p>
-        </p:txBody>
-      </p:sp>
-      <p:sp>
-        <p:nvSpPr>
-          <p:cNvPr id="19" name="carte"/>
+          <p:cNvPr id="21" name="carte"/>
           <p:cNvSpPr/>
           <p:nvPr/>
         </p:nvSpPr>
@@ -11698,14 +10934,14 @@
       </p:sp>
       <p:sp>
         <p:nvSpPr>
-          <p:cNvPr id="20" name="Text 18"/>
+          <p:cNvPr id="22" name="Text 20"/>
           <p:cNvSpPr txBox="1"/>
           <p:nvPr/>
         </p:nvSpPr>
         <p:spPr>
           <a:xfrm>
-            <a:off x="3337560" y="3044952"/>
-            <a:ext cx="2514600" cy="548640"/>
+            <a:off x="3337560" y="3291840"/>
+            <a:ext cx="2514600" cy="411480"/>
           </a:xfrm>
           <a:prstGeom prst="rect">
             <a:avLst/>
@@ -11721,7 +10957,46 @@
               <a:buNone/>
             </a:pPr>
             <a:r>
-              <a:rPr lang="en-US" sz="2600" dirty="0">
+              <a:rPr lang="en-US" sz="1600" b="1" dirty="0">
+                <a:solidFill>
+                  <a:schemeClr val="tx1"/>
+                </a:solidFill>
+                <a:latin typeface="Century Gothic" pitchFamily="34" charset="0"/>
+                <a:ea typeface="Century Gothic" pitchFamily="34" charset="-122"/>
+                <a:cs typeface="Century Gothic" pitchFamily="34" charset="-120"/>
+              </a:rPr>
+              <a:t>2. Le vrai prix</a:t>
+            </a:r>
+            <a:endParaRPr lang="en-US" sz="1600" dirty="0"/>
+          </a:p>
+        </p:txBody>
+      </p:sp>
+      <p:sp>
+        <p:nvSpPr>
+          <p:cNvPr id="23" name="Text 21"/>
+          <p:cNvSpPr txBox="1"/>
+          <p:nvPr/>
+        </p:nvSpPr>
+        <p:spPr>
+          <a:xfrm>
+            <a:off x="3429000" y="3749040"/>
+            <a:ext cx="2331720" cy="548640"/>
+          </a:xfrm>
+          <a:prstGeom prst="rect">
+            <a:avLst/>
+          </a:prstGeom>
+          <a:noFill/>
+          <a:ln/>
+        </p:spPr>
+        <p:txBody>
+          <a:bodyPr wrap="square" lIns="1016" tIns="1016" rIns="1016" bIns="1016" rtlCol="0" anchor="t"/>
+          <a:lstStyle/>
+          <a:p>
+            <a:pPr algn="ctr" indent="0" marL="0">
+              <a:buNone/>
+            </a:pPr>
+            <a:r>
+              <a:rPr lang="en-US" sz="1300" dirty="0">
                 <a:solidFill>
                   <a:schemeClr val="tx1"/>
                 </a:solidFill>
@@ -11729,84 +11004,6 @@
                 <a:ea typeface="Calibri" pitchFamily="34" charset="-122"/>
                 <a:cs typeface="Calibri" pitchFamily="34" charset="-120"/>
               </a:rPr>
-              <a:t>🧮</a:t>
-            </a:r>
-            <a:endParaRPr lang="en-US" sz="2600" dirty="0"/>
-          </a:p>
-        </p:txBody>
-      </p:sp>
-      <p:sp>
-        <p:nvSpPr>
-          <p:cNvPr id="21" name="Text 19"/>
-          <p:cNvSpPr txBox="1"/>
-          <p:nvPr/>
-        </p:nvSpPr>
-        <p:spPr>
-          <a:xfrm>
-            <a:off x="3337560" y="3593592"/>
-            <a:ext cx="2514600" cy="365760"/>
-          </a:xfrm>
-          <a:prstGeom prst="rect">
-            <a:avLst/>
-          </a:prstGeom>
-          <a:noFill/>
-          <a:ln/>
-        </p:spPr>
-        <p:txBody>
-          <a:bodyPr wrap="square" lIns="1016" tIns="1016" rIns="1016" bIns="1016" rtlCol="0" anchor="t"/>
-          <a:lstStyle/>
-          <a:p>
-            <a:pPr algn="ctr" indent="0" marL="0">
-              <a:buNone/>
-            </a:pPr>
-            <a:r>
-              <a:rPr lang="en-US" sz="1600" b="1" dirty="0">
-                <a:solidFill>
-                  <a:schemeClr val="tx1"/>
-                </a:solidFill>
-                <a:latin typeface="Century Gothic" pitchFamily="34" charset="0"/>
-                <a:ea typeface="Century Gothic" pitchFamily="34" charset="-122"/>
-                <a:cs typeface="Century Gothic" pitchFamily="34" charset="-120"/>
-              </a:rPr>
-              <a:t>2. Le vrai prix</a:t>
-            </a:r>
-            <a:endParaRPr lang="en-US" sz="1600" dirty="0"/>
-          </a:p>
-        </p:txBody>
-      </p:sp>
-      <p:sp>
-        <p:nvSpPr>
-          <p:cNvPr id="22" name="Text 20"/>
-          <p:cNvSpPr txBox="1"/>
-          <p:nvPr/>
-        </p:nvSpPr>
-        <p:spPr>
-          <a:xfrm>
-            <a:off x="3429000" y="3959352"/>
-            <a:ext cx="2331720" cy="548640"/>
-          </a:xfrm>
-          <a:prstGeom prst="rect">
-            <a:avLst/>
-          </a:prstGeom>
-          <a:noFill/>
-          <a:ln/>
-        </p:spPr>
-        <p:txBody>
-          <a:bodyPr wrap="square" lIns="1016" tIns="1016" rIns="1016" bIns="1016" rtlCol="0" anchor="t"/>
-          <a:lstStyle/>
-          <a:p>
-            <a:pPr algn="ctr" indent="0" marL="0">
-              <a:buNone/>
-            </a:pPr>
-            <a:r>
-              <a:rPr lang="en-US" sz="1300" dirty="0">
-                <a:solidFill>
-                  <a:schemeClr val="tx1"/>
-                </a:solidFill>
-                <a:latin typeface="Calibri" pitchFamily="34" charset="0"/>
-                <a:ea typeface="Calibri" pitchFamily="34" charset="-122"/>
-                <a:cs typeface="Calibri" pitchFamily="34" charset="-120"/>
-              </a:rPr>
               <a:t>Environ combien, VRAIMENT ?</a:t>
             </a:r>
             <a:endParaRPr lang="en-US" sz="1300" dirty="0"/>
@@ -11815,7 +11012,7 @@
       </p:sp>
       <p:sp>
         <p:nvSpPr>
-          <p:cNvPr id="23" name="carte"/>
+          <p:cNvPr id="24" name="carte"/>
           <p:cNvSpPr/>
           <p:nvPr/>
         </p:nvSpPr>
@@ -11849,53 +11046,14 @@
       </p:sp>
       <p:sp>
         <p:nvSpPr>
-          <p:cNvPr id="24" name="Text 22"/>
-          <p:cNvSpPr txBox="1"/>
-          <p:nvPr/>
-        </p:nvSpPr>
-        <p:spPr>
-          <a:xfrm>
-            <a:off x="6035040" y="3044952"/>
-            <a:ext cx="2514600" cy="548640"/>
-          </a:xfrm>
-          <a:prstGeom prst="rect">
-            <a:avLst/>
-          </a:prstGeom>
-          <a:noFill/>
-          <a:ln/>
-        </p:spPr>
-        <p:txBody>
-          <a:bodyPr wrap="square" lIns="1016" tIns="1016" rIns="1016" bIns="1016" rtlCol="0" anchor="t"/>
-          <a:lstStyle/>
-          <a:p>
-            <a:pPr algn="ctr" indent="0" marL="0">
-              <a:buNone/>
-            </a:pPr>
-            <a:r>
-              <a:rPr lang="en-US" sz="2600" dirty="0">
-                <a:solidFill>
-                  <a:schemeClr val="tx1"/>
-                </a:solidFill>
-                <a:latin typeface="Calibri" pitchFamily="34" charset="0"/>
-                <a:ea typeface="Calibri" pitchFamily="34" charset="-122"/>
-                <a:cs typeface="Calibri" pitchFamily="34" charset="-120"/>
-              </a:rPr>
-              <a:t>🌱✨</a:t>
-            </a:r>
-            <a:endParaRPr lang="en-US" sz="2600" dirty="0"/>
-          </a:p>
-        </p:txBody>
-      </p:sp>
-      <p:sp>
-        <p:nvSpPr>
           <p:cNvPr id="25" name="Text 23"/>
           <p:cNvSpPr txBox="1"/>
           <p:nvPr/>
         </p:nvSpPr>
         <p:spPr>
           <a:xfrm>
-            <a:off x="6035040" y="3593592"/>
-            <a:ext cx="2514600" cy="365760"/>
+            <a:off x="6035040" y="3291840"/>
+            <a:ext cx="2514600" cy="411480"/>
           </a:xfrm>
           <a:prstGeom prst="rect">
             <a:avLst/>
@@ -11933,7 +11091,7 @@
         </p:nvSpPr>
         <p:spPr>
           <a:xfrm>
-            <a:off x="6126480" y="3959352"/>
+            <a:off x="6126480" y="3749040"/>
             <a:ext cx="2331720" cy="548640"/>
           </a:xfrm>
           <a:prstGeom prst="rect">
